--- a/docs/Room_Stylist_Presentation.pptx
+++ b/docs/Room_Stylist_Presentation.pptx
@@ -4,6 +4,9 @@
   <p:sldMasterIdLst>
     <p:sldMasterId id="2147483648" r:id="rId1"/>
   </p:sldMasterIdLst>
+  <p:notesMasterIdLst>
+    <p:notesMasterId r:id="rId13"/>
+  </p:notesMasterIdLst>
   <p:sldIdLst>
     <p:sldId id="256" r:id="rId2"/>
     <p:sldId id="257" r:id="rId3"/>
@@ -16,11 +19,7 @@
     <p:sldId id="264" r:id="rId10"/>
     <p:sldId id="265" r:id="rId11"/>
     <p:sldId id="266" r:id="rId12"/>
-    <p:sldId id="267" r:id="rId13"/>
   </p:sldIdLst>
-  <p:notesMasterIdLst>
-    <p:notesMasterId r:id="rId14"/>
-  </p:notesMasterIdLst>
   <p:sldSz cx="12192000" cy="6858000"/>
   <p:notesSz cx="6858000" cy="12192000"/>
   <p:defaultTextStyle>
@@ -115,6 +114,11 @@
       </a:defRPr>
     </a:lvl9pPr>
   </p:defaultTextStyle>
+  <p:extLst>
+    <p:ext uri="{EFAFB233-063F-42B5-8137-9DF3F51BA10A}">
+      <p15:sldGuideLst xmlns:p15="http://schemas.microsoft.com/office/powerpoint/2012/main"/>
+    </p:ext>
+  </p:extLst>
 </p:presentation>
 </file>
 
@@ -140,234 +144,10 @@
           <a:chExt cx="0" cy="0"/>
         </a:xfrm>
       </p:grpSpPr>
-      <p:sp>
-        <p:nvSpPr>
-          <p:cNvPr id="2" name="Header Placeholder 1"/>
-          <p:cNvSpPr>
-            <a:spLocks noGrp="1"/>
-          </p:cNvSpPr>
-          <p:nvPr>
-            <p:ph type="hdr" sz="quarter"/>
-          </p:nvPr>
-        </p:nvSpPr>
-        <p:spPr>
-          <a:xfrm>
-            <a:off x="0" y="0"/>
-            <a:ext cx="2971800" cy="458788"/>
-          </a:xfrm>
-          <a:prstGeom prst="rect">
-            <a:avLst/>
-          </a:prstGeom>
-        </p:spPr>
-        <p:txBody>
-          <a:bodyPr vert="horz" lIns="91440" tIns="45720" rIns="91440" bIns="45720" rtlCol="0"/>
-          <a:lstStyle>
-            <a:lvl1pPr algn="l">
-              <a:defRPr sz="1200"/>
-            </a:lvl1pPr>
-          </a:lstStyle>
-          <a:p>
-            <a:endParaRPr lang="en-US"/>
-          </a:p>
-        </p:txBody>
-      </p:sp>
-      <p:sp>
-        <p:nvSpPr>
-          <p:cNvPr id="3" name="Date Placeholder 2"/>
-          <p:cNvSpPr>
-            <a:spLocks noGrp="1"/>
-          </p:cNvSpPr>
-          <p:nvPr>
-            <p:ph type="dt" idx="1"/>
-          </p:nvPr>
-        </p:nvSpPr>
-        <p:spPr>
-          <a:xfrm>
-            <a:off x="3884613" y="0"/>
-            <a:ext cx="2971800" cy="458788"/>
-          </a:xfrm>
-          <a:prstGeom prst="rect">
-            <a:avLst/>
-          </a:prstGeom>
-        </p:spPr>
-        <p:txBody>
-          <a:bodyPr vert="horz" lIns="91440" tIns="45720" rIns="91440" bIns="45720" rtlCol="0"/>
-          <a:lstStyle>
-            <a:lvl1pPr algn="r">
-              <a:defRPr sz="1200"/>
-            </a:lvl1pPr>
-          </a:lstStyle>
-          <a:p>
-            <a:fld id="{5282F153-3F37-0F45-9E97-73ACFA13230C}" type="datetimeFigureOut">
-              <a:rPr lang="en-US"/>
-              <a:t>7/23/19</a:t>
-            </a:fld>
-            <a:endParaRPr lang="en-US"/>
-          </a:p>
-        </p:txBody>
-      </p:sp>
-      <p:sp>
-        <p:nvSpPr>
-          <p:cNvPr id="4" name="Slide Image Placeholder 3"/>
-          <p:cNvSpPr>
-            <a:spLocks noGrp="1" noRot="1" noChangeAspect="1"/>
-          </p:cNvSpPr>
-          <p:nvPr>
-            <p:ph type="sldImg" idx="2"/>
-          </p:nvPr>
-        </p:nvSpPr>
-        <p:spPr>
-          <a:xfrm>
-            <a:off x="685800" y="1143000"/>
-            <a:ext cx="5486400" cy="3086100"/>
-          </a:xfrm>
-          <a:prstGeom prst="rect">
-            <a:avLst/>
-          </a:prstGeom>
-          <a:noFill/>
-          <a:ln w="12700">
-            <a:solidFill>
-              <a:prstClr val="black"/>
-            </a:solidFill>
-          </a:ln>
-        </p:spPr>
-        <p:txBody>
-          <a:bodyPr vert="horz" lIns="91440" tIns="45720" rIns="91440" bIns="45720" rtlCol="0" anchor="ctr"/>
-          <a:lstStyle/>
-          <a:p>
-            <a:endParaRPr lang="en-US"/>
-          </a:p>
-        </p:txBody>
-      </p:sp>
-      <p:sp>
-        <p:nvSpPr>
-          <p:cNvPr id="5" name="Notes Placeholder 4"/>
-          <p:cNvSpPr>
-            <a:spLocks noGrp="1"/>
-          </p:cNvSpPr>
-          <p:nvPr>
-            <p:ph type="body" sz="quarter" idx="3"/>
-          </p:nvPr>
-        </p:nvSpPr>
-        <p:spPr>
-          <a:xfrm>
-            <a:off x="685800" y="4400550"/>
-            <a:ext cx="5486400" cy="3600450"/>
-          </a:xfrm>
-          <a:prstGeom prst="rect">
-            <a:avLst/>
-          </a:prstGeom>
-        </p:spPr>
-        <p:txBody>
-          <a:bodyPr vert="horz" lIns="91440" tIns="45720" rIns="91440" bIns="45720" rtlCol="0"/>
-          <a:lstStyle/>
-          <a:p>
-            <a:pPr lvl="0"/>
-            <a:r>
-              <a:rPr lang="en-US"/>
-              <a:t>Click to edit Master text styles</a:t>
-            </a:r>
-          </a:p>
-          <a:p>
-            <a:pPr lvl="1"/>
-            <a:r>
-              <a:rPr lang="en-US"/>
-              <a:t>Second level</a:t>
-            </a:r>
-          </a:p>
-          <a:p>
-            <a:pPr lvl="2"/>
-            <a:r>
-              <a:rPr lang="en-US"/>
-              <a:t>Third level</a:t>
-            </a:r>
-          </a:p>
-          <a:p>
-            <a:pPr lvl="3"/>
-            <a:r>
-              <a:rPr lang="en-US"/>
-              <a:t>Fourth level</a:t>
-            </a:r>
-          </a:p>
-          <a:p>
-            <a:pPr lvl="4"/>
-            <a:r>
-              <a:rPr lang="en-US"/>
-              <a:t>Fifth level</a:t>
-            </a:r>
-          </a:p>
-        </p:txBody>
-      </p:sp>
-      <p:sp>
-        <p:nvSpPr>
-          <p:cNvPr id="6" name="Footer Placeholder 5"/>
-          <p:cNvSpPr>
-            <a:spLocks noGrp="1"/>
-          </p:cNvSpPr>
-          <p:nvPr>
-            <p:ph type="ftr" sz="quarter" idx="4"/>
-          </p:nvPr>
-        </p:nvSpPr>
-        <p:spPr>
-          <a:xfrm>
-            <a:off x="0" y="8685213"/>
-            <a:ext cx="2971800" cy="458787"/>
-          </a:xfrm>
-          <a:prstGeom prst="rect">
-            <a:avLst/>
-          </a:prstGeom>
-        </p:spPr>
-        <p:txBody>
-          <a:bodyPr vert="horz" lIns="91440" tIns="45720" rIns="91440" bIns="45720" rtlCol="0" anchor="b"/>
-          <a:lstStyle>
-            <a:lvl1pPr algn="l">
-              <a:defRPr sz="1200"/>
-            </a:lvl1pPr>
-          </a:lstStyle>
-          <a:p>
-            <a:endParaRPr lang="en-US"/>
-          </a:p>
-        </p:txBody>
-      </p:sp>
-      <p:sp>
-        <p:nvSpPr>
-          <p:cNvPr id="7" name="Slide Number Placeholder 6"/>
-          <p:cNvSpPr>
-            <a:spLocks noGrp="1"/>
-          </p:cNvSpPr>
-          <p:nvPr>
-            <p:ph type="sldNum" sz="quarter" idx="5"/>
-          </p:nvPr>
-        </p:nvSpPr>
-        <p:spPr>
-          <a:xfrm>
-            <a:off x="3884613" y="8685213"/>
-            <a:ext cx="2971800" cy="458787"/>
-          </a:xfrm>
-          <a:prstGeom prst="rect">
-            <a:avLst/>
-          </a:prstGeom>
-        </p:spPr>
-        <p:txBody>
-          <a:bodyPr vert="horz" lIns="91440" tIns="45720" rIns="91440" bIns="45720" rtlCol="0" anchor="b"/>
-          <a:lstStyle>
-            <a:lvl1pPr algn="r">
-              <a:defRPr sz="1200"/>
-            </a:lvl1pPr>
-          </a:lstStyle>
-          <a:p>
-            <a:fld id="{CE5E9CC1-C706-0F49-92D6-E571CC5EEA8F}" type="slidenum">
-              <a:rPr lang="en-US"/>
-              <a:t>‹#›</a:t>
-            </a:fld>
-            <a:endParaRPr lang="en-US"/>
-          </a:p>
-        </p:txBody>
-      </p:sp>
     </p:spTree>
     <p:extLst>
       <p:ext uri="{BB962C8B-B14F-4D97-AF65-F5344CB8AC3E}">
-        <p14:creationId xmlns:p14="http://schemas.microsoft.com/office/powerpoint/2010/main" val="1024086991"/>
+        <p14:creationId xmlns:p14="http://schemas.microsoft.com/office/powerpoint/2010/main" val="2200615793"/>
       </p:ext>
     </p:extLst>
   </p:cSld>
@@ -511,10 +291,6 @@
           <a:bodyPr/>
           <a:lstStyle/>
           <a:p>
-            <a:r>
-              <a:rPr lang="en-US" dirty="0"/>
-              <a:t/>
-            </a:r>
             <a:endParaRPr lang="en-US" dirty="0"/>
           </a:p>
         </p:txBody>
@@ -599,10 +375,6 @@
           <a:bodyPr/>
           <a:lstStyle/>
           <a:p>
-            <a:r>
-              <a:rPr lang="en-US" dirty="0"/>
-              <a:t/>
-            </a:r>
             <a:endParaRPr lang="en-US" dirty="0"/>
           </a:p>
         </p:txBody>
@@ -687,10 +459,6 @@
           <a:bodyPr/>
           <a:lstStyle/>
           <a:p>
-            <a:r>
-              <a:rPr lang="en-US" dirty="0"/>
-              <a:t/>
-            </a:r>
             <a:endParaRPr lang="en-US" dirty="0"/>
           </a:p>
         </p:txBody>
@@ -713,94 +481,6 @@
             <a:fld id="{F7021451-1387-4CA6-816F-3879F97B5CBC}" type="slidenum">
               <a:rPr lang="en-US"/>
               <a:t>11</a:t>
-            </a:fld>
-            <a:endParaRPr lang="en-US"/>
-          </a:p>
-        </p:txBody>
-      </p:sp>
-    </p:spTree>
-    <p:extLst>
-      <p:ext uri="{BB962C8B-B14F-4D97-AF65-F5344CB8AC3E}">
-        <p14:creationId xmlns:p14="http://schemas.microsoft.com/office/powerpoint/2010/main" val="1024086991"/>
-      </p:ext>
-    </p:extLst>
-  </p:cSld>
-  <p:clrMapOvr>
-    <a:masterClrMapping/>
-  </p:clrMapOvr>
-</p:notes>
-</file>
-
-<file path=ppt/notesSlides/notesSlide12.xml><?xml version="1.0" encoding="utf-8"?>
-<p:notes xmlns:a="http://schemas.openxmlformats.org/drawingml/2006/main" xmlns:r="http://schemas.openxmlformats.org/officeDocument/2006/relationships" xmlns:p="http://schemas.openxmlformats.org/presentationml/2006/main">
-  <p:cSld>
-    <p:spTree>
-      <p:nvGrpSpPr>
-        <p:cNvPr id="1" name=""/>
-        <p:cNvGrpSpPr/>
-        <p:nvPr/>
-      </p:nvGrpSpPr>
-      <p:grpSpPr>
-        <a:xfrm>
-          <a:off x="0" y="0"/>
-          <a:ext cx="0" cy="0"/>
-          <a:chOff x="0" y="0"/>
-          <a:chExt cx="0" cy="0"/>
-        </a:xfrm>
-      </p:grpSpPr>
-      <p:sp>
-        <p:nvSpPr>
-          <p:cNvPr id="2" name="Slide Image Placeholder 1"/>
-          <p:cNvSpPr>
-            <a:spLocks noGrp="1" noRot="1" noChangeAspect="1"/>
-          </p:cNvSpPr>
-          <p:nvPr>
-            <p:ph type="sldImg"/>
-          </p:nvPr>
-        </p:nvSpPr>
-        <p:spPr/>
-      </p:sp>
-      <p:sp>
-        <p:nvSpPr>
-          <p:cNvPr id="3" name="Notes Placeholder 2"/>
-          <p:cNvSpPr>
-            <a:spLocks noGrp="1"/>
-          </p:cNvSpPr>
-          <p:nvPr>
-            <p:ph type="body" idx="1"/>
-          </p:nvPr>
-        </p:nvSpPr>
-        <p:spPr/>
-        <p:txBody>
-          <a:bodyPr/>
-          <a:lstStyle/>
-          <a:p>
-            <a:r>
-              <a:rPr lang="en-US" dirty="0"/>
-              <a:t/>
-            </a:r>
-            <a:endParaRPr lang="en-US" dirty="0"/>
-          </a:p>
-        </p:txBody>
-      </p:sp>
-      <p:sp>
-        <p:nvSpPr>
-          <p:cNvPr id="4" name="Slide Number Placeholder 3"/>
-          <p:cNvSpPr>
-            <a:spLocks noGrp="1"/>
-          </p:cNvSpPr>
-          <p:nvPr>
-            <p:ph type="sldNum" sz="quarter" idx="10"/>
-          </p:nvPr>
-        </p:nvSpPr>
-        <p:spPr/>
-        <p:txBody>
-          <a:bodyPr/>
-          <a:lstStyle/>
-          <a:p>
-            <a:fld id="{F7021451-1387-4CA6-816F-3879F97B5CBC}" type="slidenum">
-              <a:rPr lang="en-US"/>
-              <a:t>12</a:t>
             </a:fld>
             <a:endParaRPr lang="en-US"/>
           </a:p>
@@ -863,10 +543,6 @@
           <a:bodyPr/>
           <a:lstStyle/>
           <a:p>
-            <a:r>
-              <a:rPr lang="en-US" dirty="0"/>
-              <a:t/>
-            </a:r>
             <a:endParaRPr lang="en-US" dirty="0"/>
           </a:p>
         </p:txBody>
@@ -951,10 +627,6 @@
           <a:bodyPr/>
           <a:lstStyle/>
           <a:p>
-            <a:r>
-              <a:rPr lang="en-US" dirty="0"/>
-              <a:t/>
-            </a:r>
             <a:endParaRPr lang="en-US" dirty="0"/>
           </a:p>
         </p:txBody>
@@ -1039,10 +711,6 @@
           <a:bodyPr/>
           <a:lstStyle/>
           <a:p>
-            <a:r>
-              <a:rPr lang="en-US" dirty="0"/>
-              <a:t/>
-            </a:r>
             <a:endParaRPr lang="en-US" dirty="0"/>
           </a:p>
         </p:txBody>
@@ -1127,10 +795,6 @@
           <a:bodyPr/>
           <a:lstStyle/>
           <a:p>
-            <a:r>
-              <a:rPr lang="en-US" dirty="0"/>
-              <a:t/>
-            </a:r>
             <a:endParaRPr lang="en-US" dirty="0"/>
           </a:p>
         </p:txBody>
@@ -1215,10 +879,6 @@
           <a:bodyPr/>
           <a:lstStyle/>
           <a:p>
-            <a:r>
-              <a:rPr lang="en-US" dirty="0"/>
-              <a:t/>
-            </a:r>
             <a:endParaRPr lang="en-US" dirty="0"/>
           </a:p>
         </p:txBody>
@@ -1303,10 +963,6 @@
           <a:bodyPr/>
           <a:lstStyle/>
           <a:p>
-            <a:r>
-              <a:rPr lang="en-US" dirty="0"/>
-              <a:t/>
-            </a:r>
             <a:endParaRPr lang="en-US" dirty="0"/>
           </a:p>
         </p:txBody>
@@ -1391,10 +1047,6 @@
           <a:bodyPr/>
           <a:lstStyle/>
           <a:p>
-            <a:r>
-              <a:rPr lang="en-US" dirty="0"/>
-              <a:t/>
-            </a:r>
             <a:endParaRPr lang="en-US" dirty="0"/>
           </a:p>
         </p:txBody>
@@ -1479,10 +1131,6 @@
           <a:bodyPr/>
           <a:lstStyle/>
           <a:p>
-            <a:r>
-              <a:rPr lang="en-US" dirty="0"/>
-              <a:t/>
-            </a:r>
             <a:endParaRPr lang="en-US" dirty="0"/>
           </a:p>
         </p:txBody>
@@ -1556,6 +1204,11 @@
 <file path=ppt/slideMasters/slideMaster1.xml><?xml version="1.0" encoding="utf-8"?>
 <p:sldMaster xmlns:a="http://schemas.openxmlformats.org/drawingml/2006/main" xmlns:r="http://schemas.openxmlformats.org/officeDocument/2006/relationships" xmlns:p="http://schemas.openxmlformats.org/presentationml/2006/main">
   <p:cSld>
+    <p:bg>
+      <p:bgRef idx="1001">
+        <a:schemeClr val="bg1"/>
+      </p:bgRef>
+    </p:bg>
     <p:spTree>
       <p:nvGrpSpPr>
         <p:cNvPr id="1" name=""/>
@@ -1838,6 +1491,7 @@
         <a:solidFill>
           <a:srgbClr val="1C2B45"/>
         </a:solidFill>
+        <a:effectLst/>
       </p:bgPr>
     </p:bg>
     <p:spTree>
@@ -1876,6 +1530,13 @@
             <a:prstDash val="solid"/>
           </a:ln>
         </p:spPr>
+        <p:txBody>
+          <a:bodyPr/>
+          <a:lstStyle/>
+          <a:p>
+            <a:endParaRPr lang="tr-TR"/>
+          </a:p>
+        </p:txBody>
       </p:sp>
       <p:sp>
         <p:nvSpPr>
@@ -1899,6 +1560,13 @@
             <a:prstDash val="solid"/>
           </a:ln>
         </p:spPr>
+        <p:txBody>
+          <a:bodyPr/>
+          <a:lstStyle/>
+          <a:p>
+            <a:endParaRPr lang="tr-TR"/>
+          </a:p>
+        </p:txBody>
       </p:sp>
       <p:sp>
         <p:nvSpPr>
@@ -1922,6 +1590,13 @@
             <a:prstDash val="solid"/>
           </a:ln>
         </p:spPr>
+        <p:txBody>
+          <a:bodyPr/>
+          <a:lstStyle/>
+          <a:p>
+            <a:endParaRPr lang="tr-TR"/>
+          </a:p>
+        </p:txBody>
       </p:sp>
       <p:sp>
         <p:nvSpPr>
@@ -1945,6 +1620,13 @@
             <a:prstDash val="solid"/>
           </a:ln>
         </p:spPr>
+        <p:txBody>
+          <a:bodyPr/>
+          <a:lstStyle/>
+          <a:p>
+            <a:endParaRPr lang="tr-TR"/>
+          </a:p>
+        </p:txBody>
       </p:sp>
       <p:sp>
         <p:nvSpPr>
@@ -1968,6 +1650,13 @@
             <a:prstDash val="solid"/>
           </a:ln>
         </p:spPr>
+        <p:txBody>
+          <a:bodyPr/>
+          <a:lstStyle/>
+          <a:p>
+            <a:endParaRPr lang="tr-TR"/>
+          </a:p>
+        </p:txBody>
       </p:sp>
       <p:sp>
         <p:nvSpPr>
@@ -1991,6 +1680,13 @@
             <a:prstDash val="solid"/>
           </a:ln>
         </p:spPr>
+        <p:txBody>
+          <a:bodyPr/>
+          <a:lstStyle/>
+          <a:p>
+            <a:endParaRPr lang="tr-TR"/>
+          </a:p>
+        </p:txBody>
       </p:sp>
       <p:sp>
         <p:nvSpPr>
@@ -2014,6 +1710,13 @@
             <a:prstDash val="solid"/>
           </a:ln>
         </p:spPr>
+        <p:txBody>
+          <a:bodyPr/>
+          <a:lstStyle/>
+          <a:p>
+            <a:endParaRPr lang="tr-TR"/>
+          </a:p>
+        </p:txBody>
       </p:sp>
       <p:sp>
         <p:nvSpPr>
@@ -2037,6 +1740,13 @@
             <a:prstDash val="solid"/>
           </a:ln>
         </p:spPr>
+        <p:txBody>
+          <a:bodyPr/>
+          <a:lstStyle/>
+          <a:p>
+            <a:endParaRPr lang="tr-TR"/>
+          </a:p>
+        </p:txBody>
       </p:sp>
       <p:sp>
         <p:nvSpPr>
@@ -2060,6 +1770,13 @@
             <a:prstDash val="solid"/>
           </a:ln>
         </p:spPr>
+        <p:txBody>
+          <a:bodyPr/>
+          <a:lstStyle/>
+          <a:p>
+            <a:endParaRPr lang="tr-TR"/>
+          </a:p>
+        </p:txBody>
       </p:sp>
       <p:sp>
         <p:nvSpPr>
@@ -2083,6 +1800,13 @@
             <a:prstDash val="solid"/>
           </a:ln>
         </p:spPr>
+        <p:txBody>
+          <a:bodyPr/>
+          <a:lstStyle/>
+          <a:p>
+            <a:endParaRPr lang="tr-TR"/>
+          </a:p>
+        </p:txBody>
       </p:sp>
       <p:sp>
         <p:nvSpPr>
@@ -2106,6 +1830,13 @@
             <a:prstDash val="solid"/>
           </a:ln>
         </p:spPr>
+        <p:txBody>
+          <a:bodyPr/>
+          <a:lstStyle/>
+          <a:p>
+            <a:endParaRPr lang="tr-TR"/>
+          </a:p>
+        </p:txBody>
       </p:sp>
       <p:sp>
         <p:nvSpPr>
@@ -2129,6 +1860,13 @@
             <a:prstDash val="solid"/>
           </a:ln>
         </p:spPr>
+        <p:txBody>
+          <a:bodyPr/>
+          <a:lstStyle/>
+          <a:p>
+            <a:endParaRPr lang="tr-TR"/>
+          </a:p>
+        </p:txBody>
       </p:sp>
       <p:sp>
         <p:nvSpPr>
@@ -2152,6 +1890,13 @@
             <a:prstDash val="solid"/>
           </a:ln>
         </p:spPr>
+        <p:txBody>
+          <a:bodyPr/>
+          <a:lstStyle/>
+          <a:p>
+            <a:endParaRPr lang="tr-TR"/>
+          </a:p>
+        </p:txBody>
       </p:sp>
       <p:sp>
         <p:nvSpPr>
@@ -2175,6 +1920,13 @@
             <a:prstDash val="solid"/>
           </a:ln>
         </p:spPr>
+        <p:txBody>
+          <a:bodyPr/>
+          <a:lstStyle/>
+          <a:p>
+            <a:endParaRPr lang="tr-TR"/>
+          </a:p>
+        </p:txBody>
       </p:sp>
       <p:sp>
         <p:nvSpPr>
@@ -2198,6 +1950,13 @@
             <a:prstDash val="solid"/>
           </a:ln>
         </p:spPr>
+        <p:txBody>
+          <a:bodyPr/>
+          <a:lstStyle/>
+          <a:p>
+            <a:endParaRPr lang="tr-TR"/>
+          </a:p>
+        </p:txBody>
       </p:sp>
       <p:sp>
         <p:nvSpPr>
@@ -2221,6 +1980,13 @@
             <a:prstDash val="solid"/>
           </a:ln>
         </p:spPr>
+        <p:txBody>
+          <a:bodyPr/>
+          <a:lstStyle/>
+          <a:p>
+            <a:endParaRPr lang="tr-TR"/>
+          </a:p>
+        </p:txBody>
       </p:sp>
       <p:sp>
         <p:nvSpPr>
@@ -2244,6 +2010,13 @@
             <a:prstDash val="solid"/>
           </a:ln>
         </p:spPr>
+        <p:txBody>
+          <a:bodyPr/>
+          <a:lstStyle/>
+          <a:p>
+            <a:endParaRPr lang="tr-TR"/>
+          </a:p>
+        </p:txBody>
       </p:sp>
       <p:sp>
         <p:nvSpPr>
@@ -2267,6 +2040,13 @@
             <a:prstDash val="solid"/>
           </a:ln>
         </p:spPr>
+        <p:txBody>
+          <a:bodyPr/>
+          <a:lstStyle/>
+          <a:p>
+            <a:endParaRPr lang="tr-TR"/>
+          </a:p>
+        </p:txBody>
       </p:sp>
       <p:sp>
         <p:nvSpPr>
@@ -2290,6 +2070,13 @@
             <a:prstDash val="solid"/>
           </a:ln>
         </p:spPr>
+        <p:txBody>
+          <a:bodyPr/>
+          <a:lstStyle/>
+          <a:p>
+            <a:endParaRPr lang="tr-TR"/>
+          </a:p>
+        </p:txBody>
       </p:sp>
       <p:sp>
         <p:nvSpPr>
@@ -2313,6 +2100,13 @@
             <a:prstDash val="solid"/>
           </a:ln>
         </p:spPr>
+        <p:txBody>
+          <a:bodyPr/>
+          <a:lstStyle/>
+          <a:p>
+            <a:endParaRPr lang="tr-TR"/>
+          </a:p>
+        </p:txBody>
       </p:sp>
       <p:sp>
         <p:nvSpPr>
@@ -2336,6 +2130,13 @@
             <a:prstDash val="solid"/>
           </a:ln>
         </p:spPr>
+        <p:txBody>
+          <a:bodyPr/>
+          <a:lstStyle/>
+          <a:p>
+            <a:endParaRPr lang="tr-TR"/>
+          </a:p>
+        </p:txBody>
       </p:sp>
       <p:sp>
         <p:nvSpPr>
@@ -2359,6 +2160,13 @@
             <a:prstDash val="solid"/>
           </a:ln>
         </p:spPr>
+        <p:txBody>
+          <a:bodyPr/>
+          <a:lstStyle/>
+          <a:p>
+            <a:endParaRPr lang="tr-TR"/>
+          </a:p>
+        </p:txBody>
       </p:sp>
       <p:sp>
         <p:nvSpPr>
@@ -2382,6 +2190,13 @@
             <a:prstDash val="solid"/>
           </a:ln>
         </p:spPr>
+        <p:txBody>
+          <a:bodyPr/>
+          <a:lstStyle/>
+          <a:p>
+            <a:endParaRPr lang="tr-TR"/>
+          </a:p>
+        </p:txBody>
       </p:sp>
       <p:sp>
         <p:nvSpPr>
@@ -2405,6 +2220,13 @@
             <a:prstDash val="solid"/>
           </a:ln>
         </p:spPr>
+        <p:txBody>
+          <a:bodyPr/>
+          <a:lstStyle/>
+          <a:p>
+            <a:endParaRPr lang="tr-TR"/>
+          </a:p>
+        </p:txBody>
       </p:sp>
       <p:sp>
         <p:nvSpPr>
@@ -2428,6 +2250,13 @@
             <a:prstDash val="solid"/>
           </a:ln>
         </p:spPr>
+        <p:txBody>
+          <a:bodyPr/>
+          <a:lstStyle/>
+          <a:p>
+            <a:endParaRPr lang="tr-TR"/>
+          </a:p>
+        </p:txBody>
       </p:sp>
       <p:sp>
         <p:nvSpPr>
@@ -2451,6 +2280,13 @@
             <a:prstDash val="solid"/>
           </a:ln>
         </p:spPr>
+        <p:txBody>
+          <a:bodyPr/>
+          <a:lstStyle/>
+          <a:p>
+            <a:endParaRPr lang="tr-TR"/>
+          </a:p>
+        </p:txBody>
       </p:sp>
       <p:sp>
         <p:nvSpPr>
@@ -2474,6 +2310,13 @@
             <a:prstDash val="solid"/>
           </a:ln>
         </p:spPr>
+        <p:txBody>
+          <a:bodyPr/>
+          <a:lstStyle/>
+          <a:p>
+            <a:endParaRPr lang="tr-TR"/>
+          </a:p>
+        </p:txBody>
       </p:sp>
       <p:sp>
         <p:nvSpPr>
@@ -2497,6 +2340,13 @@
             <a:prstDash val="solid"/>
           </a:ln>
         </p:spPr>
+        <p:txBody>
+          <a:bodyPr/>
+          <a:lstStyle/>
+          <a:p>
+            <a:endParaRPr lang="tr-TR"/>
+          </a:p>
+        </p:txBody>
       </p:sp>
       <p:sp>
         <p:nvSpPr>
@@ -2520,6 +2370,13 @@
             <a:prstDash val="solid"/>
           </a:ln>
         </p:spPr>
+        <p:txBody>
+          <a:bodyPr/>
+          <a:lstStyle/>
+          <a:p>
+            <a:endParaRPr lang="tr-TR"/>
+          </a:p>
+        </p:txBody>
       </p:sp>
       <p:sp>
         <p:nvSpPr>
@@ -2543,6 +2400,13 @@
             <a:prstDash val="solid"/>
           </a:ln>
         </p:spPr>
+        <p:txBody>
+          <a:bodyPr/>
+          <a:lstStyle/>
+          <a:p>
+            <a:endParaRPr lang="tr-TR"/>
+          </a:p>
+        </p:txBody>
       </p:sp>
       <p:sp>
         <p:nvSpPr>
@@ -2568,6 +2432,13 @@
             <a:prstDash val="solid"/>
           </a:ln>
         </p:spPr>
+        <p:txBody>
+          <a:bodyPr/>
+          <a:lstStyle/>
+          <a:p>
+            <a:endParaRPr lang="tr-TR"/>
+          </a:p>
+        </p:txBody>
       </p:sp>
       <p:sp>
         <p:nvSpPr>
@@ -2593,6 +2464,13 @@
             <a:prstDash val="solid"/>
           </a:ln>
         </p:spPr>
+        <p:txBody>
+          <a:bodyPr/>
+          <a:lstStyle/>
+          <a:p>
+            <a:endParaRPr lang="tr-TR"/>
+          </a:p>
+        </p:txBody>
       </p:sp>
       <p:sp>
         <p:nvSpPr>
@@ -2615,7 +2493,7 @@
           <a:bodyPr wrap="square" lIns="0" tIns="0" rIns="0" bIns="0" rtlCol="0" anchor="ctr"/>
           <a:lstStyle/>
           <a:p>
-            <a:pPr indent="0" marL="0">
+            <a:pPr marL="0" indent="0">
               <a:buNone/>
             </a:pPr>
             <a:r>
@@ -2654,7 +2532,7 @@
           <a:bodyPr wrap="square" lIns="0" tIns="0" rIns="0" bIns="0" rtlCol="0" anchor="ctr"/>
           <a:lstStyle/>
           <a:p>
-            <a:pPr indent="0" marL="0">
+            <a:pPr marL="0" indent="0">
               <a:lnSpc>
                 <a:spcPct val="120000"/>
               </a:lnSpc>
@@ -2674,7 +2552,7 @@
             <a:endParaRPr lang="en-US" sz="1800" dirty="0"/>
           </a:p>
           <a:p>
-            <a:pPr indent="0" marL="0">
+            <a:pPr marL="0" indent="0">
               <a:lnSpc>
                 <a:spcPct val="120000"/>
               </a:lnSpc>
@@ -2717,6 +2595,13 @@
             <a:prstDash val="solid"/>
           </a:ln>
         </p:spPr>
+        <p:txBody>
+          <a:bodyPr/>
+          <a:lstStyle/>
+          <a:p>
+            <a:endParaRPr lang="tr-TR"/>
+          </a:p>
+        </p:txBody>
       </p:sp>
       <p:sp>
         <p:nvSpPr>
@@ -2739,7 +2624,7 @@
           <a:bodyPr wrap="square" lIns="0" tIns="0" rIns="0" bIns="0" rtlCol="0" anchor="ctr"/>
           <a:lstStyle/>
           <a:p>
-            <a:pPr indent="0" marL="0">
+            <a:pPr marL="0" indent="0">
               <a:buNone/>
             </a:pPr>
             <a:r>
@@ -2778,7 +2663,7 @@
           <a:bodyPr wrap="square" lIns="0" tIns="0" rIns="0" bIns="0" rtlCol="0" anchor="ctr"/>
           <a:lstStyle/>
           <a:p>
-            <a:pPr indent="0" marL="0">
+            <a:pPr marL="0" indent="0">
               <a:buNone/>
             </a:pPr>
             <a:r>
@@ -2790,7 +2675,7 @@
                 <a:ea typeface="Calibri" pitchFamily="34" charset="-122"/>
                 <a:cs typeface="Calibri" pitchFamily="34" charset="-120"/>
               </a:rPr>
-              <a:t>Full Stack Data Science Systems — Module 7 Case Study</a:t>
+              <a:t>Full Stack Data Science Systems </a:t>
             </a:r>
             <a:endParaRPr lang="en-US" sz="1300" dirty="0"/>
           </a:p>
@@ -2812,6 +2697,7 @@
         <a:solidFill>
           <a:srgbClr val="FFFFFF"/>
         </a:solidFill>
+        <a:effectLst/>
       </p:bgPr>
     </p:bg>
     <p:spTree>
@@ -2849,11 +2735,11 @@
           <a:bodyPr wrap="square" lIns="0" tIns="0" rIns="0" bIns="0" rtlCol="0" anchor="ctr"/>
           <a:lstStyle/>
           <a:p>
-            <a:pPr algn="l" indent="0" marL="0">
+            <a:pPr marL="0" indent="0" algn="l">
               <a:buNone/>
             </a:pPr>
             <a:r>
-              <a:rPr lang="en-US" sz="1200" b="1" spc="200" kern="0" dirty="0">
+              <a:rPr lang="en-US" sz="1200" b="1" kern="0" spc="200" dirty="0">
                 <a:solidFill>
                   <a:srgbClr val="B87A2E"/>
                 </a:solidFill>
@@ -2888,7 +2774,7 @@
           <a:bodyPr wrap="square" lIns="0" tIns="0" rIns="0" bIns="0" rtlCol="0" anchor="ctr"/>
           <a:lstStyle/>
           <a:p>
-            <a:pPr algn="l" indent="0" marL="0">
+            <a:pPr marL="0" indent="0" algn="l">
               <a:buNone/>
             </a:pPr>
             <a:r>
@@ -2908,15 +2794,15 @@
       </p:sp>
       <p:pic>
         <p:nvPicPr>
-          <p:cNvPr id="4" name="Image 0" descr="demo_screenshot.png">    </p:cNvPr>
+          <p:cNvPr id="4" name="Image 0" descr="demo_screenshot.png"/>
           <p:cNvPicPr>
             <a:picLocks noChangeAspect="1"/>
           </p:cNvPicPr>
           <p:nvPr/>
         </p:nvPicPr>
         <p:blipFill>
-          <a:blip r:embed="rId1"/>
-          <a:srcRect l="0" r="0" t="0" b="0"/>
+          <a:blip r:embed="rId3"/>
+          <a:srcRect/>
           <a:stretch/>
         </p:blipFill>
         <p:spPr>
@@ -2937,7 +2823,7 @@
         </p:nvSpPr>
         <p:spPr>
           <a:xfrm>
-            <a:off x="566928" y="1755648"/>
+            <a:off x="539496" y="1755648"/>
             <a:ext cx="7278624" cy="3478625"/>
           </a:xfrm>
           <a:prstGeom prst="rect">
@@ -2955,6 +2841,13 @@
             <a:prstDash val="solid"/>
           </a:ln>
         </p:spPr>
+        <p:txBody>
+          <a:bodyPr/>
+          <a:lstStyle/>
+          <a:p>
+            <a:endParaRPr lang="tr-TR"/>
+          </a:p>
+        </p:txBody>
       </p:sp>
       <p:sp>
         <p:nvSpPr>
@@ -3046,6 +2939,26 @@
               </a:rPr>
               <a:t>Real Berre products shown — photos, prices, links — pulled from the catalog</a:t>
             </a:r>
+            <a:endParaRPr lang="tr-TR" sz="1500" dirty="0">
+              <a:solidFill>
+                <a:srgbClr val="232323"/>
+              </a:solidFill>
+              <a:latin typeface="Calibri" pitchFamily="34" charset="0"/>
+              <a:ea typeface="Calibri" pitchFamily="34" charset="-122"/>
+              <a:cs typeface="Calibri" pitchFamily="34" charset="-120"/>
+            </a:endParaRPr>
+          </a:p>
+          <a:p>
+            <a:pPr marL="342900" indent="-342900">
+              <a:lnSpc>
+                <a:spcPct val="130000"/>
+              </a:lnSpc>
+              <a:spcAft>
+                <a:spcPts val="1600"/>
+              </a:spcAft>
+              <a:buSzPct val="100000"/>
+              <a:buChar char="•"/>
+            </a:pPr>
             <a:endParaRPr lang="en-US" sz="1500" dirty="0"/>
           </a:p>
         </p:txBody>
@@ -3071,9 +2984,6 @@
           <a:bodyPr wrap="square" lIns="0" tIns="0" rIns="0" bIns="0" rtlCol="0" anchor="ctr"/>
           <a:lstStyle/>
           <a:p>
-            <a:pPr indent="0" marL="0">
-              <a:buNone/>
-            </a:pPr>
             <a:r>
               <a:rPr lang="en-US" sz="1050" dirty="0">
                 <a:solidFill>
@@ -3082,8 +2992,9 @@
                 <a:latin typeface="Consolas" pitchFamily="34" charset="0"/>
                 <a:ea typeface="Consolas" pitchFamily="34" charset="-122"/>
                 <a:cs typeface="Consolas" pitchFamily="34" charset="-120"/>
-              </a:rPr>
-              <a:t>room-stylist-final-atash.canadacentral.azurecontainer.io:5000/predict</a:t>
+                <a:hlinkClick r:id="rId4"/>
+              </a:rPr>
+              <a:t>https://atash22.github.io/room-stylist-berre/room_stylist_demo_v2.html</a:t>
             </a:r>
             <a:endParaRPr lang="en-US" sz="1050" dirty="0"/>
           </a:p>
@@ -3110,7 +3021,7 @@
           <a:bodyPr wrap="square" lIns="0" tIns="0" rIns="0" bIns="0" rtlCol="0" anchor="ctr"/>
           <a:lstStyle/>
           <a:p>
-            <a:pPr indent="0" marL="0">
+            <a:pPr marL="0" indent="0">
               <a:buNone/>
             </a:pPr>
             <a:r>
@@ -3149,7 +3060,7 @@
           <a:bodyPr wrap="square" lIns="0" tIns="0" rIns="0" bIns="0" rtlCol="0" anchor="ctr"/>
           <a:lstStyle/>
           <a:p>
-            <a:pPr algn="r" indent="0" marL="0">
+            <a:pPr marL="0" indent="0" algn="r">
               <a:buNone/>
             </a:pPr>
             <a:r>
@@ -3183,6 +3094,7 @@
         <a:solidFill>
           <a:srgbClr val="1C2B45"/>
         </a:solidFill>
+        <a:effectLst/>
       </p:bgPr>
     </p:bg>
     <p:spTree>
@@ -3220,7 +3132,7 @@
           <a:bodyPr wrap="square" lIns="0" tIns="0" rIns="0" bIns="0" rtlCol="0" anchor="ctr"/>
           <a:lstStyle/>
           <a:p>
-            <a:pPr indent="0" marL="0">
+            <a:pPr marL="0" indent="0">
               <a:buNone/>
             </a:pPr>
             <a:r>
@@ -3259,7 +3171,7 @@
           <a:bodyPr wrap="square" lIns="0" tIns="0" rIns="0" bIns="0" rtlCol="0" anchor="ctr"/>
           <a:lstStyle/>
           <a:p>
-            <a:pPr indent="0" marL="0">
+            <a:pPr marL="0" indent="0">
               <a:buNone/>
             </a:pPr>
             <a:r>
@@ -3299,6 +3211,13 @@
             <a:prstDash val="solid"/>
           </a:ln>
         </p:spPr>
+        <p:txBody>
+          <a:bodyPr/>
+          <a:lstStyle/>
+          <a:p>
+            <a:endParaRPr lang="tr-TR"/>
+          </a:p>
+        </p:txBody>
       </p:sp>
       <p:sp>
         <p:nvSpPr>
@@ -3321,11 +3240,11 @@
           <a:bodyPr wrap="square" lIns="0" tIns="0" rIns="0" bIns="0" rtlCol="0" anchor="ctr"/>
           <a:lstStyle/>
           <a:p>
-            <a:pPr indent="0" marL="0">
+            <a:pPr marL="0" indent="0">
               <a:buNone/>
             </a:pPr>
             <a:r>
-              <a:rPr lang="en-US" sz="1100" b="1" spc="150" kern="0" dirty="0">
+              <a:rPr lang="en-US" sz="1100" b="1" kern="0" spc="150" dirty="0">
                 <a:solidFill>
                   <a:srgbClr val="B87A2E"/>
                 </a:solidFill>
@@ -3360,7 +3279,7 @@
           <a:bodyPr wrap="square" lIns="0" tIns="0" rIns="0" bIns="0" rtlCol="0" anchor="ctr"/>
           <a:lstStyle/>
           <a:p>
-            <a:pPr indent="0" marL="0">
+            <a:pPr marL="0" indent="0">
               <a:buNone/>
             </a:pPr>
             <a:r>
@@ -3399,11 +3318,11 @@
           <a:bodyPr wrap="square" lIns="0" tIns="0" rIns="0" bIns="0" rtlCol="0" anchor="ctr"/>
           <a:lstStyle/>
           <a:p>
-            <a:pPr indent="0" marL="0">
+            <a:pPr marL="0" indent="0">
               <a:buNone/>
             </a:pPr>
             <a:r>
-              <a:rPr lang="en-US" sz="1100" b="1" spc="150" kern="0" dirty="0">
+              <a:rPr lang="en-US" sz="1100" b="1" kern="0" spc="150" dirty="0">
                 <a:solidFill>
                   <a:srgbClr val="B87A2E"/>
                 </a:solidFill>
@@ -3438,7 +3357,7 @@
           <a:bodyPr wrap="square" lIns="0" tIns="0" rIns="0" bIns="0" rtlCol="0" anchor="ctr"/>
           <a:lstStyle/>
           <a:p>
-            <a:pPr indent="0" marL="0">
+            <a:pPr marL="0" indent="0">
               <a:buNone/>
             </a:pPr>
             <a:r>
@@ -3464,14 +3383,15 @@
 </p:sld>
 </file>
 
-<file path=ppt/slides/slide12.xml><?xml version="1.0" encoding="utf-8"?>
+<file path=ppt/slides/slide2.xml><?xml version="1.0" encoding="utf-8"?>
 <p:sld xmlns:a="http://schemas.openxmlformats.org/drawingml/2006/main" xmlns:r="http://schemas.openxmlformats.org/officeDocument/2006/relationships" xmlns:p="http://schemas.openxmlformats.org/presentationml/2006/main">
-  <p:cSld name="Slide 12">
+  <p:cSld name="Slide 2">
     <p:bg>
       <p:bgPr>
         <a:solidFill>
           <a:srgbClr val="FFFFFF"/>
         </a:solidFill>
+        <a:effectLst/>
       </p:bgPr>
     </p:bg>
     <p:spTree>
@@ -3509,11 +3429,11 @@
           <a:bodyPr wrap="square" lIns="0" tIns="0" rIns="0" bIns="0" rtlCol="0" anchor="ctr"/>
           <a:lstStyle/>
           <a:p>
-            <a:pPr algn="l" indent="0" marL="0">
+            <a:pPr marL="0" indent="0" algn="l">
               <a:buNone/>
             </a:pPr>
             <a:r>
-              <a:rPr lang="en-US" sz="1200" b="1" spc="200" kern="0" dirty="0">
+              <a:rPr lang="en-US" sz="1200" b="1" kern="0" spc="200" dirty="0">
                 <a:solidFill>
                   <a:srgbClr val="B87A2E"/>
                 </a:solidFill>
@@ -3521,7 +3441,7 @@
                 <a:ea typeface="Century Gothic" pitchFamily="34" charset="-122"/>
                 <a:cs typeface="Century Gothic" pitchFamily="34" charset="-120"/>
               </a:rPr>
-              <a:t>LOGISTICS</a:t>
+              <a:t>OVERVIEW</a:t>
             </a:r>
             <a:endParaRPr lang="en-US" sz="1200" dirty="0"/>
           </a:p>
@@ -3548,7 +3468,7 @@
           <a:bodyPr wrap="square" lIns="0" tIns="0" rIns="0" bIns="0" rtlCol="0" anchor="ctr"/>
           <a:lstStyle/>
           <a:p>
-            <a:pPr algn="l" indent="0" marL="0">
+            <a:pPr marL="0" indent="0" algn="l">
               <a:buNone/>
             </a:pPr>
             <a:r>
@@ -3560,7 +3480,7 @@
                 <a:ea typeface="Century Gothic" pitchFamily="34" charset="-122"/>
                 <a:cs typeface="Century Gothic" pitchFamily="34" charset="-120"/>
               </a:rPr>
-              <a:t>Presentation Bookkeeping</a:t>
+              <a:t>Agenda</a:t>
             </a:r>
             <a:endParaRPr lang="en-US" sz="3200" dirty="0"/>
           </a:p>
@@ -3574,8 +3494,8 @@
         </p:nvSpPr>
         <p:spPr>
           <a:xfrm>
-            <a:off x="594360" y="2011680"/>
-            <a:ext cx="7315200" cy="411480"/>
+            <a:off x="594360" y="1920240"/>
+            <a:ext cx="640080" cy="475488"/>
           </a:xfrm>
           <a:prstGeom prst="rect">
             <a:avLst/>
@@ -3587,11 +3507,50 @@
           <a:bodyPr wrap="square" lIns="0" tIns="0" rIns="0" bIns="0" rtlCol="0" anchor="ctr"/>
           <a:lstStyle/>
           <a:p>
-            <a:pPr indent="0" marL="0">
+            <a:pPr marL="0" indent="0">
               <a:buNone/>
             </a:pPr>
             <a:r>
-              <a:rPr lang="en-US" sz="1600" dirty="0">
+              <a:rPr lang="en-US" sz="1500" b="1" dirty="0">
+                <a:solidFill>
+                  <a:srgbClr val="B87A2E"/>
+                </a:solidFill>
+                <a:latin typeface="Century Gothic" pitchFamily="34" charset="0"/>
+                <a:ea typeface="Century Gothic" pitchFamily="34" charset="-122"/>
+                <a:cs typeface="Century Gothic" pitchFamily="34" charset="-120"/>
+              </a:rPr>
+              <a:t>01</a:t>
+            </a:r>
+            <a:endParaRPr lang="en-US" sz="1500" dirty="0"/>
+          </a:p>
+        </p:txBody>
+      </p:sp>
+      <p:sp>
+        <p:nvSpPr>
+          <p:cNvPr id="5" name="Text 3"/>
+          <p:cNvSpPr/>
+          <p:nvPr/>
+        </p:nvSpPr>
+        <p:spPr>
+          <a:xfrm>
+            <a:off x="1371600" y="1920240"/>
+            <a:ext cx="7315200" cy="475488"/>
+          </a:xfrm>
+          <a:prstGeom prst="rect">
+            <a:avLst/>
+          </a:prstGeom>
+          <a:noFill/>
+          <a:ln/>
+        </p:spPr>
+        <p:txBody>
+          <a:bodyPr wrap="square" lIns="0" tIns="0" rIns="0" bIns="0" rtlCol="0" anchor="ctr"/>
+          <a:lstStyle/>
+          <a:p>
+            <a:pPr marL="0" indent="0">
+              <a:buNone/>
+            </a:pPr>
+            <a:r>
+              <a:rPr lang="en-US" sz="1700" dirty="0">
                 <a:solidFill>
                   <a:srgbClr val="232323"/>
                 </a:solidFill>
@@ -3599,22 +3558,22 @@
                 <a:ea typeface="Calibri" pitchFamily="34" charset="-122"/>
                 <a:cs typeface="Calibri" pitchFamily="34" charset="-120"/>
               </a:rPr>
-              <a:t>•  15 groups in total</a:t>
-            </a:r>
-            <a:endParaRPr lang="en-US" sz="1600" dirty="0"/>
-          </a:p>
-        </p:txBody>
-      </p:sp>
-      <p:sp>
-        <p:nvSpPr>
-          <p:cNvPr id="5" name="Text 3"/>
-          <p:cNvSpPr/>
-          <p:nvPr/>
-        </p:nvSpPr>
-        <p:spPr>
-          <a:xfrm>
-            <a:off x="594360" y="2468880"/>
-            <a:ext cx="7315200" cy="411480"/>
+              <a:t>Problem</a:t>
+            </a:r>
+            <a:endParaRPr lang="en-US" sz="1700" dirty="0"/>
+          </a:p>
+        </p:txBody>
+      </p:sp>
+      <p:sp>
+        <p:nvSpPr>
+          <p:cNvPr id="6" name="Text 4"/>
+          <p:cNvSpPr/>
+          <p:nvPr/>
+        </p:nvSpPr>
+        <p:spPr>
+          <a:xfrm>
+            <a:off x="594360" y="2395728"/>
+            <a:ext cx="640080" cy="475488"/>
           </a:xfrm>
           <a:prstGeom prst="rect">
             <a:avLst/>
@@ -3626,11 +3585,50 @@
           <a:bodyPr wrap="square" lIns="0" tIns="0" rIns="0" bIns="0" rtlCol="0" anchor="ctr"/>
           <a:lstStyle/>
           <a:p>
-            <a:pPr indent="0" marL="0">
+            <a:pPr marL="0" indent="0">
               <a:buNone/>
             </a:pPr>
             <a:r>
-              <a:rPr lang="en-US" sz="1600" dirty="0">
+              <a:rPr lang="en-US" sz="1500" b="1" dirty="0">
+                <a:solidFill>
+                  <a:srgbClr val="B87A2E"/>
+                </a:solidFill>
+                <a:latin typeface="Century Gothic" pitchFamily="34" charset="0"/>
+                <a:ea typeface="Century Gothic" pitchFamily="34" charset="-122"/>
+                <a:cs typeface="Century Gothic" pitchFamily="34" charset="-120"/>
+              </a:rPr>
+              <a:t>02</a:t>
+            </a:r>
+            <a:endParaRPr lang="en-US" sz="1500" dirty="0"/>
+          </a:p>
+        </p:txBody>
+      </p:sp>
+      <p:sp>
+        <p:nvSpPr>
+          <p:cNvPr id="7" name="Text 5"/>
+          <p:cNvSpPr/>
+          <p:nvPr/>
+        </p:nvSpPr>
+        <p:spPr>
+          <a:xfrm>
+            <a:off x="1371600" y="2395728"/>
+            <a:ext cx="7315200" cy="475488"/>
+          </a:xfrm>
+          <a:prstGeom prst="rect">
+            <a:avLst/>
+          </a:prstGeom>
+          <a:noFill/>
+          <a:ln/>
+        </p:spPr>
+        <p:txBody>
+          <a:bodyPr wrap="square" lIns="0" tIns="0" rIns="0" bIns="0" rtlCol="0" anchor="ctr"/>
+          <a:lstStyle/>
+          <a:p>
+            <a:pPr marL="0" indent="0">
+              <a:buNone/>
+            </a:pPr>
+            <a:r>
+              <a:rPr lang="en-US" sz="1700" dirty="0">
                 <a:solidFill>
                   <a:srgbClr val="232323"/>
                 </a:solidFill>
@@ -3638,22 +3636,22 @@
                 <a:ea typeface="Calibri" pitchFamily="34" charset="-122"/>
                 <a:cs typeface="Calibri" pitchFamily="34" charset="-120"/>
               </a:rPr>
-              <a:t>•  240 minutes</a:t>
-            </a:r>
-            <a:endParaRPr lang="en-US" sz="1600" dirty="0"/>
-          </a:p>
-        </p:txBody>
-      </p:sp>
-      <p:sp>
-        <p:nvSpPr>
-          <p:cNvPr id="6" name="Text 4"/>
-          <p:cNvSpPr/>
-          <p:nvPr/>
-        </p:nvSpPr>
-        <p:spPr>
-          <a:xfrm>
-            <a:off x="594360" y="2926080"/>
-            <a:ext cx="7315200" cy="411480"/>
+              <a:t>Why this problem</a:t>
+            </a:r>
+            <a:endParaRPr lang="en-US" sz="1700" dirty="0"/>
+          </a:p>
+        </p:txBody>
+      </p:sp>
+      <p:sp>
+        <p:nvSpPr>
+          <p:cNvPr id="8" name="Text 6"/>
+          <p:cNvSpPr/>
+          <p:nvPr/>
+        </p:nvSpPr>
+        <p:spPr>
+          <a:xfrm>
+            <a:off x="594360" y="2871216"/>
+            <a:ext cx="640080" cy="475488"/>
           </a:xfrm>
           <a:prstGeom prst="rect">
             <a:avLst/>
@@ -3665,11 +3663,50 @@
           <a:bodyPr wrap="square" lIns="0" tIns="0" rIns="0" bIns="0" rtlCol="0" anchor="ctr"/>
           <a:lstStyle/>
           <a:p>
-            <a:pPr indent="0" marL="0">
+            <a:pPr marL="0" indent="0">
               <a:buNone/>
             </a:pPr>
             <a:r>
-              <a:rPr lang="en-US" sz="1600" dirty="0">
+              <a:rPr lang="en-US" sz="1500" b="1" dirty="0">
+                <a:solidFill>
+                  <a:srgbClr val="B87A2E"/>
+                </a:solidFill>
+                <a:latin typeface="Century Gothic" pitchFamily="34" charset="0"/>
+                <a:ea typeface="Century Gothic" pitchFamily="34" charset="-122"/>
+                <a:cs typeface="Century Gothic" pitchFamily="34" charset="-120"/>
+              </a:rPr>
+              <a:t>03</a:t>
+            </a:r>
+            <a:endParaRPr lang="en-US" sz="1500" dirty="0"/>
+          </a:p>
+        </p:txBody>
+      </p:sp>
+      <p:sp>
+        <p:nvSpPr>
+          <p:cNvPr id="9" name="Text 7"/>
+          <p:cNvSpPr/>
+          <p:nvPr/>
+        </p:nvSpPr>
+        <p:spPr>
+          <a:xfrm>
+            <a:off x="1371600" y="2871216"/>
+            <a:ext cx="7315200" cy="475488"/>
+          </a:xfrm>
+          <a:prstGeom prst="rect">
+            <a:avLst/>
+          </a:prstGeom>
+          <a:noFill/>
+          <a:ln/>
+        </p:spPr>
+        <p:txBody>
+          <a:bodyPr wrap="square" lIns="0" tIns="0" rIns="0" bIns="0" rtlCol="0" anchor="ctr"/>
+          <a:lstStyle/>
+          <a:p>
+            <a:pPr marL="0" indent="0">
+              <a:buNone/>
+            </a:pPr>
+            <a:r>
+              <a:rPr lang="en-US" sz="1700" dirty="0">
                 <a:solidFill>
                   <a:srgbClr val="232323"/>
                 </a:solidFill>
@@ -3677,22 +3714,22 @@
                 <a:ea typeface="Calibri" pitchFamily="34" charset="-122"/>
                 <a:cs typeface="Calibri" pitchFamily="34" charset="-120"/>
               </a:rPr>
-              <a:t>•  16 minutes for each group</a:t>
-            </a:r>
-            <a:endParaRPr lang="en-US" sz="1600" dirty="0"/>
-          </a:p>
-        </p:txBody>
-      </p:sp>
-      <p:sp>
-        <p:nvSpPr>
-          <p:cNvPr id="7" name="Text 5"/>
-          <p:cNvSpPr/>
-          <p:nvPr/>
-        </p:nvSpPr>
-        <p:spPr>
-          <a:xfrm>
-            <a:off x="594360" y="3383280"/>
-            <a:ext cx="7315200" cy="411480"/>
+              <a:t>Literature review</a:t>
+            </a:r>
+            <a:endParaRPr lang="en-US" sz="1700" dirty="0"/>
+          </a:p>
+        </p:txBody>
+      </p:sp>
+      <p:sp>
+        <p:nvSpPr>
+          <p:cNvPr id="10" name="Text 8"/>
+          <p:cNvSpPr/>
+          <p:nvPr/>
+        </p:nvSpPr>
+        <p:spPr>
+          <a:xfrm>
+            <a:off x="594360" y="3346704"/>
+            <a:ext cx="640080" cy="475488"/>
           </a:xfrm>
           <a:prstGeom prst="rect">
             <a:avLst/>
@@ -3704,11 +3741,50 @@
           <a:bodyPr wrap="square" lIns="0" tIns="0" rIns="0" bIns="0" rtlCol="0" anchor="ctr"/>
           <a:lstStyle/>
           <a:p>
-            <a:pPr indent="0" marL="0">
+            <a:pPr marL="0" indent="0">
               <a:buNone/>
             </a:pPr>
             <a:r>
-              <a:rPr lang="en-US" sz="1600" dirty="0">
+              <a:rPr lang="en-US" sz="1500" b="1" dirty="0">
+                <a:solidFill>
+                  <a:srgbClr val="B87A2E"/>
+                </a:solidFill>
+                <a:latin typeface="Century Gothic" pitchFamily="34" charset="0"/>
+                <a:ea typeface="Century Gothic" pitchFamily="34" charset="-122"/>
+                <a:cs typeface="Century Gothic" pitchFamily="34" charset="-120"/>
+              </a:rPr>
+              <a:t>04</a:t>
+            </a:r>
+            <a:endParaRPr lang="en-US" sz="1500" dirty="0"/>
+          </a:p>
+        </p:txBody>
+      </p:sp>
+      <p:sp>
+        <p:nvSpPr>
+          <p:cNvPr id="11" name="Text 9"/>
+          <p:cNvSpPr/>
+          <p:nvPr/>
+        </p:nvSpPr>
+        <p:spPr>
+          <a:xfrm>
+            <a:off x="1371600" y="3346704"/>
+            <a:ext cx="7315200" cy="475488"/>
+          </a:xfrm>
+          <a:prstGeom prst="rect">
+            <a:avLst/>
+          </a:prstGeom>
+          <a:noFill/>
+          <a:ln/>
+        </p:spPr>
+        <p:txBody>
+          <a:bodyPr wrap="square" lIns="0" tIns="0" rIns="0" bIns="0" rtlCol="0" anchor="ctr"/>
+          <a:lstStyle/>
+          <a:p>
+            <a:pPr marL="0" indent="0">
+              <a:buNone/>
+            </a:pPr>
+            <a:r>
+              <a:rPr lang="en-US" sz="1700" dirty="0">
                 <a:solidFill>
                   <a:srgbClr val="232323"/>
                 </a:solidFill>
@@ -3716,22 +3792,22 @@
                 <a:ea typeface="Calibri" pitchFamily="34" charset="-122"/>
                 <a:cs typeface="Calibri" pitchFamily="34" charset="-120"/>
               </a:rPr>
-              <a:t>•  10 minutes for presentation</a:t>
-            </a:r>
-            <a:endParaRPr lang="en-US" sz="1600" dirty="0"/>
-          </a:p>
-        </p:txBody>
-      </p:sp>
-      <p:sp>
-        <p:nvSpPr>
-          <p:cNvPr id="8" name="Text 6"/>
-          <p:cNvSpPr/>
-          <p:nvPr/>
-        </p:nvSpPr>
-        <p:spPr>
-          <a:xfrm>
-            <a:off x="594360" y="3840480"/>
-            <a:ext cx="7315200" cy="411480"/>
+              <a:t>Methodology — ML Canvas</a:t>
+            </a:r>
+            <a:endParaRPr lang="en-US" sz="1700" dirty="0"/>
+          </a:p>
+        </p:txBody>
+      </p:sp>
+      <p:sp>
+        <p:nvSpPr>
+          <p:cNvPr id="12" name="Text 10"/>
+          <p:cNvSpPr/>
+          <p:nvPr/>
+        </p:nvSpPr>
+        <p:spPr>
+          <a:xfrm>
+            <a:off x="594360" y="3822192"/>
+            <a:ext cx="640080" cy="475488"/>
           </a:xfrm>
           <a:prstGeom prst="rect">
             <a:avLst/>
@@ -3743,11 +3819,50 @@
           <a:bodyPr wrap="square" lIns="0" tIns="0" rIns="0" bIns="0" rtlCol="0" anchor="ctr"/>
           <a:lstStyle/>
           <a:p>
-            <a:pPr indent="0" marL="0">
+            <a:pPr marL="0" indent="0">
               <a:buNone/>
             </a:pPr>
             <a:r>
-              <a:rPr lang="en-US" sz="1600" dirty="0">
+              <a:rPr lang="en-US" sz="1500" b="1" dirty="0">
+                <a:solidFill>
+                  <a:srgbClr val="B87A2E"/>
+                </a:solidFill>
+                <a:latin typeface="Century Gothic" pitchFamily="34" charset="0"/>
+                <a:ea typeface="Century Gothic" pitchFamily="34" charset="-122"/>
+                <a:cs typeface="Century Gothic" pitchFamily="34" charset="-120"/>
+              </a:rPr>
+              <a:t>05</a:t>
+            </a:r>
+            <a:endParaRPr lang="en-US" sz="1500" dirty="0"/>
+          </a:p>
+        </p:txBody>
+      </p:sp>
+      <p:sp>
+        <p:nvSpPr>
+          <p:cNvPr id="13" name="Text 11"/>
+          <p:cNvSpPr/>
+          <p:nvPr/>
+        </p:nvSpPr>
+        <p:spPr>
+          <a:xfrm>
+            <a:off x="1371600" y="3822192"/>
+            <a:ext cx="7315200" cy="475488"/>
+          </a:xfrm>
+          <a:prstGeom prst="rect">
+            <a:avLst/>
+          </a:prstGeom>
+          <a:noFill/>
+          <a:ln/>
+        </p:spPr>
+        <p:txBody>
+          <a:bodyPr wrap="square" lIns="0" tIns="0" rIns="0" bIns="0" rtlCol="0" anchor="ctr"/>
+          <a:lstStyle/>
+          <a:p>
+            <a:pPr marL="0" indent="0">
+              <a:buNone/>
+            </a:pPr>
+            <a:r>
+              <a:rPr lang="en-US" sz="1700" dirty="0">
                 <a:solidFill>
                   <a:srgbClr val="232323"/>
                 </a:solidFill>
@@ -3755,22 +3870,22 @@
                 <a:ea typeface="Calibri" pitchFamily="34" charset="-122"/>
                 <a:cs typeface="Calibri" pitchFamily="34" charset="-120"/>
               </a:rPr>
-              <a:t>•  5 minutes for Q&amp;A</a:t>
-            </a:r>
-            <a:endParaRPr lang="en-US" sz="1600" dirty="0"/>
-          </a:p>
-        </p:txBody>
-      </p:sp>
-      <p:sp>
-        <p:nvSpPr>
-          <p:cNvPr id="9" name="Text 7"/>
+              <a:t>Model benchmarking</a:t>
+            </a:r>
+            <a:endParaRPr lang="en-US" sz="1700" dirty="0"/>
+          </a:p>
+        </p:txBody>
+      </p:sp>
+      <p:sp>
+        <p:nvSpPr>
+          <p:cNvPr id="14" name="Text 12"/>
           <p:cNvSpPr/>
           <p:nvPr/>
         </p:nvSpPr>
         <p:spPr>
           <a:xfrm>
             <a:off x="594360" y="4297680"/>
-            <a:ext cx="7315200" cy="411480"/>
+            <a:ext cx="640080" cy="475488"/>
           </a:xfrm>
           <a:prstGeom prst="rect">
             <a:avLst/>
@@ -3782,11 +3897,50 @@
           <a:bodyPr wrap="square" lIns="0" tIns="0" rIns="0" bIns="0" rtlCol="0" anchor="ctr"/>
           <a:lstStyle/>
           <a:p>
-            <a:pPr indent="0" marL="0">
+            <a:pPr marL="0" indent="0">
               <a:buNone/>
             </a:pPr>
             <a:r>
-              <a:rPr lang="en-US" sz="1600" dirty="0">
+              <a:rPr lang="en-US" sz="1500" b="1" dirty="0">
+                <a:solidFill>
+                  <a:srgbClr val="B87A2E"/>
+                </a:solidFill>
+                <a:latin typeface="Century Gothic" pitchFamily="34" charset="0"/>
+                <a:ea typeface="Century Gothic" pitchFamily="34" charset="-122"/>
+                <a:cs typeface="Century Gothic" pitchFamily="34" charset="-120"/>
+              </a:rPr>
+              <a:t>06</a:t>
+            </a:r>
+            <a:endParaRPr lang="en-US" sz="1500" dirty="0"/>
+          </a:p>
+        </p:txBody>
+      </p:sp>
+      <p:sp>
+        <p:nvSpPr>
+          <p:cNvPr id="15" name="Text 13"/>
+          <p:cNvSpPr/>
+          <p:nvPr/>
+        </p:nvSpPr>
+        <p:spPr>
+          <a:xfrm>
+            <a:off x="1371600" y="4297680"/>
+            <a:ext cx="7315200" cy="475488"/>
+          </a:xfrm>
+          <a:prstGeom prst="rect">
+            <a:avLst/>
+          </a:prstGeom>
+          <a:noFill/>
+          <a:ln/>
+        </p:spPr>
+        <p:txBody>
+          <a:bodyPr wrap="square" lIns="0" tIns="0" rIns="0" bIns="0" rtlCol="0" anchor="ctr"/>
+          <a:lstStyle/>
+          <a:p>
+            <a:pPr marL="0" indent="0">
+              <a:buNone/>
+            </a:pPr>
+            <a:r>
+              <a:rPr lang="en-US" sz="1700" dirty="0">
                 <a:solidFill>
                   <a:srgbClr val="232323"/>
                 </a:solidFill>
@@ -3794,9 +3948,321 @@
                 <a:ea typeface="Calibri" pitchFamily="34" charset="-122"/>
                 <a:cs typeface="Calibri" pitchFamily="34" charset="-120"/>
               </a:rPr>
-              <a:t>•  1 minute for group changing</a:t>
-            </a:r>
-            <a:endParaRPr lang="en-US" sz="1600" dirty="0"/>
+              <a:t>Model deployment</a:t>
+            </a:r>
+            <a:endParaRPr lang="en-US" sz="1700" dirty="0"/>
+          </a:p>
+        </p:txBody>
+      </p:sp>
+      <p:sp>
+        <p:nvSpPr>
+          <p:cNvPr id="16" name="Text 14"/>
+          <p:cNvSpPr/>
+          <p:nvPr/>
+        </p:nvSpPr>
+        <p:spPr>
+          <a:xfrm>
+            <a:off x="594360" y="4773168"/>
+            <a:ext cx="640080" cy="475488"/>
+          </a:xfrm>
+          <a:prstGeom prst="rect">
+            <a:avLst/>
+          </a:prstGeom>
+          <a:noFill/>
+          <a:ln/>
+        </p:spPr>
+        <p:txBody>
+          <a:bodyPr wrap="square" lIns="0" tIns="0" rIns="0" bIns="0" rtlCol="0" anchor="ctr"/>
+          <a:lstStyle/>
+          <a:p>
+            <a:pPr marL="0" indent="0">
+              <a:buNone/>
+            </a:pPr>
+            <a:r>
+              <a:rPr lang="en-US" sz="1500" b="1" dirty="0">
+                <a:solidFill>
+                  <a:srgbClr val="B87A2E"/>
+                </a:solidFill>
+                <a:latin typeface="Century Gothic" pitchFamily="34" charset="0"/>
+                <a:ea typeface="Century Gothic" pitchFamily="34" charset="-122"/>
+                <a:cs typeface="Century Gothic" pitchFamily="34" charset="-120"/>
+              </a:rPr>
+              <a:t>07</a:t>
+            </a:r>
+            <a:endParaRPr lang="en-US" sz="1500" dirty="0"/>
+          </a:p>
+        </p:txBody>
+      </p:sp>
+      <p:sp>
+        <p:nvSpPr>
+          <p:cNvPr id="17" name="Text 15"/>
+          <p:cNvSpPr/>
+          <p:nvPr/>
+        </p:nvSpPr>
+        <p:spPr>
+          <a:xfrm>
+            <a:off x="1371600" y="4773168"/>
+            <a:ext cx="7315200" cy="475488"/>
+          </a:xfrm>
+          <a:prstGeom prst="rect">
+            <a:avLst/>
+          </a:prstGeom>
+          <a:noFill/>
+          <a:ln/>
+        </p:spPr>
+        <p:txBody>
+          <a:bodyPr wrap="square" lIns="0" tIns="0" rIns="0" bIns="0" rtlCol="0" anchor="ctr"/>
+          <a:lstStyle/>
+          <a:p>
+            <a:pPr marL="0" indent="0">
+              <a:buNone/>
+            </a:pPr>
+            <a:r>
+              <a:rPr lang="en-US" sz="1700" dirty="0">
+                <a:solidFill>
+                  <a:srgbClr val="232323"/>
+                </a:solidFill>
+                <a:latin typeface="Calibri" pitchFamily="34" charset="0"/>
+                <a:ea typeface="Calibri" pitchFamily="34" charset="-122"/>
+                <a:cs typeface="Calibri" pitchFamily="34" charset="-120"/>
+              </a:rPr>
+              <a:t>Challenges &amp; issues</a:t>
+            </a:r>
+            <a:endParaRPr lang="en-US" sz="1700" dirty="0"/>
+          </a:p>
+        </p:txBody>
+      </p:sp>
+      <p:sp>
+        <p:nvSpPr>
+          <p:cNvPr id="18" name="Text 16"/>
+          <p:cNvSpPr/>
+          <p:nvPr/>
+        </p:nvSpPr>
+        <p:spPr>
+          <a:xfrm>
+            <a:off x="594360" y="5248656"/>
+            <a:ext cx="640080" cy="475488"/>
+          </a:xfrm>
+          <a:prstGeom prst="rect">
+            <a:avLst/>
+          </a:prstGeom>
+          <a:noFill/>
+          <a:ln/>
+        </p:spPr>
+        <p:txBody>
+          <a:bodyPr wrap="square" lIns="0" tIns="0" rIns="0" bIns="0" rtlCol="0" anchor="ctr"/>
+          <a:lstStyle/>
+          <a:p>
+            <a:pPr marL="0" indent="0">
+              <a:buNone/>
+            </a:pPr>
+            <a:r>
+              <a:rPr lang="en-US" sz="1500" b="1" dirty="0">
+                <a:solidFill>
+                  <a:srgbClr val="B87A2E"/>
+                </a:solidFill>
+                <a:latin typeface="Century Gothic" pitchFamily="34" charset="0"/>
+                <a:ea typeface="Century Gothic" pitchFamily="34" charset="-122"/>
+                <a:cs typeface="Century Gothic" pitchFamily="34" charset="-120"/>
+              </a:rPr>
+              <a:t>08</a:t>
+            </a:r>
+            <a:endParaRPr lang="en-US" sz="1500" dirty="0"/>
+          </a:p>
+        </p:txBody>
+      </p:sp>
+      <p:sp>
+        <p:nvSpPr>
+          <p:cNvPr id="19" name="Text 17"/>
+          <p:cNvSpPr/>
+          <p:nvPr/>
+        </p:nvSpPr>
+        <p:spPr>
+          <a:xfrm>
+            <a:off x="1371600" y="5248656"/>
+            <a:ext cx="7315200" cy="475488"/>
+          </a:xfrm>
+          <a:prstGeom prst="rect">
+            <a:avLst/>
+          </a:prstGeom>
+          <a:noFill/>
+          <a:ln/>
+        </p:spPr>
+        <p:txBody>
+          <a:bodyPr wrap="square" lIns="0" tIns="0" rIns="0" bIns="0" rtlCol="0" anchor="ctr"/>
+          <a:lstStyle/>
+          <a:p>
+            <a:pPr marL="0" indent="0">
+              <a:buNone/>
+            </a:pPr>
+            <a:r>
+              <a:rPr lang="en-US" sz="1700" dirty="0">
+                <a:solidFill>
+                  <a:srgbClr val="232323"/>
+                </a:solidFill>
+                <a:latin typeface="Calibri" pitchFamily="34" charset="0"/>
+                <a:ea typeface="Calibri" pitchFamily="34" charset="-122"/>
+                <a:cs typeface="Calibri" pitchFamily="34" charset="-120"/>
+              </a:rPr>
+              <a:t>Live demo</a:t>
+            </a:r>
+            <a:endParaRPr lang="en-US" sz="1700" dirty="0"/>
+          </a:p>
+        </p:txBody>
+      </p:sp>
+      <p:sp>
+        <p:nvSpPr>
+          <p:cNvPr id="20" name="Text 18"/>
+          <p:cNvSpPr/>
+          <p:nvPr/>
+        </p:nvSpPr>
+        <p:spPr>
+          <a:xfrm>
+            <a:off x="594360" y="5724144"/>
+            <a:ext cx="640080" cy="475488"/>
+          </a:xfrm>
+          <a:prstGeom prst="rect">
+            <a:avLst/>
+          </a:prstGeom>
+          <a:noFill/>
+          <a:ln/>
+        </p:spPr>
+        <p:txBody>
+          <a:bodyPr wrap="square" lIns="0" tIns="0" rIns="0" bIns="0" rtlCol="0" anchor="ctr"/>
+          <a:lstStyle/>
+          <a:p>
+            <a:pPr marL="0" indent="0">
+              <a:buNone/>
+            </a:pPr>
+            <a:r>
+              <a:rPr lang="en-US" sz="1500" b="1" dirty="0">
+                <a:solidFill>
+                  <a:srgbClr val="B87A2E"/>
+                </a:solidFill>
+                <a:latin typeface="Century Gothic" pitchFamily="34" charset="0"/>
+                <a:ea typeface="Century Gothic" pitchFamily="34" charset="-122"/>
+                <a:cs typeface="Century Gothic" pitchFamily="34" charset="-120"/>
+              </a:rPr>
+              <a:t>09</a:t>
+            </a:r>
+            <a:endParaRPr lang="en-US" sz="1500" dirty="0"/>
+          </a:p>
+        </p:txBody>
+      </p:sp>
+      <p:sp>
+        <p:nvSpPr>
+          <p:cNvPr id="21" name="Text 19"/>
+          <p:cNvSpPr/>
+          <p:nvPr/>
+        </p:nvSpPr>
+        <p:spPr>
+          <a:xfrm>
+            <a:off x="1371600" y="5724144"/>
+            <a:ext cx="7315200" cy="475488"/>
+          </a:xfrm>
+          <a:prstGeom prst="rect">
+            <a:avLst/>
+          </a:prstGeom>
+          <a:noFill/>
+          <a:ln/>
+        </p:spPr>
+        <p:txBody>
+          <a:bodyPr wrap="square" lIns="0" tIns="0" rIns="0" bIns="0" rtlCol="0" anchor="ctr"/>
+          <a:lstStyle/>
+          <a:p>
+            <a:pPr marL="0" indent="0">
+              <a:buNone/>
+            </a:pPr>
+            <a:r>
+              <a:rPr lang="en-US" sz="1700" dirty="0">
+                <a:solidFill>
+                  <a:srgbClr val="232323"/>
+                </a:solidFill>
+                <a:latin typeface="Calibri" pitchFamily="34" charset="0"/>
+                <a:ea typeface="Calibri" pitchFamily="34" charset="-122"/>
+                <a:cs typeface="Calibri" pitchFamily="34" charset="-120"/>
+              </a:rPr>
+              <a:t>Q &amp; A</a:t>
+            </a:r>
+            <a:endParaRPr lang="en-US" sz="1700" dirty="0"/>
+          </a:p>
+        </p:txBody>
+      </p:sp>
+      <p:sp>
+        <p:nvSpPr>
+          <p:cNvPr id="22" name="Text 20"/>
+          <p:cNvSpPr/>
+          <p:nvPr/>
+        </p:nvSpPr>
+        <p:spPr>
+          <a:xfrm>
+            <a:off x="594360" y="6473952"/>
+            <a:ext cx="5486400" cy="274320"/>
+          </a:xfrm>
+          <a:prstGeom prst="rect">
+            <a:avLst/>
+          </a:prstGeom>
+          <a:noFill/>
+          <a:ln/>
+        </p:spPr>
+        <p:txBody>
+          <a:bodyPr wrap="square" lIns="0" tIns="0" rIns="0" bIns="0" rtlCol="0" anchor="ctr"/>
+          <a:lstStyle/>
+          <a:p>
+            <a:pPr marL="0" indent="0">
+              <a:buNone/>
+            </a:pPr>
+            <a:r>
+              <a:rPr lang="en-US" sz="900" dirty="0">
+                <a:solidFill>
+                  <a:srgbClr val="6B6B68"/>
+                </a:solidFill>
+                <a:latin typeface="Calibri" pitchFamily="34" charset="0"/>
+                <a:ea typeface="Calibri" pitchFamily="34" charset="-122"/>
+                <a:cs typeface="Calibri" pitchFamily="34" charset="-120"/>
+              </a:rPr>
+              <a:t>Room Stylist — Berre.ca</a:t>
+            </a:r>
+            <a:endParaRPr lang="en-US" sz="900" dirty="0"/>
+          </a:p>
+        </p:txBody>
+      </p:sp>
+      <p:sp>
+        <p:nvSpPr>
+          <p:cNvPr id="23" name="Text 21"/>
+          <p:cNvSpPr/>
+          <p:nvPr/>
+        </p:nvSpPr>
+        <p:spPr>
+          <a:xfrm>
+            <a:off x="11048695" y="6473952"/>
+            <a:ext cx="548640" cy="274320"/>
+          </a:xfrm>
+          <a:prstGeom prst="rect">
+            <a:avLst/>
+          </a:prstGeom>
+          <a:noFill/>
+          <a:ln/>
+        </p:spPr>
+        <p:txBody>
+          <a:bodyPr wrap="square" lIns="0" tIns="0" rIns="0" bIns="0" rtlCol="0" anchor="ctr"/>
+          <a:lstStyle/>
+          <a:p>
+            <a:pPr marL="0" indent="0" algn="r">
+              <a:buNone/>
+            </a:pPr>
+            <a:r>
+              <a:rPr lang="en-US" sz="900" dirty="0">
+                <a:solidFill>
+                  <a:srgbClr val="6B6B68"/>
+                </a:solidFill>
+                <a:latin typeface="Calibri" pitchFamily="34" charset="0"/>
+                <a:ea typeface="Calibri" pitchFamily="34" charset="-122"/>
+                <a:cs typeface="Calibri" pitchFamily="34" charset="-120"/>
+              </a:rPr>
+              <a:t>2</a:t>
+            </a:r>
+            <a:endParaRPr lang="en-US" sz="900" dirty="0"/>
           </a:p>
         </p:txBody>
       </p:sp>
@@ -3808,14 +4274,15 @@
 </p:sld>
 </file>
 
-<file path=ppt/slides/slide2.xml><?xml version="1.0" encoding="utf-8"?>
+<file path=ppt/slides/slide3.xml><?xml version="1.0" encoding="utf-8"?>
 <p:sld xmlns:a="http://schemas.openxmlformats.org/drawingml/2006/main" xmlns:r="http://schemas.openxmlformats.org/officeDocument/2006/relationships" xmlns:p="http://schemas.openxmlformats.org/presentationml/2006/main">
-  <p:cSld name="Slide 2">
+  <p:cSld name="Slide 3">
     <p:bg>
       <p:bgPr>
         <a:solidFill>
           <a:srgbClr val="FFFFFF"/>
         </a:solidFill>
+        <a:effectLst/>
       </p:bgPr>
     </p:bg>
     <p:spTree>
@@ -3853,11 +4320,11 @@
           <a:bodyPr wrap="square" lIns="0" tIns="0" rIns="0" bIns="0" rtlCol="0" anchor="ctr"/>
           <a:lstStyle/>
           <a:p>
-            <a:pPr algn="l" indent="0" marL="0">
+            <a:pPr marL="0" indent="0" algn="l">
               <a:buNone/>
             </a:pPr>
             <a:r>
-              <a:rPr lang="en-US" sz="1200" b="1" spc="200" kern="0" dirty="0">
+              <a:rPr lang="en-US" sz="1200" b="1" kern="0" spc="200" dirty="0">
                 <a:solidFill>
                   <a:srgbClr val="B87A2E"/>
                 </a:solidFill>
@@ -3865,7 +4332,7 @@
                 <a:ea typeface="Century Gothic" pitchFamily="34" charset="-122"/>
                 <a:cs typeface="Century Gothic" pitchFamily="34" charset="-120"/>
               </a:rPr>
-              <a:t>OVERVIEW</a:t>
+              <a:t>01 — PROBLEM</a:t>
             </a:r>
             <a:endParaRPr lang="en-US" sz="1200" dirty="0"/>
           </a:p>
@@ -3892,7 +4359,7 @@
           <a:bodyPr wrap="square" lIns="0" tIns="0" rIns="0" bIns="0" rtlCol="0" anchor="ctr"/>
           <a:lstStyle/>
           <a:p>
-            <a:pPr algn="l" indent="0" marL="0">
+            <a:pPr marL="0" indent="0" algn="l">
               <a:buNone/>
             </a:pPr>
             <a:r>
@@ -3904,7 +4371,7 @@
                 <a:ea typeface="Century Gothic" pitchFamily="34" charset="-122"/>
                 <a:cs typeface="Century Gothic" pitchFamily="34" charset="-120"/>
               </a:rPr>
-              <a:t>Agenda</a:t>
+              <a:t>Problem Statement</a:t>
             </a:r>
             <a:endParaRPr lang="en-US" sz="3200" dirty="0"/>
           </a:p>
@@ -3918,8 +4385,8 @@
         </p:nvSpPr>
         <p:spPr>
           <a:xfrm>
-            <a:off x="594360" y="1920240"/>
-            <a:ext cx="640080" cy="475488"/>
+            <a:off x="594360" y="1828800"/>
+            <a:ext cx="10881360" cy="914400"/>
           </a:xfrm>
           <a:prstGeom prst="rect">
             <a:avLst/>
@@ -3931,11 +4398,179 @@
           <a:bodyPr wrap="square" lIns="0" tIns="0" rIns="0" bIns="0" rtlCol="0" anchor="ctr"/>
           <a:lstStyle/>
           <a:p>
-            <a:pPr indent="0" marL="0">
+            <a:pPr marL="0" indent="0">
+              <a:lnSpc>
+                <a:spcPct val="125000"/>
+              </a:lnSpc>
               <a:buNone/>
             </a:pPr>
             <a:r>
-              <a:rPr lang="en-US" sz="1500" b="1" dirty="0">
+              <a:rPr lang="en-US" sz="1900" b="1" dirty="0">
+                <a:solidFill>
+                  <a:srgbClr val="1C2B45"/>
+                </a:solidFill>
+                <a:latin typeface="Calibri" pitchFamily="34" charset="0"/>
+                <a:ea typeface="Calibri" pitchFamily="34" charset="-122"/>
+                <a:cs typeface="Calibri" pitchFamily="34" charset="-120"/>
+              </a:rPr>
+              <a:t>Berre.ca sells furniture across 6+ style families — from Mid-Century Modern to Bellona's Traditional collections.</a:t>
+            </a:r>
+            <a:endParaRPr lang="en-US" sz="1900" dirty="0"/>
+          </a:p>
+        </p:txBody>
+      </p:sp>
+      <p:sp>
+        <p:nvSpPr>
+          <p:cNvPr id="5" name="Text 3"/>
+          <p:cNvSpPr/>
+          <p:nvPr/>
+        </p:nvSpPr>
+        <p:spPr>
+          <a:xfrm>
+            <a:off x="594360" y="2880360"/>
+            <a:ext cx="6400800" cy="2011680"/>
+          </a:xfrm>
+          <a:prstGeom prst="rect">
+            <a:avLst/>
+          </a:prstGeom>
+          <a:noFill/>
+          <a:ln/>
+        </p:spPr>
+        <p:txBody>
+          <a:bodyPr wrap="square" lIns="0" tIns="0" rIns="0" bIns="0" rtlCol="0" anchor="ctr"/>
+          <a:lstStyle/>
+          <a:p>
+            <a:pPr marL="342900" indent="-342900">
+              <a:lnSpc>
+                <a:spcPct val="130000"/>
+              </a:lnSpc>
+              <a:spcAft>
+                <a:spcPts val="1400"/>
+              </a:spcAft>
+              <a:buSzPct val="100000"/>
+              <a:buChar char="•"/>
+            </a:pPr>
+            <a:r>
+              <a:rPr lang="en-US" sz="1600" dirty="0">
+                <a:solidFill>
+                  <a:srgbClr val="232323"/>
+                </a:solidFill>
+                <a:latin typeface="Calibri" pitchFamily="34" charset="0"/>
+                <a:ea typeface="Calibri" pitchFamily="34" charset="-122"/>
+                <a:cs typeface="Calibri" pitchFamily="34" charset="-120"/>
+              </a:rPr>
+              <a:t>Hundreds of individual products, but no fast way to match a room's style to the right furniture</a:t>
+            </a:r>
+            <a:endParaRPr lang="en-US" sz="1600" dirty="0"/>
+          </a:p>
+          <a:p>
+            <a:pPr marL="342900" indent="-342900">
+              <a:lnSpc>
+                <a:spcPct val="130000"/>
+              </a:lnSpc>
+              <a:spcAft>
+                <a:spcPts val="1400"/>
+              </a:spcAft>
+              <a:buSzPct val="100000"/>
+              <a:buChar char="•"/>
+            </a:pPr>
+            <a:r>
+              <a:rPr lang="en-US" sz="1600" dirty="0">
+                <a:solidFill>
+                  <a:srgbClr val="232323"/>
+                </a:solidFill>
+                <a:latin typeface="Calibri" pitchFamily="34" charset="0"/>
+                <a:ea typeface="Calibri" pitchFamily="34" charset="-122"/>
+                <a:cs typeface="Calibri" pitchFamily="34" charset="-120"/>
+              </a:rPr>
+              <a:t>Browsing by category name doesn't capture visual similarity</a:t>
+            </a:r>
+            <a:endParaRPr lang="en-US" sz="1600" dirty="0"/>
+          </a:p>
+          <a:p>
+            <a:pPr marL="342900" indent="-342900">
+              <a:lnSpc>
+                <a:spcPct val="130000"/>
+              </a:lnSpc>
+              <a:spcAft>
+                <a:spcPts val="1400"/>
+              </a:spcAft>
+              <a:buSzPct val="100000"/>
+              <a:buChar char="•"/>
+            </a:pPr>
+            <a:r>
+              <a:rPr lang="en-US" sz="1600" dirty="0">
+                <a:solidFill>
+                  <a:srgbClr val="232323"/>
+                </a:solidFill>
+                <a:latin typeface="Calibri" pitchFamily="34" charset="0"/>
+                <a:ea typeface="Calibri" pitchFamily="34" charset="-122"/>
+                <a:cs typeface="Calibri" pitchFamily="34" charset="-120"/>
+              </a:rPr>
+              <a:t>Shoppers scroll through pages that don't reflect what their room actually looks like</a:t>
+            </a:r>
+            <a:endParaRPr lang="en-US" sz="1600" dirty="0"/>
+          </a:p>
+        </p:txBody>
+      </p:sp>
+      <p:sp>
+        <p:nvSpPr>
+          <p:cNvPr id="6" name="Shape 4"/>
+          <p:cNvSpPr/>
+          <p:nvPr/>
+        </p:nvSpPr>
+        <p:spPr>
+          <a:xfrm>
+            <a:off x="7680960" y="2971800"/>
+            <a:ext cx="3977640" cy="2377440"/>
+          </a:xfrm>
+          <a:prstGeom prst="rect">
+            <a:avLst/>
+          </a:prstGeom>
+          <a:solidFill>
+            <a:srgbClr val="F2F2EF"/>
+          </a:solidFill>
+          <a:ln w="12700">
+            <a:solidFill>
+              <a:srgbClr val="F2F2EF"/>
+            </a:solidFill>
+            <a:prstDash val="solid"/>
+          </a:ln>
+        </p:spPr>
+        <p:txBody>
+          <a:bodyPr/>
+          <a:lstStyle/>
+          <a:p>
+            <a:endParaRPr lang="tr-TR"/>
+          </a:p>
+        </p:txBody>
+      </p:sp>
+      <p:sp>
+        <p:nvSpPr>
+          <p:cNvPr id="7" name="Text 5"/>
+          <p:cNvSpPr/>
+          <p:nvPr/>
+        </p:nvSpPr>
+        <p:spPr>
+          <a:xfrm>
+            <a:off x="7955280" y="3200400"/>
+            <a:ext cx="3474720" cy="274320"/>
+          </a:xfrm>
+          <a:prstGeom prst="rect">
+            <a:avLst/>
+          </a:prstGeom>
+          <a:noFill/>
+          <a:ln/>
+        </p:spPr>
+        <p:txBody>
+          <a:bodyPr wrap="square" lIns="0" tIns="0" rIns="0" bIns="0" rtlCol="0" anchor="ctr"/>
+          <a:lstStyle/>
+          <a:p>
+            <a:pPr marL="0" indent="0">
+              <a:buNone/>
+            </a:pPr>
+            <a:r>
+              <a:rPr lang="en-US" sz="1100" b="1" kern="0" spc="150" dirty="0">
                 <a:solidFill>
                   <a:srgbClr val="B87A2E"/>
                 </a:solidFill>
@@ -3943,22 +4578,22 @@
                 <a:ea typeface="Century Gothic" pitchFamily="34" charset="-122"/>
                 <a:cs typeface="Century Gothic" pitchFamily="34" charset="-120"/>
               </a:rPr>
-              <a:t>01</a:t>
-            </a:r>
-            <a:endParaRPr lang="en-US" sz="1500" dirty="0"/>
-          </a:p>
-        </p:txBody>
-      </p:sp>
-      <p:sp>
-        <p:nvSpPr>
-          <p:cNvPr id="5" name="Text 3"/>
-          <p:cNvSpPr/>
-          <p:nvPr/>
-        </p:nvSpPr>
-        <p:spPr>
-          <a:xfrm>
-            <a:off x="1371600" y="1920240"/>
-            <a:ext cx="7315200" cy="475488"/>
+              <a:t>THE GOAL</a:t>
+            </a:r>
+            <a:endParaRPr lang="en-US" sz="1100" dirty="0"/>
+          </a:p>
+        </p:txBody>
+      </p:sp>
+      <p:sp>
+        <p:nvSpPr>
+          <p:cNvPr id="8" name="Text 6"/>
+          <p:cNvSpPr/>
+          <p:nvPr/>
+        </p:nvSpPr>
+        <p:spPr>
+          <a:xfrm>
+            <a:off x="7955280" y="3566160"/>
+            <a:ext cx="3474720" cy="1645920"/>
           </a:xfrm>
           <a:prstGeom prst="rect">
             <a:avLst/>
@@ -3970,34 +4605,37 @@
           <a:bodyPr wrap="square" lIns="0" tIns="0" rIns="0" bIns="0" rtlCol="0" anchor="ctr"/>
           <a:lstStyle/>
           <a:p>
-            <a:pPr indent="0" marL="0">
+            <a:pPr marL="0" indent="0">
+              <a:lnSpc>
+                <a:spcPct val="130000"/>
+              </a:lnSpc>
               <a:buNone/>
             </a:pPr>
             <a:r>
-              <a:rPr lang="en-US" sz="1700" dirty="0">
-                <a:solidFill>
-                  <a:srgbClr val="232323"/>
+              <a:rPr lang="en-US" sz="1500" b="1" dirty="0">
+                <a:solidFill>
+                  <a:srgbClr val="1C2B45"/>
                 </a:solidFill>
                 <a:latin typeface="Calibri" pitchFamily="34" charset="0"/>
                 <a:ea typeface="Calibri" pitchFamily="34" charset="-122"/>
                 <a:cs typeface="Calibri" pitchFamily="34" charset="-120"/>
               </a:rPr>
-              <a:t>Problem</a:t>
-            </a:r>
-            <a:endParaRPr lang="en-US" sz="1700" dirty="0"/>
-          </a:p>
-        </p:txBody>
-      </p:sp>
-      <p:sp>
-        <p:nvSpPr>
-          <p:cNvPr id="6" name="Text 4"/>
-          <p:cNvSpPr/>
-          <p:nvPr/>
-        </p:nvSpPr>
-        <p:spPr>
-          <a:xfrm>
-            <a:off x="594360" y="2395728"/>
-            <a:ext cx="640080" cy="475488"/>
+              <a:t>Classify a room photo's style, then recommend real, in-catalog Berre products that match.</a:t>
+            </a:r>
+            <a:endParaRPr lang="en-US" sz="1500" dirty="0"/>
+          </a:p>
+        </p:txBody>
+      </p:sp>
+      <p:sp>
+        <p:nvSpPr>
+          <p:cNvPr id="9" name="Text 7"/>
+          <p:cNvSpPr/>
+          <p:nvPr/>
+        </p:nvSpPr>
+        <p:spPr>
+          <a:xfrm>
+            <a:off x="594360" y="6473952"/>
+            <a:ext cx="5486400" cy="274320"/>
           </a:xfrm>
           <a:prstGeom prst="rect">
             <a:avLst/>
@@ -4009,73 +4647,34 @@
           <a:bodyPr wrap="square" lIns="0" tIns="0" rIns="0" bIns="0" rtlCol="0" anchor="ctr"/>
           <a:lstStyle/>
           <a:p>
-            <a:pPr indent="0" marL="0">
+            <a:pPr marL="0" indent="0">
               <a:buNone/>
             </a:pPr>
             <a:r>
-              <a:rPr lang="en-US" sz="1500" b="1" dirty="0">
-                <a:solidFill>
-                  <a:srgbClr val="B87A2E"/>
-                </a:solidFill>
-                <a:latin typeface="Century Gothic" pitchFamily="34" charset="0"/>
-                <a:ea typeface="Century Gothic" pitchFamily="34" charset="-122"/>
-                <a:cs typeface="Century Gothic" pitchFamily="34" charset="-120"/>
-              </a:rPr>
-              <a:t>02</a:t>
-            </a:r>
-            <a:endParaRPr lang="en-US" sz="1500" dirty="0"/>
-          </a:p>
-        </p:txBody>
-      </p:sp>
-      <p:sp>
-        <p:nvSpPr>
-          <p:cNvPr id="7" name="Text 5"/>
-          <p:cNvSpPr/>
-          <p:nvPr/>
-        </p:nvSpPr>
-        <p:spPr>
-          <a:xfrm>
-            <a:off x="1371600" y="2395728"/>
-            <a:ext cx="7315200" cy="475488"/>
-          </a:xfrm>
-          <a:prstGeom prst="rect">
-            <a:avLst/>
-          </a:prstGeom>
-          <a:noFill/>
-          <a:ln/>
-        </p:spPr>
-        <p:txBody>
-          <a:bodyPr wrap="square" lIns="0" tIns="0" rIns="0" bIns="0" rtlCol="0" anchor="ctr"/>
-          <a:lstStyle/>
-          <a:p>
-            <a:pPr indent="0" marL="0">
-              <a:buNone/>
-            </a:pPr>
-            <a:r>
-              <a:rPr lang="en-US" sz="1700" dirty="0">
-                <a:solidFill>
-                  <a:srgbClr val="232323"/>
+              <a:rPr lang="en-US" sz="900" dirty="0">
+                <a:solidFill>
+                  <a:srgbClr val="6B6B68"/>
                 </a:solidFill>
                 <a:latin typeface="Calibri" pitchFamily="34" charset="0"/>
                 <a:ea typeface="Calibri" pitchFamily="34" charset="-122"/>
                 <a:cs typeface="Calibri" pitchFamily="34" charset="-120"/>
               </a:rPr>
-              <a:t>Why this problem</a:t>
-            </a:r>
-            <a:endParaRPr lang="en-US" sz="1700" dirty="0"/>
-          </a:p>
-        </p:txBody>
-      </p:sp>
-      <p:sp>
-        <p:nvSpPr>
-          <p:cNvPr id="8" name="Text 6"/>
-          <p:cNvSpPr/>
-          <p:nvPr/>
-        </p:nvSpPr>
-        <p:spPr>
-          <a:xfrm>
-            <a:off x="594360" y="2871216"/>
-            <a:ext cx="640080" cy="475488"/>
+              <a:t>Room Stylist — Berre.ca</a:t>
+            </a:r>
+            <a:endParaRPr lang="en-US" sz="900" dirty="0"/>
+          </a:p>
+        </p:txBody>
+      </p:sp>
+      <p:sp>
+        <p:nvSpPr>
+          <p:cNvPr id="10" name="Text 8"/>
+          <p:cNvSpPr/>
+          <p:nvPr/>
+        </p:nvSpPr>
+        <p:spPr>
+          <a:xfrm>
+            <a:off x="11048695" y="6473952"/>
+            <a:ext cx="548640" cy="274320"/>
           </a:xfrm>
           <a:prstGeom prst="rect">
             <a:avLst/>
@@ -4087,604 +4686,19 @@
           <a:bodyPr wrap="square" lIns="0" tIns="0" rIns="0" bIns="0" rtlCol="0" anchor="ctr"/>
           <a:lstStyle/>
           <a:p>
-            <a:pPr indent="0" marL="0">
+            <a:pPr marL="0" indent="0" algn="r">
               <a:buNone/>
             </a:pPr>
             <a:r>
-              <a:rPr lang="en-US" sz="1500" b="1" dirty="0">
-                <a:solidFill>
-                  <a:srgbClr val="B87A2E"/>
-                </a:solidFill>
-                <a:latin typeface="Century Gothic" pitchFamily="34" charset="0"/>
-                <a:ea typeface="Century Gothic" pitchFamily="34" charset="-122"/>
-                <a:cs typeface="Century Gothic" pitchFamily="34" charset="-120"/>
-              </a:rPr>
-              <a:t>03</a:t>
-            </a:r>
-            <a:endParaRPr lang="en-US" sz="1500" dirty="0"/>
-          </a:p>
-        </p:txBody>
-      </p:sp>
-      <p:sp>
-        <p:nvSpPr>
-          <p:cNvPr id="9" name="Text 7"/>
-          <p:cNvSpPr/>
-          <p:nvPr/>
-        </p:nvSpPr>
-        <p:spPr>
-          <a:xfrm>
-            <a:off x="1371600" y="2871216"/>
-            <a:ext cx="7315200" cy="475488"/>
-          </a:xfrm>
-          <a:prstGeom prst="rect">
-            <a:avLst/>
-          </a:prstGeom>
-          <a:noFill/>
-          <a:ln/>
-        </p:spPr>
-        <p:txBody>
-          <a:bodyPr wrap="square" lIns="0" tIns="0" rIns="0" bIns="0" rtlCol="0" anchor="ctr"/>
-          <a:lstStyle/>
-          <a:p>
-            <a:pPr indent="0" marL="0">
-              <a:buNone/>
-            </a:pPr>
-            <a:r>
-              <a:rPr lang="en-US" sz="1700" dirty="0">
-                <a:solidFill>
-                  <a:srgbClr val="232323"/>
+              <a:rPr lang="en-US" sz="900" dirty="0">
+                <a:solidFill>
+                  <a:srgbClr val="6B6B68"/>
                 </a:solidFill>
                 <a:latin typeface="Calibri" pitchFamily="34" charset="0"/>
                 <a:ea typeface="Calibri" pitchFamily="34" charset="-122"/>
                 <a:cs typeface="Calibri" pitchFamily="34" charset="-120"/>
               </a:rPr>
-              <a:t>Literature review</a:t>
-            </a:r>
-            <a:endParaRPr lang="en-US" sz="1700" dirty="0"/>
-          </a:p>
-        </p:txBody>
-      </p:sp>
-      <p:sp>
-        <p:nvSpPr>
-          <p:cNvPr id="10" name="Text 8"/>
-          <p:cNvSpPr/>
-          <p:nvPr/>
-        </p:nvSpPr>
-        <p:spPr>
-          <a:xfrm>
-            <a:off x="594360" y="3346704"/>
-            <a:ext cx="640080" cy="475488"/>
-          </a:xfrm>
-          <a:prstGeom prst="rect">
-            <a:avLst/>
-          </a:prstGeom>
-          <a:noFill/>
-          <a:ln/>
-        </p:spPr>
-        <p:txBody>
-          <a:bodyPr wrap="square" lIns="0" tIns="0" rIns="0" bIns="0" rtlCol="0" anchor="ctr"/>
-          <a:lstStyle/>
-          <a:p>
-            <a:pPr indent="0" marL="0">
-              <a:buNone/>
-            </a:pPr>
-            <a:r>
-              <a:rPr lang="en-US" sz="1500" b="1" dirty="0">
-                <a:solidFill>
-                  <a:srgbClr val="B87A2E"/>
-                </a:solidFill>
-                <a:latin typeface="Century Gothic" pitchFamily="34" charset="0"/>
-                <a:ea typeface="Century Gothic" pitchFamily="34" charset="-122"/>
-                <a:cs typeface="Century Gothic" pitchFamily="34" charset="-120"/>
-              </a:rPr>
-              <a:t>04</a:t>
-            </a:r>
-            <a:endParaRPr lang="en-US" sz="1500" dirty="0"/>
-          </a:p>
-        </p:txBody>
-      </p:sp>
-      <p:sp>
-        <p:nvSpPr>
-          <p:cNvPr id="11" name="Text 9"/>
-          <p:cNvSpPr/>
-          <p:nvPr/>
-        </p:nvSpPr>
-        <p:spPr>
-          <a:xfrm>
-            <a:off x="1371600" y="3346704"/>
-            <a:ext cx="7315200" cy="475488"/>
-          </a:xfrm>
-          <a:prstGeom prst="rect">
-            <a:avLst/>
-          </a:prstGeom>
-          <a:noFill/>
-          <a:ln/>
-        </p:spPr>
-        <p:txBody>
-          <a:bodyPr wrap="square" lIns="0" tIns="0" rIns="0" bIns="0" rtlCol="0" anchor="ctr"/>
-          <a:lstStyle/>
-          <a:p>
-            <a:pPr indent="0" marL="0">
-              <a:buNone/>
-            </a:pPr>
-            <a:r>
-              <a:rPr lang="en-US" sz="1700" dirty="0">
-                <a:solidFill>
-                  <a:srgbClr val="232323"/>
-                </a:solidFill>
-                <a:latin typeface="Calibri" pitchFamily="34" charset="0"/>
-                <a:ea typeface="Calibri" pitchFamily="34" charset="-122"/>
-                <a:cs typeface="Calibri" pitchFamily="34" charset="-120"/>
-              </a:rPr>
-              <a:t>Methodology — ML Canvas</a:t>
-            </a:r>
-            <a:endParaRPr lang="en-US" sz="1700" dirty="0"/>
-          </a:p>
-        </p:txBody>
-      </p:sp>
-      <p:sp>
-        <p:nvSpPr>
-          <p:cNvPr id="12" name="Text 10"/>
-          <p:cNvSpPr/>
-          <p:nvPr/>
-        </p:nvSpPr>
-        <p:spPr>
-          <a:xfrm>
-            <a:off x="594360" y="3822192"/>
-            <a:ext cx="640080" cy="475488"/>
-          </a:xfrm>
-          <a:prstGeom prst="rect">
-            <a:avLst/>
-          </a:prstGeom>
-          <a:noFill/>
-          <a:ln/>
-        </p:spPr>
-        <p:txBody>
-          <a:bodyPr wrap="square" lIns="0" tIns="0" rIns="0" bIns="0" rtlCol="0" anchor="ctr"/>
-          <a:lstStyle/>
-          <a:p>
-            <a:pPr indent="0" marL="0">
-              <a:buNone/>
-            </a:pPr>
-            <a:r>
-              <a:rPr lang="en-US" sz="1500" b="1" dirty="0">
-                <a:solidFill>
-                  <a:srgbClr val="B87A2E"/>
-                </a:solidFill>
-                <a:latin typeface="Century Gothic" pitchFamily="34" charset="0"/>
-                <a:ea typeface="Century Gothic" pitchFamily="34" charset="-122"/>
-                <a:cs typeface="Century Gothic" pitchFamily="34" charset="-120"/>
-              </a:rPr>
-              <a:t>05</a:t>
-            </a:r>
-            <a:endParaRPr lang="en-US" sz="1500" dirty="0"/>
-          </a:p>
-        </p:txBody>
-      </p:sp>
-      <p:sp>
-        <p:nvSpPr>
-          <p:cNvPr id="13" name="Text 11"/>
-          <p:cNvSpPr/>
-          <p:nvPr/>
-        </p:nvSpPr>
-        <p:spPr>
-          <a:xfrm>
-            <a:off x="1371600" y="3822192"/>
-            <a:ext cx="7315200" cy="475488"/>
-          </a:xfrm>
-          <a:prstGeom prst="rect">
-            <a:avLst/>
-          </a:prstGeom>
-          <a:noFill/>
-          <a:ln/>
-        </p:spPr>
-        <p:txBody>
-          <a:bodyPr wrap="square" lIns="0" tIns="0" rIns="0" bIns="0" rtlCol="0" anchor="ctr"/>
-          <a:lstStyle/>
-          <a:p>
-            <a:pPr indent="0" marL="0">
-              <a:buNone/>
-            </a:pPr>
-            <a:r>
-              <a:rPr lang="en-US" sz="1700" dirty="0">
-                <a:solidFill>
-                  <a:srgbClr val="232323"/>
-                </a:solidFill>
-                <a:latin typeface="Calibri" pitchFamily="34" charset="0"/>
-                <a:ea typeface="Calibri" pitchFamily="34" charset="-122"/>
-                <a:cs typeface="Calibri" pitchFamily="34" charset="-120"/>
-              </a:rPr>
-              <a:t>Model benchmarking</a:t>
-            </a:r>
-            <a:endParaRPr lang="en-US" sz="1700" dirty="0"/>
-          </a:p>
-        </p:txBody>
-      </p:sp>
-      <p:sp>
-        <p:nvSpPr>
-          <p:cNvPr id="14" name="Text 12"/>
-          <p:cNvSpPr/>
-          <p:nvPr/>
-        </p:nvSpPr>
-        <p:spPr>
-          <a:xfrm>
-            <a:off x="594360" y="4297680"/>
-            <a:ext cx="640080" cy="475488"/>
-          </a:xfrm>
-          <a:prstGeom prst="rect">
-            <a:avLst/>
-          </a:prstGeom>
-          <a:noFill/>
-          <a:ln/>
-        </p:spPr>
-        <p:txBody>
-          <a:bodyPr wrap="square" lIns="0" tIns="0" rIns="0" bIns="0" rtlCol="0" anchor="ctr"/>
-          <a:lstStyle/>
-          <a:p>
-            <a:pPr indent="0" marL="0">
-              <a:buNone/>
-            </a:pPr>
-            <a:r>
-              <a:rPr lang="en-US" sz="1500" b="1" dirty="0">
-                <a:solidFill>
-                  <a:srgbClr val="B87A2E"/>
-                </a:solidFill>
-                <a:latin typeface="Century Gothic" pitchFamily="34" charset="0"/>
-                <a:ea typeface="Century Gothic" pitchFamily="34" charset="-122"/>
-                <a:cs typeface="Century Gothic" pitchFamily="34" charset="-120"/>
-              </a:rPr>
-              <a:t>06</a:t>
-            </a:r>
-            <a:endParaRPr lang="en-US" sz="1500" dirty="0"/>
-          </a:p>
-        </p:txBody>
-      </p:sp>
-      <p:sp>
-        <p:nvSpPr>
-          <p:cNvPr id="15" name="Text 13"/>
-          <p:cNvSpPr/>
-          <p:nvPr/>
-        </p:nvSpPr>
-        <p:spPr>
-          <a:xfrm>
-            <a:off x="1371600" y="4297680"/>
-            <a:ext cx="7315200" cy="475488"/>
-          </a:xfrm>
-          <a:prstGeom prst="rect">
-            <a:avLst/>
-          </a:prstGeom>
-          <a:noFill/>
-          <a:ln/>
-        </p:spPr>
-        <p:txBody>
-          <a:bodyPr wrap="square" lIns="0" tIns="0" rIns="0" bIns="0" rtlCol="0" anchor="ctr"/>
-          <a:lstStyle/>
-          <a:p>
-            <a:pPr indent="0" marL="0">
-              <a:buNone/>
-            </a:pPr>
-            <a:r>
-              <a:rPr lang="en-US" sz="1700" dirty="0">
-                <a:solidFill>
-                  <a:srgbClr val="232323"/>
-                </a:solidFill>
-                <a:latin typeface="Calibri" pitchFamily="34" charset="0"/>
-                <a:ea typeface="Calibri" pitchFamily="34" charset="-122"/>
-                <a:cs typeface="Calibri" pitchFamily="34" charset="-120"/>
-              </a:rPr>
-              <a:t>Model deployment</a:t>
-            </a:r>
-            <a:endParaRPr lang="en-US" sz="1700" dirty="0"/>
-          </a:p>
-        </p:txBody>
-      </p:sp>
-      <p:sp>
-        <p:nvSpPr>
-          <p:cNvPr id="16" name="Text 14"/>
-          <p:cNvSpPr/>
-          <p:nvPr/>
-        </p:nvSpPr>
-        <p:spPr>
-          <a:xfrm>
-            <a:off x="594360" y="4773168"/>
-            <a:ext cx="640080" cy="475488"/>
-          </a:xfrm>
-          <a:prstGeom prst="rect">
-            <a:avLst/>
-          </a:prstGeom>
-          <a:noFill/>
-          <a:ln/>
-        </p:spPr>
-        <p:txBody>
-          <a:bodyPr wrap="square" lIns="0" tIns="0" rIns="0" bIns="0" rtlCol="0" anchor="ctr"/>
-          <a:lstStyle/>
-          <a:p>
-            <a:pPr indent="0" marL="0">
-              <a:buNone/>
-            </a:pPr>
-            <a:r>
-              <a:rPr lang="en-US" sz="1500" b="1" dirty="0">
-                <a:solidFill>
-                  <a:srgbClr val="B87A2E"/>
-                </a:solidFill>
-                <a:latin typeface="Century Gothic" pitchFamily="34" charset="0"/>
-                <a:ea typeface="Century Gothic" pitchFamily="34" charset="-122"/>
-                <a:cs typeface="Century Gothic" pitchFamily="34" charset="-120"/>
-              </a:rPr>
-              <a:t>07</a:t>
-            </a:r>
-            <a:endParaRPr lang="en-US" sz="1500" dirty="0"/>
-          </a:p>
-        </p:txBody>
-      </p:sp>
-      <p:sp>
-        <p:nvSpPr>
-          <p:cNvPr id="17" name="Text 15"/>
-          <p:cNvSpPr/>
-          <p:nvPr/>
-        </p:nvSpPr>
-        <p:spPr>
-          <a:xfrm>
-            <a:off x="1371600" y="4773168"/>
-            <a:ext cx="7315200" cy="475488"/>
-          </a:xfrm>
-          <a:prstGeom prst="rect">
-            <a:avLst/>
-          </a:prstGeom>
-          <a:noFill/>
-          <a:ln/>
-        </p:spPr>
-        <p:txBody>
-          <a:bodyPr wrap="square" lIns="0" tIns="0" rIns="0" bIns="0" rtlCol="0" anchor="ctr"/>
-          <a:lstStyle/>
-          <a:p>
-            <a:pPr indent="0" marL="0">
-              <a:buNone/>
-            </a:pPr>
-            <a:r>
-              <a:rPr lang="en-US" sz="1700" dirty="0">
-                <a:solidFill>
-                  <a:srgbClr val="232323"/>
-                </a:solidFill>
-                <a:latin typeface="Calibri" pitchFamily="34" charset="0"/>
-                <a:ea typeface="Calibri" pitchFamily="34" charset="-122"/>
-                <a:cs typeface="Calibri" pitchFamily="34" charset="-120"/>
-              </a:rPr>
-              <a:t>Challenges &amp; issues</a:t>
-            </a:r>
-            <a:endParaRPr lang="en-US" sz="1700" dirty="0"/>
-          </a:p>
-        </p:txBody>
-      </p:sp>
-      <p:sp>
-        <p:nvSpPr>
-          <p:cNvPr id="18" name="Text 16"/>
-          <p:cNvSpPr/>
-          <p:nvPr/>
-        </p:nvSpPr>
-        <p:spPr>
-          <a:xfrm>
-            <a:off x="594360" y="5248656"/>
-            <a:ext cx="640080" cy="475488"/>
-          </a:xfrm>
-          <a:prstGeom prst="rect">
-            <a:avLst/>
-          </a:prstGeom>
-          <a:noFill/>
-          <a:ln/>
-        </p:spPr>
-        <p:txBody>
-          <a:bodyPr wrap="square" lIns="0" tIns="0" rIns="0" bIns="0" rtlCol="0" anchor="ctr"/>
-          <a:lstStyle/>
-          <a:p>
-            <a:pPr indent="0" marL="0">
-              <a:buNone/>
-            </a:pPr>
-            <a:r>
-              <a:rPr lang="en-US" sz="1500" b="1" dirty="0">
-                <a:solidFill>
-                  <a:srgbClr val="B87A2E"/>
-                </a:solidFill>
-                <a:latin typeface="Century Gothic" pitchFamily="34" charset="0"/>
-                <a:ea typeface="Century Gothic" pitchFamily="34" charset="-122"/>
-                <a:cs typeface="Century Gothic" pitchFamily="34" charset="-120"/>
-              </a:rPr>
-              <a:t>08</a:t>
-            </a:r>
-            <a:endParaRPr lang="en-US" sz="1500" dirty="0"/>
-          </a:p>
-        </p:txBody>
-      </p:sp>
-      <p:sp>
-        <p:nvSpPr>
-          <p:cNvPr id="19" name="Text 17"/>
-          <p:cNvSpPr/>
-          <p:nvPr/>
-        </p:nvSpPr>
-        <p:spPr>
-          <a:xfrm>
-            <a:off x="1371600" y="5248656"/>
-            <a:ext cx="7315200" cy="475488"/>
-          </a:xfrm>
-          <a:prstGeom prst="rect">
-            <a:avLst/>
-          </a:prstGeom>
-          <a:noFill/>
-          <a:ln/>
-        </p:spPr>
-        <p:txBody>
-          <a:bodyPr wrap="square" lIns="0" tIns="0" rIns="0" bIns="0" rtlCol="0" anchor="ctr"/>
-          <a:lstStyle/>
-          <a:p>
-            <a:pPr indent="0" marL="0">
-              <a:buNone/>
-            </a:pPr>
-            <a:r>
-              <a:rPr lang="en-US" sz="1700" dirty="0">
-                <a:solidFill>
-                  <a:srgbClr val="232323"/>
-                </a:solidFill>
-                <a:latin typeface="Calibri" pitchFamily="34" charset="0"/>
-                <a:ea typeface="Calibri" pitchFamily="34" charset="-122"/>
-                <a:cs typeface="Calibri" pitchFamily="34" charset="-120"/>
-              </a:rPr>
-              <a:t>Live demo</a:t>
-            </a:r>
-            <a:endParaRPr lang="en-US" sz="1700" dirty="0"/>
-          </a:p>
-        </p:txBody>
-      </p:sp>
-      <p:sp>
-        <p:nvSpPr>
-          <p:cNvPr id="20" name="Text 18"/>
-          <p:cNvSpPr/>
-          <p:nvPr/>
-        </p:nvSpPr>
-        <p:spPr>
-          <a:xfrm>
-            <a:off x="594360" y="5724144"/>
-            <a:ext cx="640080" cy="475488"/>
-          </a:xfrm>
-          <a:prstGeom prst="rect">
-            <a:avLst/>
-          </a:prstGeom>
-          <a:noFill/>
-          <a:ln/>
-        </p:spPr>
-        <p:txBody>
-          <a:bodyPr wrap="square" lIns="0" tIns="0" rIns="0" bIns="0" rtlCol="0" anchor="ctr"/>
-          <a:lstStyle/>
-          <a:p>
-            <a:pPr indent="0" marL="0">
-              <a:buNone/>
-            </a:pPr>
-            <a:r>
-              <a:rPr lang="en-US" sz="1500" b="1" dirty="0">
-                <a:solidFill>
-                  <a:srgbClr val="B87A2E"/>
-                </a:solidFill>
-                <a:latin typeface="Century Gothic" pitchFamily="34" charset="0"/>
-                <a:ea typeface="Century Gothic" pitchFamily="34" charset="-122"/>
-                <a:cs typeface="Century Gothic" pitchFamily="34" charset="-120"/>
-              </a:rPr>
-              <a:t>09</a:t>
-            </a:r>
-            <a:endParaRPr lang="en-US" sz="1500" dirty="0"/>
-          </a:p>
-        </p:txBody>
-      </p:sp>
-      <p:sp>
-        <p:nvSpPr>
-          <p:cNvPr id="21" name="Text 19"/>
-          <p:cNvSpPr/>
-          <p:nvPr/>
-        </p:nvSpPr>
-        <p:spPr>
-          <a:xfrm>
-            <a:off x="1371600" y="5724144"/>
-            <a:ext cx="7315200" cy="475488"/>
-          </a:xfrm>
-          <a:prstGeom prst="rect">
-            <a:avLst/>
-          </a:prstGeom>
-          <a:noFill/>
-          <a:ln/>
-        </p:spPr>
-        <p:txBody>
-          <a:bodyPr wrap="square" lIns="0" tIns="0" rIns="0" bIns="0" rtlCol="0" anchor="ctr"/>
-          <a:lstStyle/>
-          <a:p>
-            <a:pPr indent="0" marL="0">
-              <a:buNone/>
-            </a:pPr>
-            <a:r>
-              <a:rPr lang="en-US" sz="1700" dirty="0">
-                <a:solidFill>
-                  <a:srgbClr val="232323"/>
-                </a:solidFill>
-                <a:latin typeface="Calibri" pitchFamily="34" charset="0"/>
-                <a:ea typeface="Calibri" pitchFamily="34" charset="-122"/>
-                <a:cs typeface="Calibri" pitchFamily="34" charset="-120"/>
-              </a:rPr>
-              <a:t>Q &amp; A</a:t>
-            </a:r>
-            <a:endParaRPr lang="en-US" sz="1700" dirty="0"/>
-          </a:p>
-        </p:txBody>
-      </p:sp>
-      <p:sp>
-        <p:nvSpPr>
-          <p:cNvPr id="22" name="Text 20"/>
-          <p:cNvSpPr/>
-          <p:nvPr/>
-        </p:nvSpPr>
-        <p:spPr>
-          <a:xfrm>
-            <a:off x="594360" y="6473952"/>
-            <a:ext cx="5486400" cy="274320"/>
-          </a:xfrm>
-          <a:prstGeom prst="rect">
-            <a:avLst/>
-          </a:prstGeom>
-          <a:noFill/>
-          <a:ln/>
-        </p:spPr>
-        <p:txBody>
-          <a:bodyPr wrap="square" lIns="0" tIns="0" rIns="0" bIns="0" rtlCol="0" anchor="ctr"/>
-          <a:lstStyle/>
-          <a:p>
-            <a:pPr indent="0" marL="0">
-              <a:buNone/>
-            </a:pPr>
-            <a:r>
-              <a:rPr lang="en-US" sz="900" dirty="0">
-                <a:solidFill>
-                  <a:srgbClr val="6B6B68"/>
-                </a:solidFill>
-                <a:latin typeface="Calibri" pitchFamily="34" charset="0"/>
-                <a:ea typeface="Calibri" pitchFamily="34" charset="-122"/>
-                <a:cs typeface="Calibri" pitchFamily="34" charset="-120"/>
-              </a:rPr>
-              <a:t>Room Stylist — Berre.ca</a:t>
-            </a:r>
-            <a:endParaRPr lang="en-US" sz="900" dirty="0"/>
-          </a:p>
-        </p:txBody>
-      </p:sp>
-      <p:sp>
-        <p:nvSpPr>
-          <p:cNvPr id="23" name="Text 21"/>
-          <p:cNvSpPr/>
-          <p:nvPr/>
-        </p:nvSpPr>
-        <p:spPr>
-          <a:xfrm>
-            <a:off x="11048695" y="6473952"/>
-            <a:ext cx="548640" cy="274320"/>
-          </a:xfrm>
-          <a:prstGeom prst="rect">
-            <a:avLst/>
-          </a:prstGeom>
-          <a:noFill/>
-          <a:ln/>
-        </p:spPr>
-        <p:txBody>
-          <a:bodyPr wrap="square" lIns="0" tIns="0" rIns="0" bIns="0" rtlCol="0" anchor="ctr"/>
-          <a:lstStyle/>
-          <a:p>
-            <a:pPr algn="r" indent="0" marL="0">
-              <a:buNone/>
-            </a:pPr>
-            <a:r>
-              <a:rPr lang="en-US" sz="900" dirty="0">
-                <a:solidFill>
-                  <a:srgbClr val="6B6B68"/>
-                </a:solidFill>
-                <a:latin typeface="Calibri" pitchFamily="34" charset="0"/>
-                <a:ea typeface="Calibri" pitchFamily="34" charset="-122"/>
-                <a:cs typeface="Calibri" pitchFamily="34" charset="-120"/>
-              </a:rPr>
-              <a:t>2</a:t>
+              <a:t>3</a:t>
             </a:r>
             <a:endParaRPr lang="en-US" sz="900" dirty="0"/>
           </a:p>
@@ -4698,14 +4712,15 @@
 </p:sld>
 </file>
 
-<file path=ppt/slides/slide3.xml><?xml version="1.0" encoding="utf-8"?>
+<file path=ppt/slides/slide4.xml><?xml version="1.0" encoding="utf-8"?>
 <p:sld xmlns:a="http://schemas.openxmlformats.org/drawingml/2006/main" xmlns:r="http://schemas.openxmlformats.org/officeDocument/2006/relationships" xmlns:p="http://schemas.openxmlformats.org/presentationml/2006/main">
-  <p:cSld name="Slide 3">
+  <p:cSld name="Slide 4">
     <p:bg>
       <p:bgPr>
         <a:solidFill>
           <a:srgbClr val="FFFFFF"/>
         </a:solidFill>
+        <a:effectLst/>
       </p:bgPr>
     </p:bg>
     <p:spTree>
@@ -4743,11 +4758,11 @@
           <a:bodyPr wrap="square" lIns="0" tIns="0" rIns="0" bIns="0" rtlCol="0" anchor="ctr"/>
           <a:lstStyle/>
           <a:p>
-            <a:pPr algn="l" indent="0" marL="0">
+            <a:pPr marL="0" indent="0" algn="l">
               <a:buNone/>
             </a:pPr>
             <a:r>
-              <a:rPr lang="en-US" sz="1200" b="1" spc="200" kern="0" dirty="0">
+              <a:rPr lang="en-US" sz="1200" b="1" kern="0" spc="200" dirty="0">
                 <a:solidFill>
                   <a:srgbClr val="B87A2E"/>
                 </a:solidFill>
@@ -4755,7 +4770,7 @@
                 <a:ea typeface="Century Gothic" pitchFamily="34" charset="-122"/>
                 <a:cs typeface="Century Gothic" pitchFamily="34" charset="-120"/>
               </a:rPr>
-              <a:t>01 — PROBLEM</a:t>
+              <a:t>02 — MOTIVATION</a:t>
             </a:r>
             <a:endParaRPr lang="en-US" sz="1200" dirty="0"/>
           </a:p>
@@ -4782,7 +4797,7 @@
           <a:bodyPr wrap="square" lIns="0" tIns="0" rIns="0" bIns="0" rtlCol="0" anchor="ctr"/>
           <a:lstStyle/>
           <a:p>
-            <a:pPr algn="l" indent="0" marL="0">
+            <a:pPr marL="0" indent="0" algn="l">
               <a:buNone/>
             </a:pPr>
             <a:r>
@@ -4794,7 +4809,7 @@
                 <a:ea typeface="Century Gothic" pitchFamily="34" charset="-122"/>
                 <a:cs typeface="Century Gothic" pitchFamily="34" charset="-120"/>
               </a:rPr>
-              <a:t>Problem Statement</a:t>
+              <a:t>Why this problem</a:t>
             </a:r>
             <a:endParaRPr lang="en-US" sz="3200" dirty="0"/>
           </a:p>
@@ -4808,50 +4823,8 @@
         </p:nvSpPr>
         <p:spPr>
           <a:xfrm>
-            <a:off x="594360" y="1828800"/>
-            <a:ext cx="10881360" cy="914400"/>
-          </a:xfrm>
-          <a:prstGeom prst="rect">
-            <a:avLst/>
-          </a:prstGeom>
-          <a:noFill/>
-          <a:ln/>
-        </p:spPr>
-        <p:txBody>
-          <a:bodyPr wrap="square" lIns="0" tIns="0" rIns="0" bIns="0" rtlCol="0" anchor="ctr"/>
-          <a:lstStyle/>
-          <a:p>
-            <a:pPr indent="0" marL="0">
-              <a:lnSpc>
-                <a:spcPct val="125000"/>
-              </a:lnSpc>
-              <a:buNone/>
-            </a:pPr>
-            <a:r>
-              <a:rPr lang="en-US" sz="1900" b="1" dirty="0">
-                <a:solidFill>
-                  <a:srgbClr val="1C2B45"/>
-                </a:solidFill>
-                <a:latin typeface="Calibri" pitchFamily="34" charset="0"/>
-                <a:ea typeface="Calibri" pitchFamily="34" charset="-122"/>
-                <a:cs typeface="Calibri" pitchFamily="34" charset="-120"/>
-              </a:rPr>
-              <a:t>Berre.ca sells furniture across 6+ style families — from Mid-Century Modern to Bellona's Traditional collections.</a:t>
-            </a:r>
-            <a:endParaRPr lang="en-US" sz="1900" dirty="0"/>
-          </a:p>
-        </p:txBody>
-      </p:sp>
-      <p:sp>
-        <p:nvSpPr>
-          <p:cNvPr id="5" name="Text 3"/>
-          <p:cNvSpPr/>
-          <p:nvPr/>
-        </p:nvSpPr>
-        <p:spPr>
-          <a:xfrm>
-            <a:off x="594360" y="2880360"/>
-            <a:ext cx="6400800" cy="2011680"/>
+            <a:off x="594360" y="1965960"/>
+            <a:ext cx="6492240" cy="3291840"/>
           </a:xfrm>
           <a:prstGeom prst="rect">
             <a:avLst/>
@@ -4868,13 +4841,13 @@
                 <a:spcPct val="130000"/>
               </a:lnSpc>
               <a:spcAft>
-                <a:spcPts val="1400"/>
+                <a:spcPts val="1800"/>
               </a:spcAft>
               <a:buSzPct val="100000"/>
               <a:buChar char="•"/>
             </a:pPr>
             <a:r>
-              <a:rPr lang="en-US" sz="1600" dirty="0">
+              <a:rPr lang="en-US" sz="1650" dirty="0">
                 <a:solidFill>
                   <a:srgbClr val="232323"/>
                 </a:solidFill>
@@ -4882,9 +4855,9 @@
                 <a:ea typeface="Calibri" pitchFamily="34" charset="-122"/>
                 <a:cs typeface="Calibri" pitchFamily="34" charset="-120"/>
               </a:rPr>
-              <a:t>Hundreds of individual products, but no fast way to match a room's style to the right furniture</a:t>
-            </a:r>
-            <a:endParaRPr lang="en-US" sz="1600" dirty="0"/>
+              <a:t>Berre's catalog is large and highly visual — style is the single biggest factor in a shopping decision</a:t>
+            </a:r>
+            <a:endParaRPr lang="en-US" sz="1650" dirty="0"/>
           </a:p>
           <a:p>
             <a:pPr marL="342900" indent="-342900">
@@ -4892,13 +4865,13 @@
                 <a:spcPct val="130000"/>
               </a:lnSpc>
               <a:spcAft>
-                <a:spcPts val="1400"/>
+                <a:spcPts val="1800"/>
               </a:spcAft>
               <a:buSzPct val="100000"/>
               <a:buChar char="•"/>
             </a:pPr>
             <a:r>
-              <a:rPr lang="en-US" sz="1600" dirty="0">
+              <a:rPr lang="en-US" sz="1650" dirty="0">
                 <a:solidFill>
                   <a:srgbClr val="232323"/>
                 </a:solidFill>
@@ -4906,9 +4879,9 @@
                 <a:ea typeface="Calibri" pitchFamily="34" charset="-122"/>
                 <a:cs typeface="Calibri" pitchFamily="34" charset="-120"/>
               </a:rPr>
-              <a:t>Browsing by category name doesn't capture visual similarity</a:t>
-            </a:r>
-            <a:endParaRPr lang="en-US" sz="1600" dirty="0"/>
+              <a:t>A style-matching tool reinforces Berre's own curated-aesthetic brand, instead of bolting on a generic chatbot</a:t>
+            </a:r>
+            <a:endParaRPr lang="en-US" sz="1650" dirty="0"/>
           </a:p>
           <a:p>
             <a:pPr marL="342900" indent="-342900">
@@ -4916,13 +4889,13 @@
                 <a:spcPct val="130000"/>
               </a:lnSpc>
               <a:spcAft>
-                <a:spcPts val="1400"/>
+                <a:spcPts val="1800"/>
               </a:spcAft>
               <a:buSzPct val="100000"/>
               <a:buChar char="•"/>
             </a:pPr>
             <a:r>
-              <a:rPr lang="en-US" sz="1600" dirty="0">
+              <a:rPr lang="en-US" sz="1650" dirty="0">
                 <a:solidFill>
                   <a:srgbClr val="232323"/>
                 </a:solidFill>
@@ -4930,22 +4903,46 @@
                 <a:ea typeface="Calibri" pitchFamily="34" charset="-122"/>
                 <a:cs typeface="Calibri" pitchFamily="34" charset="-120"/>
               </a:rPr>
-              <a:t>Shoppers scroll through pages that don't reflect what their room actually looks like</a:t>
-            </a:r>
-            <a:endParaRPr lang="en-US" sz="1600" dirty="0"/>
-          </a:p>
-        </p:txBody>
-      </p:sp>
-      <p:sp>
-        <p:nvSpPr>
-          <p:cNvPr id="6" name="Shape 4"/>
-          <p:cNvSpPr/>
-          <p:nvPr/>
-        </p:nvSpPr>
-        <p:spPr>
-          <a:xfrm>
-            <a:off x="7680960" y="2971800"/>
-            <a:ext cx="3977640" cy="2377440"/>
+              <a:t>High price points mean even a small lift in “found the right piece” conversion has real revenue impact</a:t>
+            </a:r>
+            <a:endParaRPr lang="en-US" sz="1650" dirty="0"/>
+          </a:p>
+          <a:p>
+            <a:pPr marL="342900" indent="-342900">
+              <a:lnSpc>
+                <a:spcPct val="130000"/>
+              </a:lnSpc>
+              <a:spcAft>
+                <a:spcPts val="1800"/>
+              </a:spcAft>
+              <a:buSzPct val="100000"/>
+              <a:buChar char="•"/>
+            </a:pPr>
+            <a:r>
+              <a:rPr lang="en-US" sz="1650" dirty="0">
+                <a:solidFill>
+                  <a:srgbClr val="232323"/>
+                </a:solidFill>
+                <a:latin typeface="Calibri" pitchFamily="34" charset="0"/>
+                <a:ea typeface="Calibri" pitchFamily="34" charset="-122"/>
+                <a:cs typeface="Calibri" pitchFamily="34" charset="-120"/>
+              </a:rPr>
+              <a:t>Combines computer vision, model benchmarking, and full deployment</a:t>
+            </a:r>
+            <a:endParaRPr lang="en-US" sz="1650" dirty="0"/>
+          </a:p>
+        </p:txBody>
+      </p:sp>
+      <p:sp>
+        <p:nvSpPr>
+          <p:cNvPr id="5" name="Shape 3"/>
+          <p:cNvSpPr/>
+          <p:nvPr/>
+        </p:nvSpPr>
+        <p:spPr>
+          <a:xfrm>
+            <a:off x="7772400" y="1920240"/>
+            <a:ext cx="3840480" cy="1051560"/>
           </a:xfrm>
           <a:prstGeom prst="rect">
             <a:avLst/>
@@ -4960,17 +4957,24 @@
             <a:prstDash val="solid"/>
           </a:ln>
         </p:spPr>
-      </p:sp>
-      <p:sp>
-        <p:nvSpPr>
-          <p:cNvPr id="7" name="Text 5"/>
-          <p:cNvSpPr/>
-          <p:nvPr/>
-        </p:nvSpPr>
-        <p:spPr>
-          <a:xfrm>
-            <a:off x="7955280" y="3200400"/>
-            <a:ext cx="3474720" cy="274320"/>
+        <p:txBody>
+          <a:bodyPr/>
+          <a:lstStyle/>
+          <a:p>
+            <a:endParaRPr lang="tr-TR"/>
+          </a:p>
+        </p:txBody>
+      </p:sp>
+      <p:sp>
+        <p:nvSpPr>
+          <p:cNvPr id="6" name="Text 4"/>
+          <p:cNvSpPr/>
+          <p:nvPr/>
+        </p:nvSpPr>
+        <p:spPr>
+          <a:xfrm>
+            <a:off x="8001000" y="2011680"/>
+            <a:ext cx="3383280" cy="457200"/>
           </a:xfrm>
           <a:prstGeom prst="rect">
             <a:avLst/>
@@ -4982,11 +4986,11 @@
           <a:bodyPr wrap="square" lIns="0" tIns="0" rIns="0" bIns="0" rtlCol="0" anchor="ctr"/>
           <a:lstStyle/>
           <a:p>
-            <a:pPr indent="0" marL="0">
+            <a:pPr marL="0" indent="0">
               <a:buNone/>
             </a:pPr>
             <a:r>
-              <a:rPr lang="en-US" sz="1100" b="1" spc="150" kern="0" dirty="0">
+              <a:rPr lang="en-US" sz="2400" b="1" dirty="0">
                 <a:solidFill>
                   <a:srgbClr val="B87A2E"/>
                 </a:solidFill>
@@ -4994,22 +4998,22 @@
                 <a:ea typeface="Century Gothic" pitchFamily="34" charset="-122"/>
                 <a:cs typeface="Century Gothic" pitchFamily="34" charset="-120"/>
               </a:rPr>
-              <a:t>THE GOAL</a:t>
-            </a:r>
-            <a:endParaRPr lang="en-US" sz="1100" dirty="0"/>
-          </a:p>
-        </p:txBody>
-      </p:sp>
-      <p:sp>
-        <p:nvSpPr>
-          <p:cNvPr id="8" name="Text 6"/>
-          <p:cNvSpPr/>
-          <p:nvPr/>
-        </p:nvSpPr>
-        <p:spPr>
-          <a:xfrm>
-            <a:off x="7955280" y="3566160"/>
-            <a:ext cx="3474720" cy="1645920"/>
+              <a:t>$700–$8,000+</a:t>
+            </a:r>
+            <a:endParaRPr lang="en-US" sz="2400" dirty="0"/>
+          </a:p>
+        </p:txBody>
+      </p:sp>
+      <p:sp>
+        <p:nvSpPr>
+          <p:cNvPr id="7" name="Text 5"/>
+          <p:cNvSpPr/>
+          <p:nvPr/>
+        </p:nvSpPr>
+        <p:spPr>
+          <a:xfrm>
+            <a:off x="8001000" y="2487168"/>
+            <a:ext cx="3383280" cy="411480"/>
           </a:xfrm>
           <a:prstGeom prst="rect">
             <a:avLst/>
@@ -5021,24 +5025,53 @@
           <a:bodyPr wrap="square" lIns="0" tIns="0" rIns="0" bIns="0" rtlCol="0" anchor="ctr"/>
           <a:lstStyle/>
           <a:p>
-            <a:pPr indent="0" marL="0">
-              <a:lnSpc>
-                <a:spcPct val="130000"/>
-              </a:lnSpc>
+            <a:pPr marL="0" indent="0">
               <a:buNone/>
             </a:pPr>
             <a:r>
-              <a:rPr lang="en-US" sz="1500" b="1" dirty="0">
-                <a:solidFill>
-                  <a:srgbClr val="1C2B45"/>
+              <a:rPr lang="en-US" sz="1150" dirty="0">
+                <a:solidFill>
+                  <a:srgbClr val="6B6B68"/>
                 </a:solidFill>
                 <a:latin typeface="Calibri" pitchFamily="34" charset="0"/>
                 <a:ea typeface="Calibri" pitchFamily="34" charset="-122"/>
                 <a:cs typeface="Calibri" pitchFamily="34" charset="-120"/>
               </a:rPr>
-              <a:t>Classify a room photo's style, then recommend real, in-catalog Berre products that match.</a:t>
-            </a:r>
-            <a:endParaRPr lang="en-US" sz="1500" dirty="0"/>
+              <a:t>price per item — even small conversion gains matter</a:t>
+            </a:r>
+            <a:endParaRPr lang="en-US" sz="1150" dirty="0"/>
+          </a:p>
+        </p:txBody>
+      </p:sp>
+      <p:sp>
+        <p:nvSpPr>
+          <p:cNvPr id="8" name="Shape 6"/>
+          <p:cNvSpPr/>
+          <p:nvPr/>
+        </p:nvSpPr>
+        <p:spPr>
+          <a:xfrm>
+            <a:off x="7772400" y="3154680"/>
+            <a:ext cx="3840480" cy="1051560"/>
+          </a:xfrm>
+          <a:prstGeom prst="rect">
+            <a:avLst/>
+          </a:prstGeom>
+          <a:solidFill>
+            <a:srgbClr val="F2F2EF"/>
+          </a:solidFill>
+          <a:ln w="12700">
+            <a:solidFill>
+              <a:srgbClr val="F2F2EF"/>
+            </a:solidFill>
+            <a:prstDash val="solid"/>
+          </a:ln>
+        </p:spPr>
+        <p:txBody>
+          <a:bodyPr/>
+          <a:lstStyle/>
+          <a:p>
+            <a:endParaRPr lang="tr-TR"/>
           </a:p>
         </p:txBody>
       </p:sp>
@@ -5050,8 +5083,8 @@
         </p:nvSpPr>
         <p:spPr>
           <a:xfrm>
-            <a:off x="594360" y="6473952"/>
-            <a:ext cx="5486400" cy="274320"/>
+            <a:off x="8001000" y="3246120"/>
+            <a:ext cx="3383280" cy="457200"/>
           </a:xfrm>
           <a:prstGeom prst="rect">
             <a:avLst/>
@@ -5063,11 +5096,50 @@
           <a:bodyPr wrap="square" lIns="0" tIns="0" rIns="0" bIns="0" rtlCol="0" anchor="ctr"/>
           <a:lstStyle/>
           <a:p>
-            <a:pPr indent="0" marL="0">
+            <a:pPr marL="0" indent="0">
               <a:buNone/>
             </a:pPr>
             <a:r>
-              <a:rPr lang="en-US" sz="900" dirty="0">
+              <a:rPr lang="en-US" sz="2400" b="1" dirty="0">
+                <a:solidFill>
+                  <a:srgbClr val="B87A2E"/>
+                </a:solidFill>
+                <a:latin typeface="Century Gothic" pitchFamily="34" charset="0"/>
+                <a:ea typeface="Century Gothic" pitchFamily="34" charset="-122"/>
+                <a:cs typeface="Century Gothic" pitchFamily="34" charset="-120"/>
+              </a:rPr>
+              <a:t>100s</a:t>
+            </a:r>
+            <a:endParaRPr lang="en-US" sz="2400" dirty="0"/>
+          </a:p>
+        </p:txBody>
+      </p:sp>
+      <p:sp>
+        <p:nvSpPr>
+          <p:cNvPr id="10" name="Text 8"/>
+          <p:cNvSpPr/>
+          <p:nvPr/>
+        </p:nvSpPr>
+        <p:spPr>
+          <a:xfrm>
+            <a:off x="8001000" y="3721608"/>
+            <a:ext cx="3383280" cy="411480"/>
+          </a:xfrm>
+          <a:prstGeom prst="rect">
+            <a:avLst/>
+          </a:prstGeom>
+          <a:noFill/>
+          <a:ln/>
+        </p:spPr>
+        <p:txBody>
+          <a:bodyPr wrap="square" lIns="0" tIns="0" rIns="0" bIns="0" rtlCol="0" anchor="ctr"/>
+          <a:lstStyle/>
+          <a:p>
+            <a:pPr marL="0" indent="0">
+              <a:buNone/>
+            </a:pPr>
+            <a:r>
+              <a:rPr lang="en-US" sz="1150" dirty="0">
                 <a:solidFill>
                   <a:srgbClr val="6B6B68"/>
                 </a:solidFill>
@@ -5075,22 +5147,54 @@
                 <a:ea typeface="Calibri" pitchFamily="34" charset="-122"/>
                 <a:cs typeface="Calibri" pitchFamily="34" charset="-120"/>
               </a:rPr>
-              <a:t>Room Stylist — Berre.ca</a:t>
-            </a:r>
-            <a:endParaRPr lang="en-US" sz="900" dirty="0"/>
-          </a:p>
-        </p:txBody>
-      </p:sp>
-      <p:sp>
-        <p:nvSpPr>
-          <p:cNvPr id="10" name="Text 8"/>
-          <p:cNvSpPr/>
-          <p:nvPr/>
-        </p:nvSpPr>
-        <p:spPr>
-          <a:xfrm>
-            <a:off x="11048695" y="6473952"/>
-            <a:ext cx="548640" cy="274320"/>
+              <a:t>of SKUs across the Berre catalog</a:t>
+            </a:r>
+            <a:endParaRPr lang="en-US" sz="1150" dirty="0"/>
+          </a:p>
+        </p:txBody>
+      </p:sp>
+      <p:sp>
+        <p:nvSpPr>
+          <p:cNvPr id="11" name="Shape 9"/>
+          <p:cNvSpPr/>
+          <p:nvPr/>
+        </p:nvSpPr>
+        <p:spPr>
+          <a:xfrm>
+            <a:off x="7772400" y="4389120"/>
+            <a:ext cx="3840480" cy="1051560"/>
+          </a:xfrm>
+          <a:prstGeom prst="rect">
+            <a:avLst/>
+          </a:prstGeom>
+          <a:solidFill>
+            <a:srgbClr val="F2F2EF"/>
+          </a:solidFill>
+          <a:ln w="12700">
+            <a:solidFill>
+              <a:srgbClr val="F2F2EF"/>
+            </a:solidFill>
+            <a:prstDash val="solid"/>
+          </a:ln>
+        </p:spPr>
+        <p:txBody>
+          <a:bodyPr/>
+          <a:lstStyle/>
+          <a:p>
+            <a:endParaRPr lang="tr-TR"/>
+          </a:p>
+        </p:txBody>
+      </p:sp>
+      <p:sp>
+        <p:nvSpPr>
+          <p:cNvPr id="12" name="Text 10"/>
+          <p:cNvSpPr/>
+          <p:nvPr/>
+        </p:nvSpPr>
+        <p:spPr>
+          <a:xfrm>
+            <a:off x="8001000" y="4480560"/>
+            <a:ext cx="3383280" cy="457200"/>
           </a:xfrm>
           <a:prstGeom prst="rect">
             <a:avLst/>
@@ -5102,11 +5206,50 @@
           <a:bodyPr wrap="square" lIns="0" tIns="0" rIns="0" bIns="0" rtlCol="0" anchor="ctr"/>
           <a:lstStyle/>
           <a:p>
-            <a:pPr algn="r" indent="0" marL="0">
+            <a:pPr marL="0" indent="0">
               <a:buNone/>
             </a:pPr>
             <a:r>
-              <a:rPr lang="en-US" sz="900" dirty="0">
+              <a:rPr lang="en-US" sz="2400" b="1" dirty="0">
+                <a:solidFill>
+                  <a:srgbClr val="B87A2E"/>
+                </a:solidFill>
+                <a:latin typeface="Century Gothic" pitchFamily="34" charset="0"/>
+                <a:ea typeface="Century Gothic" pitchFamily="34" charset="-122"/>
+                <a:cs typeface="Century Gothic" pitchFamily="34" charset="-120"/>
+              </a:rPr>
+              <a:t>6+</a:t>
+            </a:r>
+            <a:endParaRPr lang="en-US" sz="2400" dirty="0"/>
+          </a:p>
+        </p:txBody>
+      </p:sp>
+      <p:sp>
+        <p:nvSpPr>
+          <p:cNvPr id="13" name="Text 11"/>
+          <p:cNvSpPr/>
+          <p:nvPr/>
+        </p:nvSpPr>
+        <p:spPr>
+          <a:xfrm>
+            <a:off x="8001000" y="4956048"/>
+            <a:ext cx="3383280" cy="411480"/>
+          </a:xfrm>
+          <a:prstGeom prst="rect">
+            <a:avLst/>
+          </a:prstGeom>
+          <a:noFill/>
+          <a:ln/>
+        </p:spPr>
+        <p:txBody>
+          <a:bodyPr wrap="square" lIns="0" tIns="0" rIns="0" bIns="0" rtlCol="0" anchor="ctr"/>
+          <a:lstStyle/>
+          <a:p>
+            <a:pPr marL="0" indent="0">
+              <a:buNone/>
+            </a:pPr>
+            <a:r>
+              <a:rPr lang="en-US" sz="1150" dirty="0">
                 <a:solidFill>
                   <a:srgbClr val="6B6B68"/>
                 </a:solidFill>
@@ -5114,7 +5257,85 @@
                 <a:ea typeface="Calibri" pitchFamily="34" charset="-122"/>
                 <a:cs typeface="Calibri" pitchFamily="34" charset="-120"/>
               </a:rPr>
-              <a:t>3</a:t>
+              <a:t>distinct interior style families</a:t>
+            </a:r>
+            <a:endParaRPr lang="en-US" sz="1150" dirty="0"/>
+          </a:p>
+        </p:txBody>
+      </p:sp>
+      <p:sp>
+        <p:nvSpPr>
+          <p:cNvPr id="14" name="Text 12"/>
+          <p:cNvSpPr/>
+          <p:nvPr/>
+        </p:nvSpPr>
+        <p:spPr>
+          <a:xfrm>
+            <a:off x="594360" y="6473952"/>
+            <a:ext cx="5486400" cy="274320"/>
+          </a:xfrm>
+          <a:prstGeom prst="rect">
+            <a:avLst/>
+          </a:prstGeom>
+          <a:noFill/>
+          <a:ln/>
+        </p:spPr>
+        <p:txBody>
+          <a:bodyPr wrap="square" lIns="0" tIns="0" rIns="0" bIns="0" rtlCol="0" anchor="ctr"/>
+          <a:lstStyle/>
+          <a:p>
+            <a:pPr marL="0" indent="0">
+              <a:buNone/>
+            </a:pPr>
+            <a:r>
+              <a:rPr lang="en-US" sz="900" dirty="0">
+                <a:solidFill>
+                  <a:srgbClr val="6B6B68"/>
+                </a:solidFill>
+                <a:latin typeface="Calibri" pitchFamily="34" charset="0"/>
+                <a:ea typeface="Calibri" pitchFamily="34" charset="-122"/>
+                <a:cs typeface="Calibri" pitchFamily="34" charset="-120"/>
+              </a:rPr>
+              <a:t>Room Stylist — Berre.ca</a:t>
+            </a:r>
+            <a:endParaRPr lang="en-US" sz="900" dirty="0"/>
+          </a:p>
+        </p:txBody>
+      </p:sp>
+      <p:sp>
+        <p:nvSpPr>
+          <p:cNvPr id="15" name="Text 13"/>
+          <p:cNvSpPr/>
+          <p:nvPr/>
+        </p:nvSpPr>
+        <p:spPr>
+          <a:xfrm>
+            <a:off x="11048695" y="6473952"/>
+            <a:ext cx="548640" cy="274320"/>
+          </a:xfrm>
+          <a:prstGeom prst="rect">
+            <a:avLst/>
+          </a:prstGeom>
+          <a:noFill/>
+          <a:ln/>
+        </p:spPr>
+        <p:txBody>
+          <a:bodyPr wrap="square" lIns="0" tIns="0" rIns="0" bIns="0" rtlCol="0" anchor="ctr"/>
+          <a:lstStyle/>
+          <a:p>
+            <a:pPr marL="0" indent="0" algn="r">
+              <a:buNone/>
+            </a:pPr>
+            <a:r>
+              <a:rPr lang="en-US" sz="900" dirty="0">
+                <a:solidFill>
+                  <a:srgbClr val="6B6B68"/>
+                </a:solidFill>
+                <a:latin typeface="Calibri" pitchFamily="34" charset="0"/>
+                <a:ea typeface="Calibri" pitchFamily="34" charset="-122"/>
+                <a:cs typeface="Calibri" pitchFamily="34" charset="-120"/>
+              </a:rPr>
+              <a:t>4</a:t>
             </a:r>
             <a:endParaRPr lang="en-US" sz="900" dirty="0"/>
           </a:p>
@@ -5128,14 +5349,15 @@
 </p:sld>
 </file>
 
-<file path=ppt/slides/slide4.xml><?xml version="1.0" encoding="utf-8"?>
+<file path=ppt/slides/slide5.xml><?xml version="1.0" encoding="utf-8"?>
 <p:sld xmlns:a="http://schemas.openxmlformats.org/drawingml/2006/main" xmlns:r="http://schemas.openxmlformats.org/officeDocument/2006/relationships" xmlns:p="http://schemas.openxmlformats.org/presentationml/2006/main">
-  <p:cSld name="Slide 4">
+  <p:cSld name="Slide 5">
     <p:bg>
       <p:bgPr>
         <a:solidFill>
           <a:srgbClr val="FFFFFF"/>
         </a:solidFill>
+        <a:effectLst/>
       </p:bgPr>
     </p:bg>
     <p:spTree>
@@ -5173,11 +5395,11 @@
           <a:bodyPr wrap="square" lIns="0" tIns="0" rIns="0" bIns="0" rtlCol="0" anchor="ctr"/>
           <a:lstStyle/>
           <a:p>
-            <a:pPr algn="l" indent="0" marL="0">
+            <a:pPr marL="0" indent="0" algn="l">
               <a:buNone/>
             </a:pPr>
             <a:r>
-              <a:rPr lang="en-US" sz="1200" b="1" spc="200" kern="0" dirty="0">
+              <a:rPr lang="en-US" sz="1200" b="1" kern="0" spc="200" dirty="0">
                 <a:solidFill>
                   <a:srgbClr val="B87A2E"/>
                 </a:solidFill>
@@ -5185,7 +5407,7 @@
                 <a:ea typeface="Century Gothic" pitchFamily="34" charset="-122"/>
                 <a:cs typeface="Century Gothic" pitchFamily="34" charset="-120"/>
               </a:rPr>
-              <a:t>02 — MOTIVATION</a:t>
+              <a:t>03 — LITERATURE REVIEW</a:t>
             </a:r>
             <a:endParaRPr lang="en-US" sz="1200" dirty="0"/>
           </a:p>
@@ -5212,7 +5434,7 @@
           <a:bodyPr wrap="square" lIns="0" tIns="0" rIns="0" bIns="0" rtlCol="0" anchor="ctr"/>
           <a:lstStyle/>
           <a:p>
-            <a:pPr algn="l" indent="0" marL="0">
+            <a:pPr marL="0" indent="0" algn="l">
               <a:buNone/>
             </a:pPr>
             <a:r>
@@ -5224,7 +5446,7 @@
                 <a:ea typeface="Century Gothic" pitchFamily="34" charset="-122"/>
                 <a:cs typeface="Century Gothic" pitchFamily="34" charset="-120"/>
               </a:rPr>
-              <a:t>Why this problem</a:t>
+              <a:t>Literature Review</a:t>
             </a:r>
             <a:endParaRPr lang="en-US" sz="3200" dirty="0"/>
           </a:p>
@@ -5232,14 +5454,85 @@
       </p:sp>
       <p:sp>
         <p:nvSpPr>
-          <p:cNvPr id="4" name="Text 2"/>
-          <p:cNvSpPr/>
-          <p:nvPr/>
-        </p:nvSpPr>
-        <p:spPr>
-          <a:xfrm>
-            <a:off x="594360" y="1965960"/>
-            <a:ext cx="6492240" cy="3291840"/>
+          <p:cNvPr id="4" name="Shape 2"/>
+          <p:cNvSpPr/>
+          <p:nvPr/>
+        </p:nvSpPr>
+        <p:spPr>
+          <a:xfrm>
+            <a:off x="594360" y="1645920"/>
+            <a:ext cx="82296" cy="384048"/>
+          </a:xfrm>
+          <a:prstGeom prst="rect">
+            <a:avLst/>
+          </a:prstGeom>
+          <a:solidFill>
+            <a:srgbClr val="B87A2E"/>
+          </a:solidFill>
+          <a:ln w="12700">
+            <a:solidFill>
+              <a:srgbClr val="B87A2E"/>
+            </a:solidFill>
+            <a:prstDash val="solid"/>
+          </a:ln>
+        </p:spPr>
+        <p:txBody>
+          <a:bodyPr/>
+          <a:lstStyle/>
+          <a:p>
+            <a:endParaRPr lang="tr-TR"/>
+          </a:p>
+        </p:txBody>
+      </p:sp>
+      <p:sp>
+        <p:nvSpPr>
+          <p:cNvPr id="5" name="Text 3"/>
+          <p:cNvSpPr/>
+          <p:nvPr/>
+        </p:nvSpPr>
+        <p:spPr>
+          <a:xfrm>
+            <a:off x="868680" y="1600200"/>
+            <a:ext cx="3657600" cy="384048"/>
+          </a:xfrm>
+          <a:prstGeom prst="rect">
+            <a:avLst/>
+          </a:prstGeom>
+          <a:noFill/>
+          <a:ln/>
+        </p:spPr>
+        <p:txBody>
+          <a:bodyPr wrap="square" lIns="0" tIns="0" rIns="0" bIns="0" rtlCol="0" anchor="t"/>
+          <a:lstStyle/>
+          <a:p>
+            <a:pPr marL="0" indent="0">
+              <a:buNone/>
+            </a:pPr>
+            <a:r>
+              <a:rPr lang="en-US" sz="1500" b="1" dirty="0">
+                <a:solidFill>
+                  <a:srgbClr val="1C2B45"/>
+                </a:solidFill>
+                <a:latin typeface="Century Gothic" pitchFamily="34" charset="0"/>
+                <a:ea typeface="Century Gothic" pitchFamily="34" charset="-122"/>
+                <a:cs typeface="Century Gothic" pitchFamily="34" charset="-120"/>
+              </a:rPr>
+              <a:t>Past available projects</a:t>
+            </a:r>
+            <a:endParaRPr lang="en-US" sz="1500" dirty="0"/>
+          </a:p>
+        </p:txBody>
+      </p:sp>
+      <p:sp>
+        <p:nvSpPr>
+          <p:cNvPr id="6" name="Text 4"/>
+          <p:cNvSpPr/>
+          <p:nvPr/>
+        </p:nvSpPr>
+        <p:spPr>
+          <a:xfrm>
+            <a:off x="868680" y="1984248"/>
+            <a:ext cx="10515600" cy="777240"/>
           </a:xfrm>
           <a:prstGeom prst="rect">
             <a:avLst/>
@@ -5253,16 +5546,16 @@
           <a:p>
             <a:pPr marL="342900" indent="-342900">
               <a:lnSpc>
-                <a:spcPct val="130000"/>
+                <a:spcPct val="120000"/>
               </a:lnSpc>
               <a:spcAft>
-                <a:spcPts val="1800"/>
+                <a:spcPts val="600"/>
               </a:spcAft>
               <a:buSzPct val="100000"/>
               <a:buChar char="•"/>
             </a:pPr>
             <a:r>
-              <a:rPr lang="en-US" sz="1650" dirty="0">
+              <a:rPr lang="en-US" sz="1400" dirty="0">
                 <a:solidFill>
                   <a:srgbClr val="232323"/>
                 </a:solidFill>
@@ -5270,23 +5563,23 @@
                 <a:ea typeface="Calibri" pitchFamily="34" charset="-122"/>
                 <a:cs typeface="Calibri" pitchFamily="34" charset="-120"/>
               </a:rPr>
-              <a:t>Berre's catalog is large and highly visual — style is the single biggest factor in a shopping decision</a:t>
-            </a:r>
-            <a:endParaRPr lang="en-US" sz="1650" dirty="0"/>
+              <a:t>Interior style classification is a known academic and Kaggle-style task</a:t>
+            </a:r>
+            <a:endParaRPr lang="en-US" sz="1400" dirty="0"/>
           </a:p>
           <a:p>
             <a:pPr marL="342900" indent="-342900">
               <a:lnSpc>
-                <a:spcPct val="130000"/>
+                <a:spcPct val="120000"/>
               </a:lnSpc>
               <a:spcAft>
-                <a:spcPts val="1800"/>
+                <a:spcPts val="600"/>
               </a:spcAft>
               <a:buSzPct val="100000"/>
               <a:buChar char="•"/>
             </a:pPr>
             <a:r>
-              <a:rPr lang="en-US" sz="1650" dirty="0">
+              <a:rPr lang="en-US" sz="1400" dirty="0">
                 <a:solidFill>
                   <a:srgbClr val="232323"/>
                 </a:solidFill>
@@ -5294,23 +5587,116 @@
                 <a:ea typeface="Calibri" pitchFamily="34" charset="-122"/>
                 <a:cs typeface="Calibri" pitchFamily="34" charset="-120"/>
               </a:rPr>
-              <a:t>A style-matching tool reinforces Berre's own curated-aesthetic brand, instead of bolting on a generic chatbot</a:t>
-            </a:r>
-            <a:endParaRPr lang="en-US" sz="1650" dirty="0"/>
-          </a:p>
+              <a:t>Most datasets are Houzz-sourced, with ~19 raw style labels</a:t>
+            </a:r>
+            <a:endParaRPr lang="en-US" sz="1400" dirty="0"/>
+          </a:p>
+        </p:txBody>
+      </p:sp>
+      <p:sp>
+        <p:nvSpPr>
+          <p:cNvPr id="7" name="Shape 5"/>
+          <p:cNvSpPr/>
+          <p:nvPr/>
+        </p:nvSpPr>
+        <p:spPr>
+          <a:xfrm>
+            <a:off x="594360" y="2926080"/>
+            <a:ext cx="82296" cy="384048"/>
+          </a:xfrm>
+          <a:prstGeom prst="rect">
+            <a:avLst/>
+          </a:prstGeom>
+          <a:solidFill>
+            <a:srgbClr val="B87A2E"/>
+          </a:solidFill>
+          <a:ln w="12700">
+            <a:solidFill>
+              <a:srgbClr val="B87A2E"/>
+            </a:solidFill>
+            <a:prstDash val="solid"/>
+          </a:ln>
+        </p:spPr>
+        <p:txBody>
+          <a:bodyPr/>
+          <a:lstStyle/>
+          <a:p>
+            <a:endParaRPr lang="tr-TR"/>
+          </a:p>
+        </p:txBody>
+      </p:sp>
+      <p:sp>
+        <p:nvSpPr>
+          <p:cNvPr id="8" name="Text 6"/>
+          <p:cNvSpPr/>
+          <p:nvPr/>
+        </p:nvSpPr>
+        <p:spPr>
+          <a:xfrm>
+            <a:off x="868680" y="2880360"/>
+            <a:ext cx="3657600" cy="384048"/>
+          </a:xfrm>
+          <a:prstGeom prst="rect">
+            <a:avLst/>
+          </a:prstGeom>
+          <a:noFill/>
+          <a:ln/>
+        </p:spPr>
+        <p:txBody>
+          <a:bodyPr wrap="square" lIns="0" tIns="0" rIns="0" bIns="0" rtlCol="0" anchor="t"/>
+          <a:lstStyle/>
+          <a:p>
+            <a:pPr marL="0" indent="0">
+              <a:buNone/>
+            </a:pPr>
+            <a:r>
+              <a:rPr lang="en-US" sz="1500" b="1" dirty="0">
+                <a:solidFill>
+                  <a:srgbClr val="1C2B45"/>
+                </a:solidFill>
+                <a:latin typeface="Century Gothic" pitchFamily="34" charset="0"/>
+                <a:ea typeface="Century Gothic" pitchFamily="34" charset="-122"/>
+                <a:cs typeface="Century Gothic" pitchFamily="34" charset="-120"/>
+              </a:rPr>
+              <a:t>Similar projects</a:t>
+            </a:r>
+            <a:endParaRPr lang="en-US" sz="1500" dirty="0"/>
+          </a:p>
+        </p:txBody>
+      </p:sp>
+      <p:sp>
+        <p:nvSpPr>
+          <p:cNvPr id="9" name="Text 7"/>
+          <p:cNvSpPr/>
+          <p:nvPr/>
+        </p:nvSpPr>
+        <p:spPr>
+          <a:xfrm>
+            <a:off x="868680" y="3264408"/>
+            <a:ext cx="10515600" cy="777240"/>
+          </a:xfrm>
+          <a:prstGeom prst="rect">
+            <a:avLst/>
+          </a:prstGeom>
+          <a:noFill/>
+          <a:ln/>
+        </p:spPr>
+        <p:txBody>
+          <a:bodyPr wrap="square" lIns="0" tIns="0" rIns="0" bIns="0" rtlCol="0" anchor="ctr"/>
+          <a:lstStyle/>
           <a:p>
             <a:pPr marL="342900" indent="-342900">
               <a:lnSpc>
-                <a:spcPct val="130000"/>
+                <a:spcPct val="120000"/>
               </a:lnSpc>
               <a:spcAft>
-                <a:spcPts val="1800"/>
+                <a:spcPts val="600"/>
               </a:spcAft>
               <a:buSzPct val="100000"/>
               <a:buChar char="•"/>
             </a:pPr>
             <a:r>
-              <a:rPr lang="en-US" sz="1650" dirty="0">
+              <a:rPr lang="en-US" sz="1400" dirty="0">
                 <a:solidFill>
                   <a:srgbClr val="232323"/>
                 </a:solidFill>
@@ -5318,23 +5704,23 @@
                 <a:ea typeface="Calibri" pitchFamily="34" charset="-122"/>
                 <a:cs typeface="Calibri" pitchFamily="34" charset="-120"/>
               </a:rPr>
-              <a:t>High price points mean even a small lift in “found the right piece” conversion has real revenue impact</a:t>
-            </a:r>
-            <a:endParaRPr lang="en-US" sz="1650" dirty="0"/>
+              <a:t>Pinterest Lens &amp; Wayfair's “Shop the Look” use visual similarity search, not classification</a:t>
+            </a:r>
+            <a:endParaRPr lang="en-US" sz="1400" dirty="0"/>
           </a:p>
           <a:p>
             <a:pPr marL="342900" indent="-342900">
               <a:lnSpc>
-                <a:spcPct val="130000"/>
+                <a:spcPct val="120000"/>
               </a:lnSpc>
               <a:spcAft>
-                <a:spcPts val="1800"/>
+                <a:spcPts val="600"/>
               </a:spcAft>
               <a:buSzPct val="100000"/>
               <a:buChar char="•"/>
             </a:pPr>
             <a:r>
-              <a:rPr lang="en-US" sz="1650" dirty="0">
+              <a:rPr lang="en-US" sz="1400" dirty="0">
                 <a:solidFill>
                   <a:srgbClr val="232323"/>
                 </a:solidFill>
@@ -5342,47 +5728,54 @@
                 <a:ea typeface="Calibri" pitchFamily="34" charset="-122"/>
                 <a:cs typeface="Calibri" pitchFamily="34" charset="-120"/>
               </a:rPr>
-              <a:t>Combines computer vision, model benchmarking, and full deployment — exactly this course's skill set</a:t>
-            </a:r>
-            <a:endParaRPr lang="en-US" sz="1650" dirty="0"/>
-          </a:p>
-        </p:txBody>
-      </p:sp>
-      <p:sp>
-        <p:nvSpPr>
-          <p:cNvPr id="5" name="Shape 3"/>
-          <p:cNvSpPr/>
-          <p:nvPr/>
-        </p:nvSpPr>
-        <p:spPr>
-          <a:xfrm>
-            <a:off x="7772400" y="1920240"/>
-            <a:ext cx="3840480" cy="1051560"/>
+              <a:t>CLIP zero-shot is a common, strong no-training baseline</a:t>
+            </a:r>
+            <a:endParaRPr lang="en-US" sz="1400" dirty="0"/>
+          </a:p>
+        </p:txBody>
+      </p:sp>
+      <p:sp>
+        <p:nvSpPr>
+          <p:cNvPr id="10" name="Shape 8"/>
+          <p:cNvSpPr/>
+          <p:nvPr/>
+        </p:nvSpPr>
+        <p:spPr>
+          <a:xfrm>
+            <a:off x="594360" y="4206240"/>
+            <a:ext cx="82296" cy="384048"/>
           </a:xfrm>
           <a:prstGeom prst="rect">
             <a:avLst/>
           </a:prstGeom>
           <a:solidFill>
-            <a:srgbClr val="F2F2EF"/>
+            <a:srgbClr val="B87A2E"/>
           </a:solidFill>
           <a:ln w="12700">
             <a:solidFill>
-              <a:srgbClr val="F2F2EF"/>
+              <a:srgbClr val="B87A2E"/>
             </a:solidFill>
             <a:prstDash val="solid"/>
           </a:ln>
         </p:spPr>
-      </p:sp>
-      <p:sp>
-        <p:nvSpPr>
-          <p:cNvPr id="6" name="Text 4"/>
-          <p:cNvSpPr/>
-          <p:nvPr/>
-        </p:nvSpPr>
-        <p:spPr>
-          <a:xfrm>
-            <a:off x="8001000" y="2011680"/>
-            <a:ext cx="3383280" cy="457200"/>
+        <p:txBody>
+          <a:bodyPr/>
+          <a:lstStyle/>
+          <a:p>
+            <a:endParaRPr lang="tr-TR"/>
+          </a:p>
+        </p:txBody>
+      </p:sp>
+      <p:sp>
+        <p:nvSpPr>
+          <p:cNvPr id="11" name="Text 9"/>
+          <p:cNvSpPr/>
+          <p:nvPr/>
+        </p:nvSpPr>
+        <p:spPr>
+          <a:xfrm>
+            <a:off x="868680" y="4160520"/>
+            <a:ext cx="3657600" cy="384048"/>
           </a:xfrm>
           <a:prstGeom prst="rect">
             <a:avLst/>
@@ -5391,37 +5784,37 @@
           <a:ln/>
         </p:spPr>
         <p:txBody>
-          <a:bodyPr wrap="square" lIns="0" tIns="0" rIns="0" bIns="0" rtlCol="0" anchor="ctr"/>
-          <a:lstStyle/>
-          <a:p>
-            <a:pPr indent="0" marL="0">
+          <a:bodyPr wrap="square" lIns="0" tIns="0" rIns="0" bIns="0" rtlCol="0" anchor="t"/>
+          <a:lstStyle/>
+          <a:p>
+            <a:pPr marL="0" indent="0">
               <a:buNone/>
             </a:pPr>
             <a:r>
-              <a:rPr lang="en-US" sz="2400" b="1" dirty="0">
-                <a:solidFill>
-                  <a:srgbClr val="B87A2E"/>
+              <a:rPr lang="en-US" sz="1500" b="1" dirty="0">
+                <a:solidFill>
+                  <a:srgbClr val="1C2B45"/>
                 </a:solidFill>
                 <a:latin typeface="Century Gothic" pitchFamily="34" charset="0"/>
                 <a:ea typeface="Century Gothic" pitchFamily="34" charset="-122"/>
                 <a:cs typeface="Century Gothic" pitchFamily="34" charset="-120"/>
               </a:rPr>
-              <a:t>$700–$8,000+</a:t>
-            </a:r>
-            <a:endParaRPr lang="en-US" sz="2400" dirty="0"/>
-          </a:p>
-        </p:txBody>
-      </p:sp>
-      <p:sp>
-        <p:nvSpPr>
-          <p:cNvPr id="7" name="Text 5"/>
-          <p:cNvSpPr/>
-          <p:nvPr/>
-        </p:nvSpPr>
-        <p:spPr>
-          <a:xfrm>
-            <a:off x="8001000" y="2487168"/>
-            <a:ext cx="3383280" cy="411480"/>
+              <a:t>Drawbacks</a:t>
+            </a:r>
+            <a:endParaRPr lang="en-US" sz="1500" dirty="0"/>
+          </a:p>
+        </p:txBody>
+      </p:sp>
+      <p:sp>
+        <p:nvSpPr>
+          <p:cNvPr id="12" name="Text 10"/>
+          <p:cNvSpPr/>
+          <p:nvPr/>
+        </p:nvSpPr>
+        <p:spPr>
+          <a:xfrm>
+            <a:off x="868680" y="4544568"/>
+            <a:ext cx="10515600" cy="1143000"/>
           </a:xfrm>
           <a:prstGeom prst="rect">
             <a:avLst/>
@@ -5433,233 +5826,82 @@
           <a:bodyPr wrap="square" lIns="0" tIns="0" rIns="0" bIns="0" rtlCol="0" anchor="ctr"/>
           <a:lstStyle/>
           <a:p>
-            <a:pPr indent="0" marL="0">
-              <a:buNone/>
-            </a:pPr>
-            <a:r>
-              <a:rPr lang="en-US" sz="1150" dirty="0">
-                <a:solidFill>
-                  <a:srgbClr val="6B6B68"/>
+            <a:pPr marL="342900" indent="-342900">
+              <a:lnSpc>
+                <a:spcPct val="120000"/>
+              </a:lnSpc>
+              <a:spcAft>
+                <a:spcPts val="600"/>
+              </a:spcAft>
+              <a:buSzPct val="100000"/>
+              <a:buChar char="•"/>
+            </a:pPr>
+            <a:r>
+              <a:rPr lang="en-US" sz="1400" dirty="0">
+                <a:solidFill>
+                  <a:srgbClr val="232323"/>
                 </a:solidFill>
                 <a:latin typeface="Calibri" pitchFamily="34" charset="0"/>
                 <a:ea typeface="Calibri" pitchFamily="34" charset="-122"/>
                 <a:cs typeface="Calibri" pitchFamily="34" charset="-120"/>
               </a:rPr>
-              <a:t>price per item — even small conversion gains matter</a:t>
-            </a:r>
-            <a:endParaRPr lang="en-US" sz="1150" dirty="0"/>
-          </a:p>
-        </p:txBody>
-      </p:sp>
-      <p:sp>
-        <p:nvSpPr>
-          <p:cNvPr id="8" name="Shape 6"/>
-          <p:cNvSpPr/>
-          <p:nvPr/>
-        </p:nvSpPr>
-        <p:spPr>
-          <a:xfrm>
-            <a:off x="7772400" y="3154680"/>
-            <a:ext cx="3840480" cy="1051560"/>
-          </a:xfrm>
-          <a:prstGeom prst="rect">
-            <a:avLst/>
-          </a:prstGeom>
-          <a:solidFill>
-            <a:srgbClr val="F2F2EF"/>
-          </a:solidFill>
-          <a:ln w="12700">
-            <a:solidFill>
-              <a:srgbClr val="F2F2EF"/>
-            </a:solidFill>
-            <a:prstDash val="solid"/>
-          </a:ln>
-        </p:spPr>
-      </p:sp>
-      <p:sp>
-        <p:nvSpPr>
-          <p:cNvPr id="9" name="Text 7"/>
-          <p:cNvSpPr/>
-          <p:nvPr/>
-        </p:nvSpPr>
-        <p:spPr>
-          <a:xfrm>
-            <a:off x="8001000" y="3246120"/>
-            <a:ext cx="3383280" cy="457200"/>
-          </a:xfrm>
-          <a:prstGeom prst="rect">
-            <a:avLst/>
-          </a:prstGeom>
-          <a:noFill/>
-          <a:ln/>
-        </p:spPr>
-        <p:txBody>
-          <a:bodyPr wrap="square" lIns="0" tIns="0" rIns="0" bIns="0" rtlCol="0" anchor="ctr"/>
-          <a:lstStyle/>
-          <a:p>
-            <a:pPr indent="0" marL="0">
-              <a:buNone/>
-            </a:pPr>
-            <a:r>
-              <a:rPr lang="en-US" sz="2400" b="1" dirty="0">
-                <a:solidFill>
-                  <a:srgbClr val="B87A2E"/>
-                </a:solidFill>
-                <a:latin typeface="Century Gothic" pitchFamily="34" charset="0"/>
-                <a:ea typeface="Century Gothic" pitchFamily="34" charset="-122"/>
-                <a:cs typeface="Century Gothic" pitchFamily="34" charset="-120"/>
-              </a:rPr>
-              <a:t>100s</a:t>
-            </a:r>
-            <a:endParaRPr lang="en-US" sz="2400" dirty="0"/>
-          </a:p>
-        </p:txBody>
-      </p:sp>
-      <p:sp>
-        <p:nvSpPr>
-          <p:cNvPr id="10" name="Text 8"/>
-          <p:cNvSpPr/>
-          <p:nvPr/>
-        </p:nvSpPr>
-        <p:spPr>
-          <a:xfrm>
-            <a:off x="8001000" y="3721608"/>
-            <a:ext cx="3383280" cy="411480"/>
-          </a:xfrm>
-          <a:prstGeom prst="rect">
-            <a:avLst/>
-          </a:prstGeom>
-          <a:noFill/>
-          <a:ln/>
-        </p:spPr>
-        <p:txBody>
-          <a:bodyPr wrap="square" lIns="0" tIns="0" rIns="0" bIns="0" rtlCol="0" anchor="ctr"/>
-          <a:lstStyle/>
-          <a:p>
-            <a:pPr indent="0" marL="0">
-              <a:buNone/>
-            </a:pPr>
-            <a:r>
-              <a:rPr lang="en-US" sz="1150" dirty="0">
-                <a:solidFill>
-                  <a:srgbClr val="6B6B68"/>
+              <a:t>Public style categories don't map cleanly onto any one retailer's catalog</a:t>
+            </a:r>
+            <a:endParaRPr lang="en-US" sz="1400" dirty="0"/>
+          </a:p>
+          <a:p>
+            <a:pPr marL="342900" indent="-342900">
+              <a:lnSpc>
+                <a:spcPct val="120000"/>
+              </a:lnSpc>
+              <a:spcAft>
+                <a:spcPts val="600"/>
+              </a:spcAft>
+              <a:buSzPct val="100000"/>
+              <a:buChar char="•"/>
+            </a:pPr>
+            <a:r>
+              <a:rPr lang="en-US" sz="1400" dirty="0">
+                <a:solidFill>
+                  <a:srgbClr val="232323"/>
                 </a:solidFill>
                 <a:latin typeface="Calibri" pitchFamily="34" charset="0"/>
                 <a:ea typeface="Calibri" pitchFamily="34" charset="-122"/>
                 <a:cs typeface="Calibri" pitchFamily="34" charset="-120"/>
               </a:rPr>
-              <a:t>of SKUs across the Berre catalog</a:t>
-            </a:r>
-            <a:endParaRPr lang="en-US" sz="1150" dirty="0"/>
-          </a:p>
-        </p:txBody>
-      </p:sp>
-      <p:sp>
-        <p:nvSpPr>
-          <p:cNvPr id="11" name="Shape 9"/>
-          <p:cNvSpPr/>
-          <p:nvPr/>
-        </p:nvSpPr>
-        <p:spPr>
-          <a:xfrm>
-            <a:off x="7772400" y="4389120"/>
-            <a:ext cx="3840480" cy="1051560"/>
-          </a:xfrm>
-          <a:prstGeom prst="rect">
-            <a:avLst/>
-          </a:prstGeom>
-          <a:solidFill>
-            <a:srgbClr val="F2F2EF"/>
-          </a:solidFill>
-          <a:ln w="12700">
-            <a:solidFill>
-              <a:srgbClr val="F2F2EF"/>
-            </a:solidFill>
-            <a:prstDash val="solid"/>
-          </a:ln>
-        </p:spPr>
-      </p:sp>
-      <p:sp>
-        <p:nvSpPr>
-          <p:cNvPr id="12" name="Text 10"/>
-          <p:cNvSpPr/>
-          <p:nvPr/>
-        </p:nvSpPr>
-        <p:spPr>
-          <a:xfrm>
-            <a:off x="8001000" y="4480560"/>
-            <a:ext cx="3383280" cy="457200"/>
-          </a:xfrm>
-          <a:prstGeom prst="rect">
-            <a:avLst/>
-          </a:prstGeom>
-          <a:noFill/>
-          <a:ln/>
-        </p:spPr>
-        <p:txBody>
-          <a:bodyPr wrap="square" lIns="0" tIns="0" rIns="0" bIns="0" rtlCol="0" anchor="ctr"/>
-          <a:lstStyle/>
-          <a:p>
-            <a:pPr indent="0" marL="0">
-              <a:buNone/>
-            </a:pPr>
-            <a:r>
-              <a:rPr lang="en-US" sz="2400" b="1" dirty="0">
-                <a:solidFill>
-                  <a:srgbClr val="B87A2E"/>
-                </a:solidFill>
-                <a:latin typeface="Century Gothic" pitchFamily="34" charset="0"/>
-                <a:ea typeface="Century Gothic" pitchFamily="34" charset="-122"/>
-                <a:cs typeface="Century Gothic" pitchFamily="34" charset="-120"/>
-              </a:rPr>
-              <a:t>6+</a:t>
-            </a:r>
-            <a:endParaRPr lang="en-US" sz="2400" dirty="0"/>
-          </a:p>
-        </p:txBody>
-      </p:sp>
-      <p:sp>
-        <p:nvSpPr>
-          <p:cNvPr id="13" name="Text 11"/>
-          <p:cNvSpPr/>
-          <p:nvPr/>
-        </p:nvSpPr>
-        <p:spPr>
-          <a:xfrm>
-            <a:off x="8001000" y="4956048"/>
-            <a:ext cx="3383280" cy="411480"/>
-          </a:xfrm>
-          <a:prstGeom prst="rect">
-            <a:avLst/>
-          </a:prstGeom>
-          <a:noFill/>
-          <a:ln/>
-        </p:spPr>
-        <p:txBody>
-          <a:bodyPr wrap="square" lIns="0" tIns="0" rIns="0" bIns="0" rtlCol="0" anchor="ctr"/>
-          <a:lstStyle/>
-          <a:p>
-            <a:pPr indent="0" marL="0">
-              <a:buNone/>
-            </a:pPr>
-            <a:r>
-              <a:rPr lang="en-US" sz="1150" dirty="0">
-                <a:solidFill>
-                  <a:srgbClr val="6B6B68"/>
+              <a:t>19 raw labels manually consolidated into 6 Berre-aligned categories</a:t>
+            </a:r>
+            <a:endParaRPr lang="en-US" sz="1400" dirty="0"/>
+          </a:p>
+          <a:p>
+            <a:pPr marL="342900" indent="-342900">
+              <a:lnSpc>
+                <a:spcPct val="120000"/>
+              </a:lnSpc>
+              <a:spcAft>
+                <a:spcPts val="600"/>
+              </a:spcAft>
+              <a:buSzPct val="100000"/>
+              <a:buChar char="•"/>
+            </a:pPr>
+            <a:r>
+              <a:rPr lang="en-US" sz="1400" dirty="0">
+                <a:solidFill>
+                  <a:srgbClr val="232323"/>
                 </a:solidFill>
                 <a:latin typeface="Calibri" pitchFamily="34" charset="0"/>
                 <a:ea typeface="Calibri" pitchFamily="34" charset="-122"/>
                 <a:cs typeface="Calibri" pitchFamily="34" charset="-120"/>
               </a:rPr>
-              <a:t>distinct interior style families</a:t>
-            </a:r>
-            <a:endParaRPr lang="en-US" sz="1150" dirty="0"/>
-          </a:p>
-        </p:txBody>
-      </p:sp>
-      <p:sp>
-        <p:nvSpPr>
-          <p:cNvPr id="14" name="Text 12"/>
+              <a:t>Most projects stop at classification — few connect to a live, purchasable catalog</a:t>
+            </a:r>
+            <a:endParaRPr lang="en-US" sz="1400" dirty="0"/>
+          </a:p>
+        </p:txBody>
+      </p:sp>
+      <p:sp>
+        <p:nvSpPr>
+          <p:cNvPr id="13" name="Text 11"/>
           <p:cNvSpPr/>
           <p:nvPr/>
         </p:nvSpPr>
@@ -5678,7 +5920,7 @@
           <a:bodyPr wrap="square" lIns="0" tIns="0" rIns="0" bIns="0" rtlCol="0" anchor="ctr"/>
           <a:lstStyle/>
           <a:p>
-            <a:pPr indent="0" marL="0">
+            <a:pPr marL="0" indent="0">
               <a:buNone/>
             </a:pPr>
             <a:r>
@@ -5698,7 +5940,7 @@
       </p:sp>
       <p:sp>
         <p:nvSpPr>
-          <p:cNvPr id="15" name="Text 13"/>
+          <p:cNvPr id="14" name="Text 12"/>
           <p:cNvSpPr/>
           <p:nvPr/>
         </p:nvSpPr>
@@ -5717,7 +5959,7 @@
           <a:bodyPr wrap="square" lIns="0" tIns="0" rIns="0" bIns="0" rtlCol="0" anchor="ctr"/>
           <a:lstStyle/>
           <a:p>
-            <a:pPr algn="r" indent="0" marL="0">
+            <a:pPr marL="0" indent="0" algn="r">
               <a:buNone/>
             </a:pPr>
             <a:r>
@@ -5729,7 +5971,7 @@
                 <a:ea typeface="Calibri" pitchFamily="34" charset="-122"/>
                 <a:cs typeface="Calibri" pitchFamily="34" charset="-120"/>
               </a:rPr>
-              <a:t>4</a:t>
+              <a:t>5</a:t>
             </a:r>
             <a:endParaRPr lang="en-US" sz="900" dirty="0"/>
           </a:p>
@@ -5743,14 +5985,15 @@
 </p:sld>
 </file>
 
-<file path=ppt/slides/slide5.xml><?xml version="1.0" encoding="utf-8"?>
+<file path=ppt/slides/slide6.xml><?xml version="1.0" encoding="utf-8"?>
 <p:sld xmlns:a="http://schemas.openxmlformats.org/drawingml/2006/main" xmlns:r="http://schemas.openxmlformats.org/officeDocument/2006/relationships" xmlns:p="http://schemas.openxmlformats.org/presentationml/2006/main">
-  <p:cSld name="Slide 5">
+  <p:cSld name="Slide 6">
     <p:bg>
       <p:bgPr>
         <a:solidFill>
           <a:srgbClr val="FFFFFF"/>
         </a:solidFill>
+        <a:effectLst/>
       </p:bgPr>
     </p:bg>
     <p:spTree>
@@ -5788,11 +6031,11 @@
           <a:bodyPr wrap="square" lIns="0" tIns="0" rIns="0" bIns="0" rtlCol="0" anchor="ctr"/>
           <a:lstStyle/>
           <a:p>
-            <a:pPr algn="l" indent="0" marL="0">
+            <a:pPr marL="0" indent="0" algn="l">
               <a:buNone/>
             </a:pPr>
             <a:r>
-              <a:rPr lang="en-US" sz="1200" b="1" spc="200" kern="0" dirty="0">
+              <a:rPr lang="en-US" sz="1200" b="1" kern="0" spc="200" dirty="0">
                 <a:solidFill>
                   <a:srgbClr val="B87A2E"/>
                 </a:solidFill>
@@ -5800,7 +6043,7 @@
                 <a:ea typeface="Century Gothic" pitchFamily="34" charset="-122"/>
                 <a:cs typeface="Century Gothic" pitchFamily="34" charset="-120"/>
               </a:rPr>
-              <a:t>03 — LITERATURE REVIEW</a:t>
+              <a:t>04 — METHODOLOGY</a:t>
             </a:r>
             <a:endParaRPr lang="en-US" sz="1200" dirty="0"/>
           </a:p>
@@ -5827,621 +6070,7 @@
           <a:bodyPr wrap="square" lIns="0" tIns="0" rIns="0" bIns="0" rtlCol="0" anchor="ctr"/>
           <a:lstStyle/>
           <a:p>
-            <a:pPr algn="l" indent="0" marL="0">
-              <a:buNone/>
-            </a:pPr>
-            <a:r>
-              <a:rPr lang="en-US" sz="3200" b="1" dirty="0">
-                <a:solidFill>
-                  <a:srgbClr val="1C2B45"/>
-                </a:solidFill>
-                <a:latin typeface="Century Gothic" pitchFamily="34" charset="0"/>
-                <a:ea typeface="Century Gothic" pitchFamily="34" charset="-122"/>
-                <a:cs typeface="Century Gothic" pitchFamily="34" charset="-120"/>
-              </a:rPr>
-              <a:t>Literature Review</a:t>
-            </a:r>
-            <a:endParaRPr lang="en-US" sz="3200" dirty="0"/>
-          </a:p>
-        </p:txBody>
-      </p:sp>
-      <p:sp>
-        <p:nvSpPr>
-          <p:cNvPr id="4" name="Shape 2"/>
-          <p:cNvSpPr/>
-          <p:nvPr/>
-        </p:nvSpPr>
-        <p:spPr>
-          <a:xfrm>
-            <a:off x="594360" y="1645920"/>
-            <a:ext cx="82296" cy="384048"/>
-          </a:xfrm>
-          <a:prstGeom prst="rect">
-            <a:avLst/>
-          </a:prstGeom>
-          <a:solidFill>
-            <a:srgbClr val="B87A2E"/>
-          </a:solidFill>
-          <a:ln w="12700">
-            <a:solidFill>
-              <a:srgbClr val="B87A2E"/>
-            </a:solidFill>
-            <a:prstDash val="solid"/>
-          </a:ln>
-        </p:spPr>
-      </p:sp>
-      <p:sp>
-        <p:nvSpPr>
-          <p:cNvPr id="5" name="Text 3"/>
-          <p:cNvSpPr/>
-          <p:nvPr/>
-        </p:nvSpPr>
-        <p:spPr>
-          <a:xfrm>
-            <a:off x="868680" y="1600200"/>
-            <a:ext cx="3657600" cy="384048"/>
-          </a:xfrm>
-          <a:prstGeom prst="rect">
-            <a:avLst/>
-          </a:prstGeom>
-          <a:noFill/>
-          <a:ln/>
-        </p:spPr>
-        <p:txBody>
-          <a:bodyPr wrap="square" lIns="0" tIns="0" rIns="0" bIns="0" rtlCol="0" anchor="t"/>
-          <a:lstStyle/>
-          <a:p>
-            <a:pPr indent="0" marL="0">
-              <a:buNone/>
-            </a:pPr>
-            <a:r>
-              <a:rPr lang="en-US" sz="1500" b="1" dirty="0">
-                <a:solidFill>
-                  <a:srgbClr val="1C2B45"/>
-                </a:solidFill>
-                <a:latin typeface="Century Gothic" pitchFamily="34" charset="0"/>
-                <a:ea typeface="Century Gothic" pitchFamily="34" charset="-122"/>
-                <a:cs typeface="Century Gothic" pitchFamily="34" charset="-120"/>
-              </a:rPr>
-              <a:t>Past available projects</a:t>
-            </a:r>
-            <a:endParaRPr lang="en-US" sz="1500" dirty="0"/>
-          </a:p>
-        </p:txBody>
-      </p:sp>
-      <p:sp>
-        <p:nvSpPr>
-          <p:cNvPr id="6" name="Text 4"/>
-          <p:cNvSpPr/>
-          <p:nvPr/>
-        </p:nvSpPr>
-        <p:spPr>
-          <a:xfrm>
-            <a:off x="868680" y="1984248"/>
-            <a:ext cx="10515600" cy="777240"/>
-          </a:xfrm>
-          <a:prstGeom prst="rect">
-            <a:avLst/>
-          </a:prstGeom>
-          <a:noFill/>
-          <a:ln/>
-        </p:spPr>
-        <p:txBody>
-          <a:bodyPr wrap="square" lIns="0" tIns="0" rIns="0" bIns="0" rtlCol="0" anchor="ctr"/>
-          <a:lstStyle/>
-          <a:p>
-            <a:pPr marL="342900" indent="-342900">
-              <a:lnSpc>
-                <a:spcPct val="120000"/>
-              </a:lnSpc>
-              <a:spcAft>
-                <a:spcPts val="600"/>
-              </a:spcAft>
-              <a:buSzPct val="100000"/>
-              <a:buChar char="•"/>
-            </a:pPr>
-            <a:r>
-              <a:rPr lang="en-US" sz="1400" dirty="0">
-                <a:solidFill>
-                  <a:srgbClr val="232323"/>
-                </a:solidFill>
-                <a:latin typeface="Calibri" pitchFamily="34" charset="0"/>
-                <a:ea typeface="Calibri" pitchFamily="34" charset="-122"/>
-                <a:cs typeface="Calibri" pitchFamily="34" charset="-120"/>
-              </a:rPr>
-              <a:t>Interior style classification is a known academic and Kaggle-style task</a:t>
-            </a:r>
-            <a:endParaRPr lang="en-US" sz="1400" dirty="0"/>
-          </a:p>
-          <a:p>
-            <a:pPr marL="342900" indent="-342900">
-              <a:lnSpc>
-                <a:spcPct val="120000"/>
-              </a:lnSpc>
-              <a:spcAft>
-                <a:spcPts val="600"/>
-              </a:spcAft>
-              <a:buSzPct val="100000"/>
-              <a:buChar char="•"/>
-            </a:pPr>
-            <a:r>
-              <a:rPr lang="en-US" sz="1400" dirty="0">
-                <a:solidFill>
-                  <a:srgbClr val="232323"/>
-                </a:solidFill>
-                <a:latin typeface="Calibri" pitchFamily="34" charset="0"/>
-                <a:ea typeface="Calibri" pitchFamily="34" charset="-122"/>
-                <a:cs typeface="Calibri" pitchFamily="34" charset="-120"/>
-              </a:rPr>
-              <a:t>Most datasets are Houzz-sourced, with ~19 raw style labels</a:t>
-            </a:r>
-            <a:endParaRPr lang="en-US" sz="1400" dirty="0"/>
-          </a:p>
-        </p:txBody>
-      </p:sp>
-      <p:sp>
-        <p:nvSpPr>
-          <p:cNvPr id="7" name="Shape 5"/>
-          <p:cNvSpPr/>
-          <p:nvPr/>
-        </p:nvSpPr>
-        <p:spPr>
-          <a:xfrm>
-            <a:off x="594360" y="2926080"/>
-            <a:ext cx="82296" cy="384048"/>
-          </a:xfrm>
-          <a:prstGeom prst="rect">
-            <a:avLst/>
-          </a:prstGeom>
-          <a:solidFill>
-            <a:srgbClr val="B87A2E"/>
-          </a:solidFill>
-          <a:ln w="12700">
-            <a:solidFill>
-              <a:srgbClr val="B87A2E"/>
-            </a:solidFill>
-            <a:prstDash val="solid"/>
-          </a:ln>
-        </p:spPr>
-      </p:sp>
-      <p:sp>
-        <p:nvSpPr>
-          <p:cNvPr id="8" name="Text 6"/>
-          <p:cNvSpPr/>
-          <p:nvPr/>
-        </p:nvSpPr>
-        <p:spPr>
-          <a:xfrm>
-            <a:off x="868680" y="2880360"/>
-            <a:ext cx="3657600" cy="384048"/>
-          </a:xfrm>
-          <a:prstGeom prst="rect">
-            <a:avLst/>
-          </a:prstGeom>
-          <a:noFill/>
-          <a:ln/>
-        </p:spPr>
-        <p:txBody>
-          <a:bodyPr wrap="square" lIns="0" tIns="0" rIns="0" bIns="0" rtlCol="0" anchor="t"/>
-          <a:lstStyle/>
-          <a:p>
-            <a:pPr indent="0" marL="0">
-              <a:buNone/>
-            </a:pPr>
-            <a:r>
-              <a:rPr lang="en-US" sz="1500" b="1" dirty="0">
-                <a:solidFill>
-                  <a:srgbClr val="1C2B45"/>
-                </a:solidFill>
-                <a:latin typeface="Century Gothic" pitchFamily="34" charset="0"/>
-                <a:ea typeface="Century Gothic" pitchFamily="34" charset="-122"/>
-                <a:cs typeface="Century Gothic" pitchFamily="34" charset="-120"/>
-              </a:rPr>
-              <a:t>Similar projects</a:t>
-            </a:r>
-            <a:endParaRPr lang="en-US" sz="1500" dirty="0"/>
-          </a:p>
-        </p:txBody>
-      </p:sp>
-      <p:sp>
-        <p:nvSpPr>
-          <p:cNvPr id="9" name="Text 7"/>
-          <p:cNvSpPr/>
-          <p:nvPr/>
-        </p:nvSpPr>
-        <p:spPr>
-          <a:xfrm>
-            <a:off x="868680" y="3264408"/>
-            <a:ext cx="10515600" cy="777240"/>
-          </a:xfrm>
-          <a:prstGeom prst="rect">
-            <a:avLst/>
-          </a:prstGeom>
-          <a:noFill/>
-          <a:ln/>
-        </p:spPr>
-        <p:txBody>
-          <a:bodyPr wrap="square" lIns="0" tIns="0" rIns="0" bIns="0" rtlCol="0" anchor="ctr"/>
-          <a:lstStyle/>
-          <a:p>
-            <a:pPr marL="342900" indent="-342900">
-              <a:lnSpc>
-                <a:spcPct val="120000"/>
-              </a:lnSpc>
-              <a:spcAft>
-                <a:spcPts val="600"/>
-              </a:spcAft>
-              <a:buSzPct val="100000"/>
-              <a:buChar char="•"/>
-            </a:pPr>
-            <a:r>
-              <a:rPr lang="en-US" sz="1400" dirty="0">
-                <a:solidFill>
-                  <a:srgbClr val="232323"/>
-                </a:solidFill>
-                <a:latin typeface="Calibri" pitchFamily="34" charset="0"/>
-                <a:ea typeface="Calibri" pitchFamily="34" charset="-122"/>
-                <a:cs typeface="Calibri" pitchFamily="34" charset="-120"/>
-              </a:rPr>
-              <a:t>Pinterest Lens &amp; Wayfair's “Shop the Look” use visual similarity search, not classification</a:t>
-            </a:r>
-            <a:endParaRPr lang="en-US" sz="1400" dirty="0"/>
-          </a:p>
-          <a:p>
-            <a:pPr marL="342900" indent="-342900">
-              <a:lnSpc>
-                <a:spcPct val="120000"/>
-              </a:lnSpc>
-              <a:spcAft>
-                <a:spcPts val="600"/>
-              </a:spcAft>
-              <a:buSzPct val="100000"/>
-              <a:buChar char="•"/>
-            </a:pPr>
-            <a:r>
-              <a:rPr lang="en-US" sz="1400" dirty="0">
-                <a:solidFill>
-                  <a:srgbClr val="232323"/>
-                </a:solidFill>
-                <a:latin typeface="Calibri" pitchFamily="34" charset="0"/>
-                <a:ea typeface="Calibri" pitchFamily="34" charset="-122"/>
-                <a:cs typeface="Calibri" pitchFamily="34" charset="-120"/>
-              </a:rPr>
-              <a:t>CLIP zero-shot is a common, strong no-training baseline</a:t>
-            </a:r>
-            <a:endParaRPr lang="en-US" sz="1400" dirty="0"/>
-          </a:p>
-        </p:txBody>
-      </p:sp>
-      <p:sp>
-        <p:nvSpPr>
-          <p:cNvPr id="10" name="Shape 8"/>
-          <p:cNvSpPr/>
-          <p:nvPr/>
-        </p:nvSpPr>
-        <p:spPr>
-          <a:xfrm>
-            <a:off x="594360" y="4206240"/>
-            <a:ext cx="82296" cy="384048"/>
-          </a:xfrm>
-          <a:prstGeom prst="rect">
-            <a:avLst/>
-          </a:prstGeom>
-          <a:solidFill>
-            <a:srgbClr val="B87A2E"/>
-          </a:solidFill>
-          <a:ln w="12700">
-            <a:solidFill>
-              <a:srgbClr val="B87A2E"/>
-            </a:solidFill>
-            <a:prstDash val="solid"/>
-          </a:ln>
-        </p:spPr>
-      </p:sp>
-      <p:sp>
-        <p:nvSpPr>
-          <p:cNvPr id="11" name="Text 9"/>
-          <p:cNvSpPr/>
-          <p:nvPr/>
-        </p:nvSpPr>
-        <p:spPr>
-          <a:xfrm>
-            <a:off x="868680" y="4160520"/>
-            <a:ext cx="3657600" cy="384048"/>
-          </a:xfrm>
-          <a:prstGeom prst="rect">
-            <a:avLst/>
-          </a:prstGeom>
-          <a:noFill/>
-          <a:ln/>
-        </p:spPr>
-        <p:txBody>
-          <a:bodyPr wrap="square" lIns="0" tIns="0" rIns="0" bIns="0" rtlCol="0" anchor="t"/>
-          <a:lstStyle/>
-          <a:p>
-            <a:pPr indent="0" marL="0">
-              <a:buNone/>
-            </a:pPr>
-            <a:r>
-              <a:rPr lang="en-US" sz="1500" b="1" dirty="0">
-                <a:solidFill>
-                  <a:srgbClr val="1C2B45"/>
-                </a:solidFill>
-                <a:latin typeface="Century Gothic" pitchFamily="34" charset="0"/>
-                <a:ea typeface="Century Gothic" pitchFamily="34" charset="-122"/>
-                <a:cs typeface="Century Gothic" pitchFamily="34" charset="-120"/>
-              </a:rPr>
-              <a:t>Drawbacks</a:t>
-            </a:r>
-            <a:endParaRPr lang="en-US" sz="1500" dirty="0"/>
-          </a:p>
-        </p:txBody>
-      </p:sp>
-      <p:sp>
-        <p:nvSpPr>
-          <p:cNvPr id="12" name="Text 10"/>
-          <p:cNvSpPr/>
-          <p:nvPr/>
-        </p:nvSpPr>
-        <p:spPr>
-          <a:xfrm>
-            <a:off x="868680" y="4544568"/>
-            <a:ext cx="10515600" cy="1143000"/>
-          </a:xfrm>
-          <a:prstGeom prst="rect">
-            <a:avLst/>
-          </a:prstGeom>
-          <a:noFill/>
-          <a:ln/>
-        </p:spPr>
-        <p:txBody>
-          <a:bodyPr wrap="square" lIns="0" tIns="0" rIns="0" bIns="0" rtlCol="0" anchor="ctr"/>
-          <a:lstStyle/>
-          <a:p>
-            <a:pPr marL="342900" indent="-342900">
-              <a:lnSpc>
-                <a:spcPct val="120000"/>
-              </a:lnSpc>
-              <a:spcAft>
-                <a:spcPts val="600"/>
-              </a:spcAft>
-              <a:buSzPct val="100000"/>
-              <a:buChar char="•"/>
-            </a:pPr>
-            <a:r>
-              <a:rPr lang="en-US" sz="1400" dirty="0">
-                <a:solidFill>
-                  <a:srgbClr val="232323"/>
-                </a:solidFill>
-                <a:latin typeface="Calibri" pitchFamily="34" charset="0"/>
-                <a:ea typeface="Calibri" pitchFamily="34" charset="-122"/>
-                <a:cs typeface="Calibri" pitchFamily="34" charset="-120"/>
-              </a:rPr>
-              <a:t>Public style categories don't map cleanly onto any one retailer's catalog</a:t>
-            </a:r>
-            <a:endParaRPr lang="en-US" sz="1400" dirty="0"/>
-          </a:p>
-          <a:p>
-            <a:pPr marL="342900" indent="-342900">
-              <a:lnSpc>
-                <a:spcPct val="120000"/>
-              </a:lnSpc>
-              <a:spcAft>
-                <a:spcPts val="600"/>
-              </a:spcAft>
-              <a:buSzPct val="100000"/>
-              <a:buChar char="•"/>
-            </a:pPr>
-            <a:r>
-              <a:rPr lang="en-US" sz="1400" dirty="0">
-                <a:solidFill>
-                  <a:srgbClr val="232323"/>
-                </a:solidFill>
-                <a:latin typeface="Calibri" pitchFamily="34" charset="0"/>
-                <a:ea typeface="Calibri" pitchFamily="34" charset="-122"/>
-                <a:cs typeface="Calibri" pitchFamily="34" charset="-120"/>
-              </a:rPr>
-              <a:t>19 raw labels manually consolidated into 6 Berre-aligned categories</a:t>
-            </a:r>
-            <a:endParaRPr lang="en-US" sz="1400" dirty="0"/>
-          </a:p>
-          <a:p>
-            <a:pPr marL="342900" indent="-342900">
-              <a:lnSpc>
-                <a:spcPct val="120000"/>
-              </a:lnSpc>
-              <a:spcAft>
-                <a:spcPts val="600"/>
-              </a:spcAft>
-              <a:buSzPct val="100000"/>
-              <a:buChar char="•"/>
-            </a:pPr>
-            <a:r>
-              <a:rPr lang="en-US" sz="1400" dirty="0">
-                <a:solidFill>
-                  <a:srgbClr val="232323"/>
-                </a:solidFill>
-                <a:latin typeface="Calibri" pitchFamily="34" charset="0"/>
-                <a:ea typeface="Calibri" pitchFamily="34" charset="-122"/>
-                <a:cs typeface="Calibri" pitchFamily="34" charset="-120"/>
-              </a:rPr>
-              <a:t>Most projects stop at classification — few connect to a live, purchasable catalog</a:t>
-            </a:r>
-            <a:endParaRPr lang="en-US" sz="1400" dirty="0"/>
-          </a:p>
-        </p:txBody>
-      </p:sp>
-      <p:sp>
-        <p:nvSpPr>
-          <p:cNvPr id="13" name="Text 11"/>
-          <p:cNvSpPr/>
-          <p:nvPr/>
-        </p:nvSpPr>
-        <p:spPr>
-          <a:xfrm>
-            <a:off x="594360" y="6473952"/>
-            <a:ext cx="5486400" cy="274320"/>
-          </a:xfrm>
-          <a:prstGeom prst="rect">
-            <a:avLst/>
-          </a:prstGeom>
-          <a:noFill/>
-          <a:ln/>
-        </p:spPr>
-        <p:txBody>
-          <a:bodyPr wrap="square" lIns="0" tIns="0" rIns="0" bIns="0" rtlCol="0" anchor="ctr"/>
-          <a:lstStyle/>
-          <a:p>
-            <a:pPr indent="0" marL="0">
-              <a:buNone/>
-            </a:pPr>
-            <a:r>
-              <a:rPr lang="en-US" sz="900" dirty="0">
-                <a:solidFill>
-                  <a:srgbClr val="6B6B68"/>
-                </a:solidFill>
-                <a:latin typeface="Calibri" pitchFamily="34" charset="0"/>
-                <a:ea typeface="Calibri" pitchFamily="34" charset="-122"/>
-                <a:cs typeface="Calibri" pitchFamily="34" charset="-120"/>
-              </a:rPr>
-              <a:t>Room Stylist — Berre.ca</a:t>
-            </a:r>
-            <a:endParaRPr lang="en-US" sz="900" dirty="0"/>
-          </a:p>
-        </p:txBody>
-      </p:sp>
-      <p:sp>
-        <p:nvSpPr>
-          <p:cNvPr id="14" name="Text 12"/>
-          <p:cNvSpPr/>
-          <p:nvPr/>
-        </p:nvSpPr>
-        <p:spPr>
-          <a:xfrm>
-            <a:off x="11048695" y="6473952"/>
-            <a:ext cx="548640" cy="274320"/>
-          </a:xfrm>
-          <a:prstGeom prst="rect">
-            <a:avLst/>
-          </a:prstGeom>
-          <a:noFill/>
-          <a:ln/>
-        </p:spPr>
-        <p:txBody>
-          <a:bodyPr wrap="square" lIns="0" tIns="0" rIns="0" bIns="0" rtlCol="0" anchor="ctr"/>
-          <a:lstStyle/>
-          <a:p>
-            <a:pPr algn="r" indent="0" marL="0">
-              <a:buNone/>
-            </a:pPr>
-            <a:r>
-              <a:rPr lang="en-US" sz="900" dirty="0">
-                <a:solidFill>
-                  <a:srgbClr val="6B6B68"/>
-                </a:solidFill>
-                <a:latin typeface="Calibri" pitchFamily="34" charset="0"/>
-                <a:ea typeface="Calibri" pitchFamily="34" charset="-122"/>
-                <a:cs typeface="Calibri" pitchFamily="34" charset="-120"/>
-              </a:rPr>
-              <a:t>5</a:t>
-            </a:r>
-            <a:endParaRPr lang="en-US" sz="900" dirty="0"/>
-          </a:p>
-        </p:txBody>
-      </p:sp>
-    </p:spTree>
-  </p:cSld>
-  <p:clrMapOvr>
-    <a:masterClrMapping/>
-  </p:clrMapOvr>
-</p:sld>
-</file>
-
-<file path=ppt/slides/slide6.xml><?xml version="1.0" encoding="utf-8"?>
-<p:sld xmlns:a="http://schemas.openxmlformats.org/drawingml/2006/main" xmlns:r="http://schemas.openxmlformats.org/officeDocument/2006/relationships" xmlns:p="http://schemas.openxmlformats.org/presentationml/2006/main">
-  <p:cSld name="Slide 6">
-    <p:bg>
-      <p:bgPr>
-        <a:solidFill>
-          <a:srgbClr val="FFFFFF"/>
-        </a:solidFill>
-      </p:bgPr>
-    </p:bg>
-    <p:spTree>
-      <p:nvGrpSpPr>
-        <p:cNvPr id="1" name=""/>
-        <p:cNvGrpSpPr/>
-        <p:nvPr/>
-      </p:nvGrpSpPr>
-      <p:grpSpPr>
-        <a:xfrm>
-          <a:off x="0" y="0"/>
-          <a:ext cx="0" cy="0"/>
-          <a:chOff x="0" y="0"/>
-          <a:chExt cx="0" cy="0"/>
-        </a:xfrm>
-      </p:grpSpPr>
-      <p:sp>
-        <p:nvSpPr>
-          <p:cNvPr id="2" name="Text 0"/>
-          <p:cNvSpPr/>
-          <p:nvPr/>
-        </p:nvSpPr>
-        <p:spPr>
-          <a:xfrm>
-            <a:off x="594360" y="457200"/>
-            <a:ext cx="7315200" cy="320040"/>
-          </a:xfrm>
-          <a:prstGeom prst="rect">
-            <a:avLst/>
-          </a:prstGeom>
-          <a:noFill/>
-          <a:ln/>
-        </p:spPr>
-        <p:txBody>
-          <a:bodyPr wrap="square" lIns="0" tIns="0" rIns="0" bIns="0" rtlCol="0" anchor="ctr"/>
-          <a:lstStyle/>
-          <a:p>
-            <a:pPr algn="l" indent="0" marL="0">
-              <a:buNone/>
-            </a:pPr>
-            <a:r>
-              <a:rPr lang="en-US" sz="1200" b="1" spc="200" kern="0" dirty="0">
-                <a:solidFill>
-                  <a:srgbClr val="B87A2E"/>
-                </a:solidFill>
-                <a:latin typeface="Century Gothic" pitchFamily="34" charset="0"/>
-                <a:ea typeface="Century Gothic" pitchFamily="34" charset="-122"/>
-                <a:cs typeface="Century Gothic" pitchFamily="34" charset="-120"/>
-              </a:rPr>
-              <a:t>04 — METHODOLOGY</a:t>
-            </a:r>
-            <a:endParaRPr lang="en-US" sz="1200" dirty="0"/>
-          </a:p>
-        </p:txBody>
-      </p:sp>
-      <p:sp>
-        <p:nvSpPr>
-          <p:cNvPr id="3" name="Text 1"/>
-          <p:cNvSpPr/>
-          <p:nvPr/>
-        </p:nvSpPr>
-        <p:spPr>
-          <a:xfrm>
-            <a:off x="594360" y="749808"/>
-            <a:ext cx="10515600" cy="822960"/>
-          </a:xfrm>
-          <a:prstGeom prst="rect">
-            <a:avLst/>
-          </a:prstGeom>
-          <a:noFill/>
-          <a:ln/>
-        </p:spPr>
-        <p:txBody>
-          <a:bodyPr wrap="square" lIns="0" tIns="0" rIns="0" bIns="0" rtlCol="0" anchor="ctr"/>
-          <a:lstStyle/>
-          <a:p>
-            <a:pPr algn="l" indent="0" marL="0">
+            <a:pPr marL="0" indent="0" algn="l">
               <a:buNone/>
             </a:pPr>
             <a:r>
@@ -6468,7 +6097,7 @@
           <p:nvPr>
             <p:extLst>
               <p:ext uri="{D42A27DB-BD31-4B8C-83A1-F6EECF244321}">
-                <p14:modId xmlns:p14="http://schemas.microsoft.com/office/powerpoint/2010/main" val="1579011935"/>
+                <p14:modId xmlns:p14="http://schemas.microsoft.com/office/powerpoint/2010/main" val="2897779310"/>
               </p:ext>
             </p:extLst>
           </p:nvPr>
@@ -6482,8 +6111,20 @@
             <a:tbl>
               <a:tblPr/>
               <a:tblGrid>
-                <a:gridCol w="2194560"/>
-                <a:gridCol w="8808415"/>
+                <a:gridCol w="2194560">
+                  <a:extLst>
+                    <a:ext uri="{9D8B030D-6E8A-4147-A177-3AD203B41FA5}">
+                      <a16:colId xmlns:a16="http://schemas.microsoft.com/office/drawing/2014/main" val="20000"/>
+                    </a:ext>
+                  </a:extLst>
+                </a:gridCol>
+                <a:gridCol w="8808415">
+                  <a:extLst>
+                    <a:ext uri="{9D8B030D-6E8A-4147-A177-3AD203B41FA5}">
+                      <a16:colId xmlns:a16="http://schemas.microsoft.com/office/drawing/2014/main" val="20001"/>
+                    </a:ext>
+                  </a:extLst>
+                </a:gridCol>
               </a:tblGrid>
               <a:tr h="571500">
                 <a:tc>
@@ -6491,7 +6132,7 @@
                     <a:bodyPr/>
                     <a:lstStyle/>
                     <a:p>
-                      <a:pPr indent="0" marL="0">
+                      <a:pPr marL="0" indent="0">
                         <a:buNone/>
                       </a:pPr>
                       <a:r>
@@ -6512,7 +6153,7 @@
                       </a:endParaRPr>
                     </a:p>
                   </a:txBody>
-                  <a:tcPr marL="91440" marR="91440" marT="54864" marB="54864" anchor="ctr">
+                  <a:tcPr marT="54864" marB="54864" anchor="ctr">
                     <a:lnL w="6350" cap="flat" cmpd="sng" algn="ctr">
                       <a:solidFill>
                         <a:srgbClr val="E5E5E2"/>
@@ -6559,11 +6200,11 @@
                     <a:bodyPr/>
                     <a:lstStyle/>
                     <a:p>
-                      <a:pPr indent="0" marL="0">
+                      <a:pPr marL="0" indent="0">
                         <a:buNone/>
                       </a:pPr>
                       <a:r>
-                        <a:rPr lang="en-US" sz="1100" dirty="0">
+                        <a:rPr lang="en-US" sz="1400" dirty="0">
                           <a:solidFill>
                             <a:srgbClr val="232323"/>
                           </a:solidFill>
@@ -6573,14 +6214,14 @@
                         </a:rPr>
                         <a:t>Given a room photo, predict its interior style so Berre.ca can recommend matching furniture instead of the shopper browsing hundreds of SKUs.</a:t>
                       </a:r>
-                      <a:endParaRPr lang="en-US" sz="1100" dirty="0">
+                      <a:endParaRPr lang="en-US" sz="1400" dirty="0">
                         <a:latin typeface="Calibri" charset="0"/>
                         <a:ea typeface="Calibri" charset="0"/>
                         <a:cs typeface="Calibri" charset="0"/>
                       </a:endParaRPr>
                     </a:p>
                   </a:txBody>
-                  <a:tcPr marL="91440" marR="91440" marT="54864" marB="54864" anchor="ctr">
+                  <a:tcPr marT="54864" marB="54864" anchor="ctr">
                     <a:lnL w="6350" cap="flat" cmpd="sng" algn="ctr">
                       <a:solidFill>
                         <a:srgbClr val="E5E5E2"/>
@@ -6622,6 +6263,11 @@
                     </a:solidFill>
                   </a:tcPr>
                 </a:tc>
+                <a:extLst>
+                  <a:ext uri="{0D108BD9-81ED-4DB2-BD59-A6C34878D82A}">
+                    <a16:rowId xmlns:a16="http://schemas.microsoft.com/office/drawing/2014/main" val="10000"/>
+                  </a:ext>
+                </a:extLst>
               </a:tr>
               <a:tr h="571500">
                 <a:tc>
@@ -6629,7 +6275,7 @@
                     <a:bodyPr/>
                     <a:lstStyle/>
                     <a:p>
-                      <a:pPr indent="0" marL="0">
+                      <a:pPr marL="0" indent="0">
                         <a:buNone/>
                       </a:pPr>
                       <a:r>
@@ -6650,7 +6296,7 @@
                       </a:endParaRPr>
                     </a:p>
                   </a:txBody>
-                  <a:tcPr marL="91440" marR="91440" marT="54864" marB="54864" anchor="ctr">
+                  <a:tcPr marT="54864" marB="54864" anchor="ctr">
                     <a:lnL w="6350" cap="flat" cmpd="sng" algn="ctr">
                       <a:solidFill>
                         <a:srgbClr val="E5E5E2"/>
@@ -6697,11 +6343,11 @@
                     <a:bodyPr/>
                     <a:lstStyle/>
                     <a:p>
-                      <a:pPr indent="0" marL="0">
+                      <a:pPr marL="0" indent="0">
                         <a:buNone/>
                       </a:pPr>
                       <a:r>
-                        <a:rPr lang="en-US" sz="1100" dirty="0">
+                        <a:rPr lang="en-US" sz="1200" dirty="0">
                           <a:solidFill>
                             <a:srgbClr val="232323"/>
                           </a:solidFill>
@@ -6711,14 +6357,14 @@
                         </a:rPr>
                         <a:t>Berre.ca product images/category tags; public interior-style dataset (Houzz-sourced, 19 raw labels, consolidated to 6 Berre-aligned buckets).</a:t>
                       </a:r>
-                      <a:endParaRPr lang="en-US" sz="1100" dirty="0">
+                      <a:endParaRPr lang="en-US" sz="1200" dirty="0">
                         <a:latin typeface="Calibri" charset="0"/>
                         <a:ea typeface="Calibri" charset="0"/>
                         <a:cs typeface="Calibri" charset="0"/>
                       </a:endParaRPr>
                     </a:p>
                   </a:txBody>
-                  <a:tcPr marL="91440" marR="91440" marT="54864" marB="54864" anchor="ctr">
+                  <a:tcPr marT="54864" marB="54864" anchor="ctr">
                     <a:lnL w="6350" cap="flat" cmpd="sng" algn="ctr">
                       <a:solidFill>
                         <a:srgbClr val="E5E5E2"/>
@@ -6760,6 +6406,11 @@
                     </a:solidFill>
                   </a:tcPr>
                 </a:tc>
+                <a:extLst>
+                  <a:ext uri="{0D108BD9-81ED-4DB2-BD59-A6C34878D82A}">
+                    <a16:rowId xmlns:a16="http://schemas.microsoft.com/office/drawing/2014/main" val="10001"/>
+                  </a:ext>
+                </a:extLst>
               </a:tr>
               <a:tr h="571500">
                 <a:tc>
@@ -6767,7 +6418,7 @@
                     <a:bodyPr/>
                     <a:lstStyle/>
                     <a:p>
-                      <a:pPr indent="0" marL="0">
+                      <a:pPr marL="0" indent="0">
                         <a:buNone/>
                       </a:pPr>
                       <a:r>
@@ -6788,7 +6439,7 @@
                       </a:endParaRPr>
                     </a:p>
                   </a:txBody>
-                  <a:tcPr marL="91440" marR="91440" marT="54864" marB="54864" anchor="ctr">
+                  <a:tcPr marT="54864" marB="54864" anchor="ctr">
                     <a:lnL w="6350" cap="flat" cmpd="sng" algn="ctr">
                       <a:solidFill>
                         <a:srgbClr val="E5E5E2"/>
@@ -6835,11 +6486,11 @@
                     <a:bodyPr/>
                     <a:lstStyle/>
                     <a:p>
-                      <a:pPr indent="0" marL="0">
+                      <a:pPr marL="0" indent="0">
                         <a:buNone/>
                       </a:pPr>
                       <a:r>
-                        <a:rPr lang="en-US" sz="1100" dirty="0">
+                        <a:rPr lang="en-US" sz="1200" dirty="0">
                           <a:solidFill>
                             <a:srgbClr val="232323"/>
                           </a:solidFill>
@@ -6849,14 +6500,14 @@
                         </a:rPr>
                         <a:t>Multi-class image classification. Input: room photo. Output: 1 of 6 style classes + confidence score.</a:t>
                       </a:r>
-                      <a:endParaRPr lang="en-US" sz="1100" dirty="0">
+                      <a:endParaRPr lang="en-US" sz="1200" dirty="0">
                         <a:latin typeface="Calibri" charset="0"/>
                         <a:ea typeface="Calibri" charset="0"/>
                         <a:cs typeface="Calibri" charset="0"/>
                       </a:endParaRPr>
                     </a:p>
                   </a:txBody>
-                  <a:tcPr marL="91440" marR="91440" marT="54864" marB="54864" anchor="ctr">
+                  <a:tcPr marT="54864" marB="54864" anchor="ctr">
                     <a:lnL w="6350" cap="flat" cmpd="sng" algn="ctr">
                       <a:solidFill>
                         <a:srgbClr val="E5E5E2"/>
@@ -6898,6 +6549,11 @@
                     </a:solidFill>
                   </a:tcPr>
                 </a:tc>
+                <a:extLst>
+                  <a:ext uri="{0D108BD9-81ED-4DB2-BD59-A6C34878D82A}">
+                    <a16:rowId xmlns:a16="http://schemas.microsoft.com/office/drawing/2014/main" val="10002"/>
+                  </a:ext>
+                </a:extLst>
               </a:tr>
               <a:tr h="571500">
                 <a:tc>
@@ -6905,7 +6561,7 @@
                     <a:bodyPr/>
                     <a:lstStyle/>
                     <a:p>
-                      <a:pPr indent="0" marL="0">
+                      <a:pPr marL="0" indent="0">
                         <a:buNone/>
                       </a:pPr>
                       <a:r>
@@ -6926,7 +6582,7 @@
                       </a:endParaRPr>
                     </a:p>
                   </a:txBody>
-                  <a:tcPr marL="91440" marR="91440" marT="54864" marB="54864" anchor="ctr">
+                  <a:tcPr marT="54864" marB="54864" anchor="ctr">
                     <a:lnL w="6350" cap="flat" cmpd="sng" algn="ctr">
                       <a:solidFill>
                         <a:srgbClr val="E5E5E2"/>
@@ -6973,11 +6629,11 @@
                     <a:bodyPr/>
                     <a:lstStyle/>
                     <a:p>
-                      <a:pPr indent="0" marL="0">
+                      <a:pPr marL="0" indent="0">
                         <a:buNone/>
                       </a:pPr>
                       <a:r>
-                        <a:rPr lang="en-US" sz="1100" dirty="0">
+                        <a:rPr lang="en-US" sz="1200" dirty="0">
                           <a:solidFill>
                             <a:srgbClr val="232323"/>
                           </a:solidFill>
@@ -6987,14 +6643,14 @@
                         </a:rPr>
                         <a:t>70/15/15 train/val/test split. Metrics: accuracy, macro F1 (classes are imbalanced), confusion matrix per model.</a:t>
                       </a:r>
-                      <a:endParaRPr lang="en-US" sz="1100" dirty="0">
+                      <a:endParaRPr lang="en-US" sz="1200" dirty="0">
                         <a:latin typeface="Calibri" charset="0"/>
                         <a:ea typeface="Calibri" charset="0"/>
                         <a:cs typeface="Calibri" charset="0"/>
                       </a:endParaRPr>
                     </a:p>
                   </a:txBody>
-                  <a:tcPr marL="91440" marR="91440" marT="54864" marB="54864" anchor="ctr">
+                  <a:tcPr marT="54864" marB="54864" anchor="ctr">
                     <a:lnL w="6350" cap="flat" cmpd="sng" algn="ctr">
                       <a:solidFill>
                         <a:srgbClr val="E5E5E2"/>
@@ -7036,6 +6692,11 @@
                     </a:solidFill>
                   </a:tcPr>
                 </a:tc>
+                <a:extLst>
+                  <a:ext uri="{0D108BD9-81ED-4DB2-BD59-A6C34878D82A}">
+                    <a16:rowId xmlns:a16="http://schemas.microsoft.com/office/drawing/2014/main" val="10003"/>
+                  </a:ext>
+                </a:extLst>
               </a:tr>
               <a:tr h="571500">
                 <a:tc>
@@ -7043,7 +6704,7 @@
                     <a:bodyPr/>
                     <a:lstStyle/>
                     <a:p>
-                      <a:pPr indent="0" marL="0">
+                      <a:pPr marL="0" indent="0">
                         <a:buNone/>
                       </a:pPr>
                       <a:r>
@@ -7064,7 +6725,7 @@
                       </a:endParaRPr>
                     </a:p>
                   </a:txBody>
-                  <a:tcPr marL="91440" marR="91440" marT="54864" marB="54864" anchor="ctr">
+                  <a:tcPr marT="54864" marB="54864" anchor="ctr">
                     <a:lnL w="6350" cap="flat" cmpd="sng" algn="ctr">
                       <a:solidFill>
                         <a:srgbClr val="E5E5E2"/>
@@ -7111,11 +6772,11 @@
                     <a:bodyPr/>
                     <a:lstStyle/>
                     <a:p>
-                      <a:pPr indent="0" marL="0">
+                      <a:pPr marL="0" indent="0">
                         <a:buNone/>
                       </a:pPr>
                       <a:r>
-                        <a:rPr lang="en-US" sz="1100" dirty="0">
+                        <a:rPr lang="en-US" sz="1200" dirty="0">
                           <a:solidFill>
                             <a:srgbClr val="232323"/>
                           </a:solidFill>
@@ -7125,14 +6786,14 @@
                         </a:rPr>
                         <a:t>Predicted style filters/ranks the Berre product catalog → top-K products returned to the shopper.</a:t>
                       </a:r>
-                      <a:endParaRPr lang="en-US" sz="1100" dirty="0">
+                      <a:endParaRPr lang="en-US" sz="1200" dirty="0">
                         <a:latin typeface="Calibri" charset="0"/>
                         <a:ea typeface="Calibri" charset="0"/>
                         <a:cs typeface="Calibri" charset="0"/>
                       </a:endParaRPr>
                     </a:p>
                   </a:txBody>
-                  <a:tcPr marL="91440" marR="91440" marT="54864" marB="54864" anchor="ctr">
+                  <a:tcPr marT="54864" marB="54864" anchor="ctr">
                     <a:lnL w="6350" cap="flat" cmpd="sng" algn="ctr">
                       <a:solidFill>
                         <a:srgbClr val="E5E5E2"/>
@@ -7174,6 +6835,11 @@
                     </a:solidFill>
                   </a:tcPr>
                 </a:tc>
+                <a:extLst>
+                  <a:ext uri="{0D108BD9-81ED-4DB2-BD59-A6C34878D82A}">
+                    <a16:rowId xmlns:a16="http://schemas.microsoft.com/office/drawing/2014/main" val="10004"/>
+                  </a:ext>
+                </a:extLst>
               </a:tr>
               <a:tr h="571500">
                 <a:tc>
@@ -7181,7 +6847,7 @@
                     <a:bodyPr/>
                     <a:lstStyle/>
                     <a:p>
-                      <a:pPr indent="0" marL="0">
+                      <a:pPr marL="0" indent="0">
                         <a:buNone/>
                       </a:pPr>
                       <a:r>
@@ -7202,7 +6868,7 @@
                       </a:endParaRPr>
                     </a:p>
                   </a:txBody>
-                  <a:tcPr marL="91440" marR="91440" marT="54864" marB="54864" anchor="ctr">
+                  <a:tcPr marT="54864" marB="54864" anchor="ctr">
                     <a:lnL w="6350" cap="flat" cmpd="sng" algn="ctr">
                       <a:solidFill>
                         <a:srgbClr val="E5E5E2"/>
@@ -7249,11 +6915,11 @@
                     <a:bodyPr/>
                     <a:lstStyle/>
                     <a:p>
-                      <a:pPr indent="0" marL="0">
+                      <a:pPr marL="0" indent="0">
                         <a:buNone/>
                       </a:pPr>
                       <a:r>
-                        <a:rPr lang="en-US" sz="1100" dirty="0">
+                        <a:rPr lang="en-US" sz="1200" dirty="0">
                           <a:solidFill>
                             <a:srgbClr val="232323"/>
                           </a:solidFill>
@@ -7263,14 +6929,14 @@
                         </a:rPr>
                         <a:t>Batch offline during benchmarking; real-time single-image inference via the deployed Flask/Docker/Azure API.</a:t>
                       </a:r>
-                      <a:endParaRPr lang="en-US" sz="1100" dirty="0">
+                      <a:endParaRPr lang="en-US" sz="1200" dirty="0">
                         <a:latin typeface="Calibri" charset="0"/>
                         <a:ea typeface="Calibri" charset="0"/>
                         <a:cs typeface="Calibri" charset="0"/>
                       </a:endParaRPr>
                     </a:p>
                   </a:txBody>
-                  <a:tcPr marL="91440" marR="91440" marT="54864" marB="54864" anchor="ctr">
+                  <a:tcPr marT="54864" marB="54864" anchor="ctr">
                     <a:lnL w="6350" cap="flat" cmpd="sng" algn="ctr">
                       <a:solidFill>
                         <a:srgbClr val="E5E5E2"/>
@@ -7312,6 +6978,11 @@
                     </a:solidFill>
                   </a:tcPr>
                 </a:tc>
+                <a:extLst>
+                  <a:ext uri="{0D108BD9-81ED-4DB2-BD59-A6C34878D82A}">
+                    <a16:rowId xmlns:a16="http://schemas.microsoft.com/office/drawing/2014/main" val="10005"/>
+                  </a:ext>
+                </a:extLst>
               </a:tr>
               <a:tr h="571500">
                 <a:tc>
@@ -7319,7 +6990,7 @@
                     <a:bodyPr/>
                     <a:lstStyle/>
                     <a:p>
-                      <a:pPr indent="0" marL="0">
+                      <a:pPr marL="0" indent="0">
                         <a:buNone/>
                       </a:pPr>
                       <a:r>
@@ -7340,7 +7011,7 @@
                       </a:endParaRPr>
                     </a:p>
                   </a:txBody>
-                  <a:tcPr marL="91440" marR="91440" marT="54864" marB="54864" anchor="ctr">
+                  <a:tcPr marT="54864" marB="54864" anchor="ctr">
                     <a:lnL w="6350" cap="flat" cmpd="sng" algn="ctr">
                       <a:solidFill>
                         <a:srgbClr val="E5E5E2"/>
@@ -7387,7 +7058,7 @@
                     <a:bodyPr/>
                     <a:lstStyle/>
                     <a:p>
-                      <a:pPr indent="0" marL="0">
+                      <a:pPr marL="0" indent="0">
                         <a:buNone/>
                       </a:pPr>
                       <a:r>
@@ -7408,7 +7079,7 @@
                       </a:endParaRPr>
                     </a:p>
                   </a:txBody>
-                  <a:tcPr marL="91440" marR="91440" marT="54864" marB="54864" anchor="ctr">
+                  <a:tcPr marT="54864" marB="54864" anchor="ctr">
                     <a:lnL w="6350" cap="flat" cmpd="sng" algn="ctr">
                       <a:solidFill>
                         <a:srgbClr val="E5E5E2"/>
@@ -7450,6 +7121,11 @@
                     </a:solidFill>
                   </a:tcPr>
                 </a:tc>
+                <a:extLst>
+                  <a:ext uri="{0D108BD9-81ED-4DB2-BD59-A6C34878D82A}">
+                    <a16:rowId xmlns:a16="http://schemas.microsoft.com/office/drawing/2014/main" val="10006"/>
+                  </a:ext>
+                </a:extLst>
               </a:tr>
               <a:tr h="571500">
                 <a:tc>
@@ -7457,7 +7133,7 @@
                     <a:bodyPr/>
                     <a:lstStyle/>
                     <a:p>
-                      <a:pPr indent="0" marL="0">
+                      <a:pPr marL="0" indent="0">
                         <a:buNone/>
                       </a:pPr>
                       <a:r>
@@ -7478,7 +7154,7 @@
                       </a:endParaRPr>
                     </a:p>
                   </a:txBody>
-                  <a:tcPr marL="91440" marR="91440" marT="54864" marB="54864" anchor="ctr">
+                  <a:tcPr marT="54864" marB="54864" anchor="ctr">
                     <a:lnL w="6350" cap="flat" cmpd="sng" algn="ctr">
                       <a:solidFill>
                         <a:srgbClr val="E5E5E2"/>
@@ -7525,7 +7201,7 @@
                     <a:bodyPr/>
                     <a:lstStyle/>
                     <a:p>
-                      <a:pPr indent="0" marL="0">
+                      <a:pPr marL="0" indent="0">
                         <a:buNone/>
                       </a:pPr>
                       <a:r>
@@ -7546,7 +7222,7 @@
                       </a:endParaRPr>
                     </a:p>
                   </a:txBody>
-                  <a:tcPr marL="91440" marR="91440" marT="54864" marB="54864" anchor="ctr">
+                  <a:tcPr marT="54864" marB="54864" anchor="ctr">
                     <a:lnL w="6350" cap="flat" cmpd="sng" algn="ctr">
                       <a:solidFill>
                         <a:srgbClr val="E5E5E2"/>
@@ -7588,6 +7264,11 @@
                     </a:solidFill>
                   </a:tcPr>
                 </a:tc>
+                <a:extLst>
+                  <a:ext uri="{0D108BD9-81ED-4DB2-BD59-A6C34878D82A}">
+                    <a16:rowId xmlns:a16="http://schemas.microsoft.com/office/drawing/2014/main" val="10007"/>
+                  </a:ext>
+                </a:extLst>
               </a:tr>
             </a:tbl>
           </a:graphicData>
@@ -7614,7 +7295,7 @@
           <a:bodyPr wrap="square" lIns="0" tIns="0" rIns="0" bIns="0" rtlCol="0" anchor="ctr"/>
           <a:lstStyle/>
           <a:p>
-            <a:pPr indent="0" marL="0">
+            <a:pPr marL="0" indent="0">
               <a:buNone/>
             </a:pPr>
             <a:r>
@@ -7653,7 +7334,7 @@
           <a:bodyPr wrap="square" lIns="0" tIns="0" rIns="0" bIns="0" rtlCol="0" anchor="ctr"/>
           <a:lstStyle/>
           <a:p>
-            <a:pPr algn="r" indent="0" marL="0">
+            <a:pPr marL="0" indent="0" algn="r">
               <a:buNone/>
             </a:pPr>
             <a:r>
@@ -7687,6 +7368,7 @@
         <a:solidFill>
           <a:srgbClr val="FFFFFF"/>
         </a:solidFill>
+        <a:effectLst/>
       </p:bgPr>
     </p:bg>
     <p:spTree>
@@ -7724,11 +7406,11 @@
           <a:bodyPr wrap="square" lIns="0" tIns="0" rIns="0" bIns="0" rtlCol="0" anchor="ctr"/>
           <a:lstStyle/>
           <a:p>
-            <a:pPr algn="l" indent="0" marL="0">
+            <a:pPr marL="0" indent="0" algn="l">
               <a:buNone/>
             </a:pPr>
             <a:r>
-              <a:rPr lang="en-US" sz="1200" b="1" spc="200" kern="0" dirty="0">
+              <a:rPr lang="en-US" sz="1200" b="1" kern="0" spc="200" dirty="0">
                 <a:solidFill>
                   <a:srgbClr val="B87A2E"/>
                 </a:solidFill>
@@ -7763,7 +7445,7 @@
           <a:bodyPr wrap="square" lIns="0" tIns="0" rIns="0" bIns="0" rtlCol="0" anchor="ctr"/>
           <a:lstStyle/>
           <a:p>
-            <a:pPr algn="l" indent="0" marL="0">
+            <a:pPr marL="0" indent="0" algn="l">
               <a:buNone/>
             </a:pPr>
             <a:r>
@@ -7797,18 +7479,48 @@
         </p:nvGraphicFramePr>
         <p:xfrm>
           <a:off x="594360" y="1828800"/>
-          <a:ext cx="11002975" cy="1554480"/>
+          <a:ext cx="10332720" cy="1728216"/>
         </p:xfrm>
         <a:graphic>
           <a:graphicData uri="http://schemas.openxmlformats.org/drawingml/2006/table">
             <a:tbl>
               <a:tblPr/>
               <a:tblGrid>
-                <a:gridCol w="2377440"/>
-                <a:gridCol w="1600200"/>
-                <a:gridCol w="1600200"/>
-                <a:gridCol w="1828800"/>
-                <a:gridCol w="2926080"/>
+                <a:gridCol w="2377440">
+                  <a:extLst>
+                    <a:ext uri="{9D8B030D-6E8A-4147-A177-3AD203B41FA5}">
+                      <a16:colId xmlns:a16="http://schemas.microsoft.com/office/drawing/2014/main" val="20000"/>
+                    </a:ext>
+                  </a:extLst>
+                </a:gridCol>
+                <a:gridCol w="1600200">
+                  <a:extLst>
+                    <a:ext uri="{9D8B030D-6E8A-4147-A177-3AD203B41FA5}">
+                      <a16:colId xmlns:a16="http://schemas.microsoft.com/office/drawing/2014/main" val="20001"/>
+                    </a:ext>
+                  </a:extLst>
+                </a:gridCol>
+                <a:gridCol w="1600200">
+                  <a:extLst>
+                    <a:ext uri="{9D8B030D-6E8A-4147-A177-3AD203B41FA5}">
+                      <a16:colId xmlns:a16="http://schemas.microsoft.com/office/drawing/2014/main" val="20002"/>
+                    </a:ext>
+                  </a:extLst>
+                </a:gridCol>
+                <a:gridCol w="1828800">
+                  <a:extLst>
+                    <a:ext uri="{9D8B030D-6E8A-4147-A177-3AD203B41FA5}">
+                      <a16:colId xmlns:a16="http://schemas.microsoft.com/office/drawing/2014/main" val="20003"/>
+                    </a:ext>
+                  </a:extLst>
+                </a:gridCol>
+                <a:gridCol w="2926080">
+                  <a:extLst>
+                    <a:ext uri="{9D8B030D-6E8A-4147-A177-3AD203B41FA5}">
+                      <a16:colId xmlns:a16="http://schemas.microsoft.com/office/drawing/2014/main" val="20004"/>
+                    </a:ext>
+                  </a:extLst>
+                </a:gridCol>
               </a:tblGrid>
               <a:tr h="388620">
                 <a:tc>
@@ -7816,7 +7528,7 @@
                     <a:bodyPr/>
                     <a:lstStyle/>
                     <a:p>
-                      <a:pPr indent="0" marL="0">
+                      <a:pPr marL="0" indent="0">
                         <a:buNone/>
                       </a:pPr>
                       <a:r>
@@ -7837,7 +7549,7 @@
                       </a:endParaRPr>
                     </a:p>
                   </a:txBody>
-                  <a:tcPr marL="91440" marR="91440" marT="54864" marB="54864" anchor="ctr">
+                  <a:tcPr marT="54864" marB="54864" anchor="ctr">
                     <a:lnL w="6350" cap="flat" cmpd="sng" algn="ctr">
                       <a:solidFill>
                         <a:srgbClr val="E5E5E2"/>
@@ -7884,7 +7596,7 @@
                     <a:bodyPr/>
                     <a:lstStyle/>
                     <a:p>
-                      <a:pPr indent="0" marL="0">
+                      <a:pPr marL="0" indent="0">
                         <a:buNone/>
                       </a:pPr>
                       <a:r>
@@ -7905,7 +7617,7 @@
                       </a:endParaRPr>
                     </a:p>
                   </a:txBody>
-                  <a:tcPr marL="91440" marR="91440" marT="54864" marB="54864" anchor="ctr">
+                  <a:tcPr marT="54864" marB="54864" anchor="ctr">
                     <a:lnL w="6350" cap="flat" cmpd="sng" algn="ctr">
                       <a:solidFill>
                         <a:srgbClr val="E5E5E2"/>
@@ -7952,7 +7664,7 @@
                     <a:bodyPr/>
                     <a:lstStyle/>
                     <a:p>
-                      <a:pPr indent="0" marL="0">
+                      <a:pPr marL="0" indent="0">
                         <a:buNone/>
                       </a:pPr>
                       <a:r>
@@ -7973,7 +7685,7 @@
                       </a:endParaRPr>
                     </a:p>
                   </a:txBody>
-                  <a:tcPr marL="91440" marR="91440" marT="54864" marB="54864" anchor="ctr">
+                  <a:tcPr marT="54864" marB="54864" anchor="ctr">
                     <a:lnL w="6350" cap="flat" cmpd="sng" algn="ctr">
                       <a:solidFill>
                         <a:srgbClr val="E5E5E2"/>
@@ -8020,7 +7732,7 @@
                     <a:bodyPr/>
                     <a:lstStyle/>
                     <a:p>
-                      <a:pPr indent="0" marL="0">
+                      <a:pPr marL="0" indent="0">
                         <a:buNone/>
                       </a:pPr>
                       <a:r>
@@ -8041,7 +7753,7 @@
                       </a:endParaRPr>
                     </a:p>
                   </a:txBody>
-                  <a:tcPr marL="91440" marR="91440" marT="54864" marB="54864" anchor="ctr">
+                  <a:tcPr marT="54864" marB="54864" anchor="ctr">
                     <a:lnL w="6350" cap="flat" cmpd="sng" algn="ctr">
                       <a:solidFill>
                         <a:srgbClr val="E5E5E2"/>
@@ -8088,7 +7800,7 @@
                     <a:bodyPr/>
                     <a:lstStyle/>
                     <a:p>
-                      <a:pPr indent="0" marL="0">
+                      <a:pPr marL="0" indent="0">
                         <a:buNone/>
                       </a:pPr>
                       <a:r>
@@ -8109,7 +7821,7 @@
                       </a:endParaRPr>
                     </a:p>
                   </a:txBody>
-                  <a:tcPr marL="91440" marR="91440" marT="54864" marB="54864" anchor="ctr">
+                  <a:tcPr marT="54864" marB="54864" anchor="ctr">
                     <a:lnL w="6350" cap="flat" cmpd="sng" algn="ctr">
                       <a:solidFill>
                         <a:srgbClr val="E5E5E2"/>
@@ -8151,6 +7863,11 @@
                     </a:solidFill>
                   </a:tcPr>
                 </a:tc>
+                <a:extLst>
+                  <a:ext uri="{0D108BD9-81ED-4DB2-BD59-A6C34878D82A}">
+                    <a16:rowId xmlns:a16="http://schemas.microsoft.com/office/drawing/2014/main" val="10000"/>
+                  </a:ext>
+                </a:extLst>
               </a:tr>
               <a:tr h="388620">
                 <a:tc>
@@ -8158,7 +7875,7 @@
                     <a:bodyPr/>
                     <a:lstStyle/>
                     <a:p>
-                      <a:pPr indent="0" marL="0">
+                      <a:pPr marL="0" indent="0">
                         <a:buNone/>
                       </a:pPr>
                       <a:r>
@@ -8179,7 +7896,7 @@
                       </a:endParaRPr>
                     </a:p>
                   </a:txBody>
-                  <a:tcPr marL="91440" marR="91440" marT="54864" marB="54864" anchor="ctr">
+                  <a:tcPr marT="54864" marB="54864" anchor="ctr">
                     <a:lnL w="6350" cap="flat" cmpd="sng" algn="ctr">
                       <a:solidFill>
                         <a:srgbClr val="E5E5E2"/>
@@ -8226,7 +7943,7 @@
                     <a:bodyPr/>
                     <a:lstStyle/>
                     <a:p>
-                      <a:pPr indent="0" marL="0">
+                      <a:pPr marL="0" indent="0">
                         <a:buNone/>
                       </a:pPr>
                       <a:r>
@@ -8247,7 +7964,7 @@
                       </a:endParaRPr>
                     </a:p>
                   </a:txBody>
-                  <a:tcPr marL="91440" marR="91440" marT="54864" marB="54864" anchor="ctr">
+                  <a:tcPr marT="54864" marB="54864" anchor="ctr">
                     <a:lnL w="6350" cap="flat" cmpd="sng" algn="ctr">
                       <a:solidFill>
                         <a:srgbClr val="E5E5E2"/>
@@ -8294,7 +8011,7 @@
                     <a:bodyPr/>
                     <a:lstStyle/>
                     <a:p>
-                      <a:pPr indent="0" marL="0">
+                      <a:pPr marL="0" indent="0">
                         <a:buNone/>
                       </a:pPr>
                       <a:r>
@@ -8315,7 +8032,7 @@
                       </a:endParaRPr>
                     </a:p>
                   </a:txBody>
-                  <a:tcPr marL="91440" marR="91440" marT="54864" marB="54864" anchor="ctr">
+                  <a:tcPr marT="54864" marB="54864" anchor="ctr">
                     <a:lnL w="6350" cap="flat" cmpd="sng" algn="ctr">
                       <a:solidFill>
                         <a:srgbClr val="E5E5E2"/>
@@ -8362,7 +8079,7 @@
                     <a:bodyPr/>
                     <a:lstStyle/>
                     <a:p>
-                      <a:pPr indent="0" marL="0">
+                      <a:pPr marL="0" indent="0">
                         <a:buNone/>
                       </a:pPr>
                       <a:r>
@@ -8383,7 +8100,7 @@
                       </a:endParaRPr>
                     </a:p>
                   </a:txBody>
-                  <a:tcPr marL="91440" marR="91440" marT="54864" marB="54864" anchor="ctr">
+                  <a:tcPr marT="54864" marB="54864" anchor="ctr">
                     <a:lnL w="6350" cap="flat" cmpd="sng" algn="ctr">
                       <a:solidFill>
                         <a:srgbClr val="E5E5E2"/>
@@ -8430,7 +8147,7 @@
                     <a:bodyPr/>
                     <a:lstStyle/>
                     <a:p>
-                      <a:pPr indent="0" marL="0">
+                      <a:pPr marL="0" indent="0">
                         <a:buNone/>
                       </a:pPr>
                       <a:r>
@@ -8451,7 +8168,7 @@
                       </a:endParaRPr>
                     </a:p>
                   </a:txBody>
-                  <a:tcPr marL="91440" marR="91440" marT="54864" marB="54864" anchor="ctr">
+                  <a:tcPr marT="54864" marB="54864" anchor="ctr">
                     <a:lnL w="6350" cap="flat" cmpd="sng" algn="ctr">
                       <a:solidFill>
                         <a:srgbClr val="E5E5E2"/>
@@ -8493,6 +8210,11 @@
                     </a:solidFill>
                   </a:tcPr>
                 </a:tc>
+                <a:extLst>
+                  <a:ext uri="{0D108BD9-81ED-4DB2-BD59-A6C34878D82A}">
+                    <a16:rowId xmlns:a16="http://schemas.microsoft.com/office/drawing/2014/main" val="10001"/>
+                  </a:ext>
+                </a:extLst>
               </a:tr>
               <a:tr h="388620">
                 <a:tc>
@@ -8500,7 +8222,7 @@
                     <a:bodyPr/>
                     <a:lstStyle/>
                     <a:p>
-                      <a:pPr indent="0" marL="0">
+                      <a:pPr marL="0" indent="0">
                         <a:buNone/>
                       </a:pPr>
                       <a:r>
@@ -8521,7 +8243,7 @@
                       </a:endParaRPr>
                     </a:p>
                   </a:txBody>
-                  <a:tcPr marL="91440" marR="91440" marT="54864" marB="54864" anchor="ctr">
+                  <a:tcPr marT="54864" marB="54864" anchor="ctr">
                     <a:lnL w="6350" cap="flat" cmpd="sng" algn="ctr">
                       <a:solidFill>
                         <a:srgbClr val="E5E5E2"/>
@@ -8568,7 +8290,7 @@
                     <a:bodyPr/>
                     <a:lstStyle/>
                     <a:p>
-                      <a:pPr indent="0" marL="0">
+                      <a:pPr marL="0" indent="0">
                         <a:buNone/>
                       </a:pPr>
                       <a:r>
@@ -8589,7 +8311,7 @@
                       </a:endParaRPr>
                     </a:p>
                   </a:txBody>
-                  <a:tcPr marL="91440" marR="91440" marT="54864" marB="54864" anchor="ctr">
+                  <a:tcPr marT="54864" marB="54864" anchor="ctr">
                     <a:lnL w="6350" cap="flat" cmpd="sng" algn="ctr">
                       <a:solidFill>
                         <a:srgbClr val="E5E5E2"/>
@@ -8636,7 +8358,7 @@
                     <a:bodyPr/>
                     <a:lstStyle/>
                     <a:p>
-                      <a:pPr indent="0" marL="0">
+                      <a:pPr marL="0" indent="0">
                         <a:buNone/>
                       </a:pPr>
                       <a:r>
@@ -8657,7 +8379,7 @@
                       </a:endParaRPr>
                     </a:p>
                   </a:txBody>
-                  <a:tcPr marL="91440" marR="91440" marT="54864" marB="54864" anchor="ctr">
+                  <a:tcPr marT="54864" marB="54864" anchor="ctr">
                     <a:lnL w="6350" cap="flat" cmpd="sng" algn="ctr">
                       <a:solidFill>
                         <a:srgbClr val="E5E5E2"/>
@@ -8704,7 +8426,7 @@
                     <a:bodyPr/>
                     <a:lstStyle/>
                     <a:p>
-                      <a:pPr indent="0" marL="0">
+                      <a:pPr marL="0" indent="0">
                         <a:buNone/>
                       </a:pPr>
                       <a:r>
@@ -8725,7 +8447,7 @@
                       </a:endParaRPr>
                     </a:p>
                   </a:txBody>
-                  <a:tcPr marL="91440" marR="91440" marT="54864" marB="54864" anchor="ctr">
+                  <a:tcPr marT="54864" marB="54864" anchor="ctr">
                     <a:lnL w="6350" cap="flat" cmpd="sng" algn="ctr">
                       <a:solidFill>
                         <a:srgbClr val="E5E5E2"/>
@@ -8772,7 +8494,7 @@
                     <a:bodyPr/>
                     <a:lstStyle/>
                     <a:p>
-                      <a:pPr indent="0" marL="0">
+                      <a:pPr marL="0" indent="0">
                         <a:buNone/>
                       </a:pPr>
                       <a:r>
@@ -8793,7 +8515,7 @@
                       </a:endParaRPr>
                     </a:p>
                   </a:txBody>
-                  <a:tcPr marL="91440" marR="91440" marT="54864" marB="54864" anchor="ctr">
+                  <a:tcPr marT="54864" marB="54864" anchor="ctr">
                     <a:lnL w="6350" cap="flat" cmpd="sng" algn="ctr">
                       <a:solidFill>
                         <a:srgbClr val="E5E5E2"/>
@@ -8835,6 +8557,11 @@
                     </a:solidFill>
                   </a:tcPr>
                 </a:tc>
+                <a:extLst>
+                  <a:ext uri="{0D108BD9-81ED-4DB2-BD59-A6C34878D82A}">
+                    <a16:rowId xmlns:a16="http://schemas.microsoft.com/office/drawing/2014/main" val="10002"/>
+                  </a:ext>
+                </a:extLst>
               </a:tr>
               <a:tr h="388620">
                 <a:tc>
@@ -8842,7 +8569,7 @@
                     <a:bodyPr/>
                     <a:lstStyle/>
                     <a:p>
-                      <a:pPr indent="0" marL="0">
+                      <a:pPr marL="0" indent="0">
                         <a:buNone/>
                       </a:pPr>
                       <a:r>
@@ -8863,7 +8590,7 @@
                       </a:endParaRPr>
                     </a:p>
                   </a:txBody>
-                  <a:tcPr marL="91440" marR="91440" marT="54864" marB="54864" anchor="ctr">
+                  <a:tcPr marT="54864" marB="54864" anchor="ctr">
                     <a:lnL w="6350" cap="flat" cmpd="sng" algn="ctr">
                       <a:solidFill>
                         <a:srgbClr val="E5E5E2"/>
@@ -8910,7 +8637,7 @@
                     <a:bodyPr/>
                     <a:lstStyle/>
                     <a:p>
-                      <a:pPr indent="0" marL="0">
+                      <a:pPr marL="0" indent="0">
                         <a:buNone/>
                       </a:pPr>
                       <a:r>
@@ -8931,7 +8658,7 @@
                       </a:endParaRPr>
                     </a:p>
                   </a:txBody>
-                  <a:tcPr marL="91440" marR="91440" marT="54864" marB="54864" anchor="ctr">
+                  <a:tcPr marT="54864" marB="54864" anchor="ctr">
                     <a:lnL w="6350" cap="flat" cmpd="sng" algn="ctr">
                       <a:solidFill>
                         <a:srgbClr val="E5E5E2"/>
@@ -8978,7 +8705,7 @@
                     <a:bodyPr/>
                     <a:lstStyle/>
                     <a:p>
-                      <a:pPr indent="0" marL="0">
+                      <a:pPr marL="0" indent="0">
                         <a:buNone/>
                       </a:pPr>
                       <a:r>
@@ -8999,7 +8726,7 @@
                       </a:endParaRPr>
                     </a:p>
                   </a:txBody>
-                  <a:tcPr marL="91440" marR="91440" marT="54864" marB="54864" anchor="ctr">
+                  <a:tcPr marT="54864" marB="54864" anchor="ctr">
                     <a:lnL w="6350" cap="flat" cmpd="sng" algn="ctr">
                       <a:solidFill>
                         <a:srgbClr val="E5E5E2"/>
@@ -9046,7 +8773,7 @@
                     <a:bodyPr/>
                     <a:lstStyle/>
                     <a:p>
-                      <a:pPr indent="0" marL="0">
+                      <a:pPr marL="0" indent="0">
                         <a:buNone/>
                       </a:pPr>
                       <a:r>
@@ -9067,7 +8794,7 @@
                       </a:endParaRPr>
                     </a:p>
                   </a:txBody>
-                  <a:tcPr marL="91440" marR="91440" marT="54864" marB="54864" anchor="ctr">
+                  <a:tcPr marT="54864" marB="54864" anchor="ctr">
                     <a:lnL w="6350" cap="flat" cmpd="sng" algn="ctr">
                       <a:solidFill>
                         <a:srgbClr val="E5E5E2"/>
@@ -9114,7 +8841,7 @@
                     <a:bodyPr/>
                     <a:lstStyle/>
                     <a:p>
-                      <a:pPr indent="0" marL="0">
+                      <a:pPr marL="0" indent="0">
                         <a:buNone/>
                       </a:pPr>
                       <a:r>
@@ -9135,7 +8862,7 @@
                       </a:endParaRPr>
                     </a:p>
                   </a:txBody>
-                  <a:tcPr marL="91440" marR="91440" marT="54864" marB="54864" anchor="ctr">
+                  <a:tcPr marT="54864" marB="54864" anchor="ctr">
                     <a:lnL w="6350" cap="flat" cmpd="sng" algn="ctr">
                       <a:solidFill>
                         <a:srgbClr val="E5E5E2"/>
@@ -9177,6 +8904,11 @@
                     </a:solidFill>
                   </a:tcPr>
                 </a:tc>
+                <a:extLst>
+                  <a:ext uri="{0D108BD9-81ED-4DB2-BD59-A6C34878D82A}">
+                    <a16:rowId xmlns:a16="http://schemas.microsoft.com/office/drawing/2014/main" val="10003"/>
+                  </a:ext>
+                </a:extLst>
               </a:tr>
             </a:tbl>
           </a:graphicData>
@@ -9321,7 +9053,7 @@
           <a:bodyPr wrap="square" lIns="0" tIns="0" rIns="0" bIns="0" rtlCol="0" anchor="ctr"/>
           <a:lstStyle/>
           <a:p>
-            <a:pPr indent="0" marL="0">
+            <a:pPr marL="0" indent="0">
               <a:buNone/>
             </a:pPr>
             <a:r>
@@ -9360,7 +9092,7 @@
           <a:bodyPr wrap="square" lIns="0" tIns="0" rIns="0" bIns="0" rtlCol="0" anchor="ctr"/>
           <a:lstStyle/>
           <a:p>
-            <a:pPr algn="r" indent="0" marL="0">
+            <a:pPr marL="0" indent="0" algn="r">
               <a:buNone/>
             </a:pPr>
             <a:r>
@@ -9394,6 +9126,7 @@
         <a:solidFill>
           <a:srgbClr val="FFFFFF"/>
         </a:solidFill>
+        <a:effectLst/>
       </p:bgPr>
     </p:bg>
     <p:spTree>
@@ -9431,11 +9164,11 @@
           <a:bodyPr wrap="square" lIns="0" tIns="0" rIns="0" bIns="0" rtlCol="0" anchor="ctr"/>
           <a:lstStyle/>
           <a:p>
-            <a:pPr algn="l" indent="0" marL="0">
+            <a:pPr marL="0" indent="0" algn="l">
               <a:buNone/>
             </a:pPr>
             <a:r>
-              <a:rPr lang="en-US" sz="1200" b="1" spc="200" kern="0" dirty="0">
+              <a:rPr lang="en-US" sz="1200" b="1" kern="0" spc="200" dirty="0">
                 <a:solidFill>
                   <a:srgbClr val="B87A2E"/>
                 </a:solidFill>
@@ -9470,7 +9203,7 @@
           <a:bodyPr wrap="square" lIns="0" tIns="0" rIns="0" bIns="0" rtlCol="0" anchor="ctr"/>
           <a:lstStyle/>
           <a:p>
-            <a:pPr algn="l" indent="0" marL="0">
+            <a:pPr marL="0" indent="0" algn="l">
               <a:buNone/>
             </a:pPr>
             <a:r>
@@ -9512,6 +9245,13 @@
             <a:prstDash val="solid"/>
           </a:ln>
         </p:spPr>
+        <p:txBody>
+          <a:bodyPr/>
+          <a:lstStyle/>
+          <a:p>
+            <a:endParaRPr lang="tr-TR"/>
+          </a:p>
+        </p:txBody>
       </p:sp>
       <p:sp>
         <p:nvSpPr>
@@ -9534,7 +9274,7 @@
           <a:bodyPr wrap="square" lIns="0" tIns="0" rIns="0" bIns="0" rtlCol="0" anchor="ctr"/>
           <a:lstStyle/>
           <a:p>
-            <a:pPr algn="ctr" indent="0" marL="0">
+            <a:pPr marL="0" indent="0" algn="ctr">
               <a:buNone/>
             </a:pPr>
             <a:r>
@@ -9573,7 +9313,7 @@
           <a:bodyPr wrap="square" lIns="0" tIns="0" rIns="0" bIns="0" rtlCol="0" anchor="ctr"/>
           <a:lstStyle/>
           <a:p>
-            <a:pPr algn="ctr" indent="0" marL="0">
+            <a:pPr marL="0" indent="0" algn="ctr">
               <a:buNone/>
             </a:pPr>
             <a:r>
@@ -9612,7 +9352,7 @@
           <a:bodyPr wrap="square" lIns="0" tIns="0" rIns="0" bIns="0" rtlCol="0" anchor="ctr"/>
           <a:lstStyle/>
           <a:p>
-            <a:pPr algn="ctr" indent="0" marL="0">
+            <a:pPr marL="0" indent="0" algn="ctr">
               <a:buNone/>
             </a:pPr>
             <a:r>
@@ -9654,6 +9394,13 @@
             <a:prstDash val="solid"/>
           </a:ln>
         </p:spPr>
+        <p:txBody>
+          <a:bodyPr/>
+          <a:lstStyle/>
+          <a:p>
+            <a:endParaRPr lang="tr-TR"/>
+          </a:p>
+        </p:txBody>
       </p:sp>
       <p:sp>
         <p:nvSpPr>
@@ -9676,7 +9423,7 @@
           <a:bodyPr wrap="square" lIns="0" tIns="0" rIns="0" bIns="0" rtlCol="0" anchor="ctr"/>
           <a:lstStyle/>
           <a:p>
-            <a:pPr algn="ctr" indent="0" marL="0">
+            <a:pPr marL="0" indent="0" algn="ctr">
               <a:buNone/>
             </a:pPr>
             <a:r>
@@ -9715,7 +9462,7 @@
           <a:bodyPr wrap="square" lIns="0" tIns="0" rIns="0" bIns="0" rtlCol="0" anchor="ctr"/>
           <a:lstStyle/>
           <a:p>
-            <a:pPr algn="ctr" indent="0" marL="0">
+            <a:pPr marL="0" indent="0" algn="ctr">
               <a:buNone/>
             </a:pPr>
             <a:r>
@@ -9754,7 +9501,7 @@
           <a:bodyPr wrap="square" lIns="0" tIns="0" rIns="0" bIns="0" rtlCol="0" anchor="ctr"/>
           <a:lstStyle/>
           <a:p>
-            <a:pPr algn="ctr" indent="0" marL="0">
+            <a:pPr marL="0" indent="0" algn="ctr">
               <a:buNone/>
             </a:pPr>
             <a:r>
@@ -9796,6 +9543,13 @@
             <a:prstDash val="solid"/>
           </a:ln>
         </p:spPr>
+        <p:txBody>
+          <a:bodyPr/>
+          <a:lstStyle/>
+          <a:p>
+            <a:endParaRPr lang="tr-TR"/>
+          </a:p>
+        </p:txBody>
       </p:sp>
       <p:sp>
         <p:nvSpPr>
@@ -9818,7 +9572,7 @@
           <a:bodyPr wrap="square" lIns="0" tIns="0" rIns="0" bIns="0" rtlCol="0" anchor="ctr"/>
           <a:lstStyle/>
           <a:p>
-            <a:pPr algn="ctr" indent="0" marL="0">
+            <a:pPr marL="0" indent="0" algn="ctr">
               <a:buNone/>
             </a:pPr>
             <a:r>
@@ -9857,7 +9611,7 @@
           <a:bodyPr wrap="square" lIns="0" tIns="0" rIns="0" bIns="0" rtlCol="0" anchor="ctr"/>
           <a:lstStyle/>
           <a:p>
-            <a:pPr algn="ctr" indent="0" marL="0">
+            <a:pPr marL="0" indent="0" algn="ctr">
               <a:buNone/>
             </a:pPr>
             <a:r>
@@ -9896,7 +9650,7 @@
           <a:bodyPr wrap="square" lIns="0" tIns="0" rIns="0" bIns="0" rtlCol="0" anchor="ctr"/>
           <a:lstStyle/>
           <a:p>
-            <a:pPr algn="ctr" indent="0" marL="0">
+            <a:pPr marL="0" indent="0" algn="ctr">
               <a:buNone/>
             </a:pPr>
             <a:r>
@@ -9938,6 +9692,13 @@
             <a:prstDash val="solid"/>
           </a:ln>
         </p:spPr>
+        <p:txBody>
+          <a:bodyPr/>
+          <a:lstStyle/>
+          <a:p>
+            <a:endParaRPr lang="tr-TR"/>
+          </a:p>
+        </p:txBody>
       </p:sp>
       <p:sp>
         <p:nvSpPr>
@@ -9960,7 +9721,7 @@
           <a:bodyPr wrap="square" lIns="0" tIns="0" rIns="0" bIns="0" rtlCol="0" anchor="ctr"/>
           <a:lstStyle/>
           <a:p>
-            <a:pPr algn="ctr" indent="0" marL="0">
+            <a:pPr marL="0" indent="0" algn="ctr">
               <a:buNone/>
             </a:pPr>
             <a:r>
@@ -9999,7 +9760,7 @@
           <a:bodyPr wrap="square" lIns="0" tIns="0" rIns="0" bIns="0" rtlCol="0" anchor="ctr"/>
           <a:lstStyle/>
           <a:p>
-            <a:pPr algn="ctr" indent="0" marL="0">
+            <a:pPr marL="0" indent="0" algn="ctr">
               <a:buNone/>
             </a:pPr>
             <a:r>
@@ -10038,7 +9799,7 @@
           <a:bodyPr wrap="square" lIns="0" tIns="0" rIns="0" bIns="0" rtlCol="0" anchor="ctr"/>
           <a:lstStyle/>
           <a:p>
-            <a:pPr algn="ctr" indent="0" marL="0">
+            <a:pPr marL="0" indent="0" algn="ctr">
               <a:buNone/>
             </a:pPr>
             <a:r>
@@ -10080,6 +9841,13 @@
             <a:prstDash val="solid"/>
           </a:ln>
         </p:spPr>
+        <p:txBody>
+          <a:bodyPr/>
+          <a:lstStyle/>
+          <a:p>
+            <a:endParaRPr lang="tr-TR"/>
+          </a:p>
+        </p:txBody>
       </p:sp>
       <p:sp>
         <p:nvSpPr>
@@ -10102,7 +9870,7 @@
           <a:bodyPr wrap="square" lIns="0" tIns="0" rIns="0" bIns="0" rtlCol="0" anchor="ctr"/>
           <a:lstStyle/>
           <a:p>
-            <a:pPr algn="ctr" indent="0" marL="0">
+            <a:pPr marL="0" indent="0" algn="ctr">
               <a:buNone/>
             </a:pPr>
             <a:r>
@@ -10141,7 +9909,7 @@
           <a:bodyPr wrap="square" lIns="0" tIns="0" rIns="0" bIns="0" rtlCol="0" anchor="ctr"/>
           <a:lstStyle/>
           <a:p>
-            <a:pPr algn="ctr" indent="0" marL="0">
+            <a:pPr marL="0" indent="0" algn="ctr">
               <a:buNone/>
             </a:pPr>
             <a:r>
@@ -10322,7 +10090,7 @@
           <a:bodyPr wrap="square" lIns="0" tIns="0" rIns="0" bIns="0" rtlCol="0" anchor="ctr"/>
           <a:lstStyle/>
           <a:p>
-            <a:pPr indent="0" marL="0">
+            <a:pPr marL="0" indent="0">
               <a:buNone/>
             </a:pPr>
             <a:r>
@@ -10361,7 +10129,7 @@
           <a:bodyPr wrap="square" lIns="0" tIns="0" rIns="0" bIns="0" rtlCol="0" anchor="ctr"/>
           <a:lstStyle/>
           <a:p>
-            <a:pPr algn="r" indent="0" marL="0">
+            <a:pPr marL="0" indent="0" algn="r">
               <a:buNone/>
             </a:pPr>
             <a:r>
@@ -10395,6 +10163,7 @@
         <a:solidFill>
           <a:srgbClr val="FFFFFF"/>
         </a:solidFill>
+        <a:effectLst/>
       </p:bgPr>
     </p:bg>
     <p:spTree>
@@ -10432,11 +10201,11 @@
           <a:bodyPr wrap="square" lIns="0" tIns="0" rIns="0" bIns="0" rtlCol="0" anchor="ctr"/>
           <a:lstStyle/>
           <a:p>
-            <a:pPr algn="l" indent="0" marL="0">
+            <a:pPr marL="0" indent="0" algn="l">
               <a:buNone/>
             </a:pPr>
             <a:r>
-              <a:rPr lang="en-US" sz="1200" b="1" spc="200" kern="0" dirty="0">
+              <a:rPr lang="en-US" sz="1200" b="1" kern="0" spc="200" dirty="0">
                 <a:solidFill>
                   <a:srgbClr val="B87A2E"/>
                 </a:solidFill>
@@ -10471,7 +10240,7 @@
           <a:bodyPr wrap="square" lIns="0" tIns="0" rIns="0" bIns="0" rtlCol="0" anchor="ctr"/>
           <a:lstStyle/>
           <a:p>
-            <a:pPr algn="l" indent="0" marL="0">
+            <a:pPr marL="0" indent="0" algn="l">
               <a:buNone/>
             </a:pPr>
             <a:r>
@@ -10513,6 +10282,13 @@
             <a:prstDash val="solid"/>
           </a:ln>
         </p:spPr>
+        <p:txBody>
+          <a:bodyPr/>
+          <a:lstStyle/>
+          <a:p>
+            <a:endParaRPr lang="tr-TR"/>
+          </a:p>
+        </p:txBody>
       </p:sp>
       <p:sp>
         <p:nvSpPr>
@@ -10535,7 +10311,7 @@
           <a:bodyPr wrap="square" lIns="0" tIns="0" rIns="0" bIns="0" rtlCol="0" anchor="ctr"/>
           <a:lstStyle/>
           <a:p>
-            <a:pPr indent="0" marL="0">
+            <a:pPr marL="0" indent="0">
               <a:buNone/>
             </a:pPr>
             <a:r>
@@ -10574,14 +10350,14 @@
           <a:bodyPr wrap="square" lIns="0" tIns="0" rIns="0" bIns="0" rtlCol="0" anchor="ctr"/>
           <a:lstStyle/>
           <a:p>
-            <a:pPr indent="0" marL="0">
+            <a:pPr marL="0" indent="0">
               <a:lnSpc>
                 <a:spcPct val="125000"/>
               </a:lnSpc>
               <a:buNone/>
             </a:pPr>
             <a:r>
-              <a:rPr lang="en-US" sz="1200" dirty="0">
+              <a:rPr lang="en-US" sz="1400" dirty="0">
                 <a:solidFill>
                   <a:srgbClr val="232323"/>
                 </a:solidFill>
@@ -10591,7 +10367,7 @@
               </a:rPr>
               <a:t>Docker build failed locally (read-only filesystem) — fixed by freeing disk space and relocating Docker's virtual disk.</a:t>
             </a:r>
-            <a:endParaRPr lang="en-US" sz="1200" dirty="0"/>
+            <a:endParaRPr lang="en-US" sz="1400" dirty="0"/>
           </a:p>
         </p:txBody>
       </p:sp>
@@ -10619,6 +10395,13 @@
             <a:prstDash val="solid"/>
           </a:ln>
         </p:spPr>
+        <p:txBody>
+          <a:bodyPr/>
+          <a:lstStyle/>
+          <a:p>
+            <a:endParaRPr lang="tr-TR"/>
+          </a:p>
+        </p:txBody>
       </p:sp>
       <p:sp>
         <p:nvSpPr>
@@ -10641,7 +10424,7 @@
           <a:bodyPr wrap="square" lIns="0" tIns="0" rIns="0" bIns="0" rtlCol="0" anchor="ctr"/>
           <a:lstStyle/>
           <a:p>
-            <a:pPr indent="0" marL="0">
+            <a:pPr marL="0" indent="0">
               <a:buNone/>
             </a:pPr>
             <a:r>
@@ -10680,14 +10463,14 @@
           <a:bodyPr wrap="square" lIns="0" tIns="0" rIns="0" bIns="0" rtlCol="0" anchor="ctr"/>
           <a:lstStyle/>
           <a:p>
-            <a:pPr indent="0" marL="0">
+            <a:pPr marL="0" indent="0">
               <a:lnSpc>
                 <a:spcPct val="125000"/>
               </a:lnSpc>
               <a:buNone/>
             </a:pPr>
             <a:r>
-              <a:rPr lang="en-US" sz="1200" dirty="0">
+              <a:rPr lang="en-US" sz="1400" dirty="0">
                 <a:solidFill>
                   <a:srgbClr val="232323"/>
                 </a:solidFill>
@@ -10697,7 +10480,7 @@
               </a:rPr>
               <a:t>Flask debug mode caused silent connection resets in production — fixed by setting debug=False.</a:t>
             </a:r>
-            <a:endParaRPr lang="en-US" sz="1200" dirty="0"/>
+            <a:endParaRPr lang="en-US" sz="1400" dirty="0"/>
           </a:p>
         </p:txBody>
       </p:sp>
@@ -10725,6 +10508,13 @@
             <a:prstDash val="solid"/>
           </a:ln>
         </p:spPr>
+        <p:txBody>
+          <a:bodyPr/>
+          <a:lstStyle/>
+          <a:p>
+            <a:endParaRPr lang="tr-TR"/>
+          </a:p>
+        </p:txBody>
       </p:sp>
       <p:sp>
         <p:nvSpPr>
@@ -10747,7 +10537,7 @@
           <a:bodyPr wrap="square" lIns="0" tIns="0" rIns="0" bIns="0" rtlCol="0" anchor="ctr"/>
           <a:lstStyle/>
           <a:p>
-            <a:pPr indent="0" marL="0">
+            <a:pPr marL="0" indent="0">
               <a:buNone/>
             </a:pPr>
             <a:r>
@@ -10786,14 +10576,14 @@
           <a:bodyPr wrap="square" lIns="0" tIns="0" rIns="0" bIns="0" rtlCol="0" anchor="ctr"/>
           <a:lstStyle/>
           <a:p>
-            <a:pPr indent="0" marL="0">
+            <a:pPr marL="0" indent="0">
               <a:lnSpc>
                 <a:spcPct val="125000"/>
               </a:lnSpc>
               <a:buNone/>
             </a:pPr>
             <a:r>
-              <a:rPr lang="en-US" sz="1200" dirty="0">
+              <a:rPr lang="en-US" sz="1400" dirty="0">
                 <a:solidFill>
                   <a:srgbClr val="232323"/>
                 </a:solidFill>
@@ -10803,7 +10593,7 @@
               </a:rPr>
               <a:t>Azure Portal's container wizard threw vague conflict errors — switching to the Azure CLI gave clear, fixable messages.</a:t>
             </a:r>
-            <a:endParaRPr lang="en-US" sz="1200" dirty="0"/>
+            <a:endParaRPr lang="en-US" sz="1400" dirty="0"/>
           </a:p>
         </p:txBody>
       </p:sp>
@@ -10831,6 +10621,13 @@
             <a:prstDash val="solid"/>
           </a:ln>
         </p:spPr>
+        <p:txBody>
+          <a:bodyPr/>
+          <a:lstStyle/>
+          <a:p>
+            <a:endParaRPr lang="tr-TR"/>
+          </a:p>
+        </p:txBody>
       </p:sp>
       <p:sp>
         <p:nvSpPr>
@@ -10853,7 +10650,7 @@
           <a:bodyPr wrap="square" lIns="0" tIns="0" rIns="0" bIns="0" rtlCol="0" anchor="ctr"/>
           <a:lstStyle/>
           <a:p>
-            <a:pPr indent="0" marL="0">
+            <a:pPr marL="0" indent="0">
               <a:buNone/>
             </a:pPr>
             <a:r>
@@ -10892,14 +10689,14 @@
           <a:bodyPr wrap="square" lIns="0" tIns="0" rIns="0" bIns="0" rtlCol="0" anchor="ctr"/>
           <a:lstStyle/>
           <a:p>
-            <a:pPr indent="0" marL="0">
+            <a:pPr marL="0" indent="0">
               <a:lnSpc>
                 <a:spcPct val="125000"/>
               </a:lnSpc>
               <a:buNone/>
             </a:pPr>
             <a:r>
-              <a:rPr lang="en-US" sz="1200" dirty="0">
+              <a:rPr lang="en-US" sz="1400" dirty="0">
                 <a:solidFill>
                   <a:srgbClr val="232323"/>
                 </a:solidFill>
@@ -10909,7 +10706,7 @@
               </a:rPr>
               <a:t>Browser demo couldn't read API responses until CORS was explicitly enabled.</a:t>
             </a:r>
-            <a:endParaRPr lang="en-US" sz="1200" dirty="0"/>
+            <a:endParaRPr lang="en-US" sz="1400" dirty="0"/>
           </a:p>
         </p:txBody>
       </p:sp>
@@ -10937,6 +10734,13 @@
             <a:prstDash val="solid"/>
           </a:ln>
         </p:spPr>
+        <p:txBody>
+          <a:bodyPr/>
+          <a:lstStyle/>
+          <a:p>
+            <a:endParaRPr lang="tr-TR"/>
+          </a:p>
+        </p:txBody>
       </p:sp>
       <p:sp>
         <p:nvSpPr>
@@ -10959,7 +10763,7 @@
           <a:bodyPr wrap="square" lIns="0" tIns="0" rIns="0" bIns="0" rtlCol="0" anchor="ctr"/>
           <a:lstStyle/>
           <a:p>
-            <a:pPr indent="0" marL="0">
+            <a:pPr marL="0" indent="0">
               <a:buNone/>
             </a:pPr>
             <a:r>
@@ -10998,14 +10802,14 @@
           <a:bodyPr wrap="square" lIns="0" tIns="0" rIns="0" bIns="0" rtlCol="0" anchor="ctr"/>
           <a:lstStyle/>
           <a:p>
-            <a:pPr indent="0" marL="0">
+            <a:pPr marL="0" indent="0">
               <a:lnSpc>
                 <a:spcPct val="125000"/>
               </a:lnSpc>
               <a:buNone/>
             </a:pPr>
             <a:r>
-              <a:rPr lang="en-US" sz="1200" dirty="0">
+              <a:rPr lang="en-US" sz="1400" dirty="0">
                 <a:solidFill>
                   <a:srgbClr val="232323"/>
                 </a:solidFill>
@@ -11015,7 +10819,7 @@
               </a:rPr>
               <a:t>19 raw labels → 6 categories left some classes smaller — addressed by reporting macro F1 alongside accuracy.</a:t>
             </a:r>
-            <a:endParaRPr lang="en-US" sz="1200" dirty="0"/>
+            <a:endParaRPr lang="en-US" sz="1400" dirty="0"/>
           </a:p>
         </p:txBody>
       </p:sp>
@@ -11040,7 +10844,7 @@
           <a:bodyPr wrap="square" lIns="0" tIns="0" rIns="0" bIns="0" rtlCol="0" anchor="ctr"/>
           <a:lstStyle/>
           <a:p>
-            <a:pPr indent="0" marL="0">
+            <a:pPr marL="0" indent="0">
               <a:buNone/>
             </a:pPr>
             <a:r>
@@ -11079,7 +10883,7 @@
           <a:bodyPr wrap="square" lIns="0" tIns="0" rIns="0" bIns="0" rtlCol="0" anchor="ctr"/>
           <a:lstStyle/>
           <a:p>
-            <a:pPr algn="r" indent="0" marL="0">
+            <a:pPr marL="0" indent="0" algn="r">
               <a:buNone/>
             </a:pPr>
             <a:r>
@@ -11094,6 +10898,58 @@
               <a:t>9</a:t>
             </a:r>
             <a:endParaRPr lang="en-US" sz="900" dirty="0"/>
+          </a:p>
+        </p:txBody>
+      </p:sp>
+      <p:sp>
+        <p:nvSpPr>
+          <p:cNvPr id="22" name="Shape 14">
+            <a:extLst>
+              <a:ext uri="{FF2B5EF4-FFF2-40B4-BE49-F238E27FC236}">
+                <a16:creationId xmlns:a16="http://schemas.microsoft.com/office/drawing/2014/main" id="{AE047DEC-7C85-580A-6F1D-A67D80588637}"/>
+              </a:ext>
+            </a:extLst>
+          </p:cNvPr>
+          <p:cNvSpPr/>
+          <p:nvPr/>
+        </p:nvSpPr>
+        <p:spPr>
+          <a:xfrm>
+            <a:off x="6278728" y="4723569"/>
+            <a:ext cx="5318608" cy="1298448"/>
+          </a:xfrm>
+          <a:prstGeom prst="rect">
+            <a:avLst/>
+          </a:prstGeom>
+          <a:solidFill>
+            <a:srgbClr val="F2F2EF"/>
+          </a:solidFill>
+          <a:ln w="12700">
+            <a:solidFill>
+              <a:srgbClr val="F2F2EF"/>
+            </a:solidFill>
+            <a:prstDash val="solid"/>
+          </a:ln>
+        </p:spPr>
+        <p:txBody>
+          <a:bodyPr/>
+          <a:lstStyle/>
+          <a:p>
+            <a:pPr>
+              <a:lnSpc>
+                <a:spcPct val="125000"/>
+              </a:lnSpc>
+            </a:pPr>
+            <a:r>
+              <a:rPr lang="en-US" sz="1400" dirty="0">
+                <a:solidFill>
+                  <a:srgbClr val="232323"/>
+                </a:solidFill>
+                <a:latin typeface="Calibri" pitchFamily="34" charset="0"/>
+                <a:cs typeface="Calibri" pitchFamily="34" charset="-120"/>
+              </a:rPr>
+              <a:t>Azure Container Instances doesn't terminate HTTPS, so an HTTPS demo page can't call it directly — the public demo runs against a local copy of the same image; the Azure endpoint itself is still live, verified via curl.</a:t>
+            </a:r>
           </a:p>
         </p:txBody>
       </p:sp>
@@ -11398,4 +11254,319 @@
     </a:ext>
   </a:extLst>
 </a:theme>
+</file>
+
+<file path=ppt/theme/theme2.xml><?xml version="1.0" encoding="utf-8"?>
+<a:theme xmlns:a="http://schemas.openxmlformats.org/drawingml/2006/main" name="Office Theme">
+  <a:themeElements>
+    <a:clrScheme name="Office">
+      <a:dk1>
+        <a:sysClr val="windowText" lastClr="000000"/>
+      </a:dk1>
+      <a:lt1>
+        <a:sysClr val="window" lastClr="FFFFFF"/>
+      </a:lt1>
+      <a:dk2>
+        <a:srgbClr val="0E2841"/>
+      </a:dk2>
+      <a:lt2>
+        <a:srgbClr val="E8E8E8"/>
+      </a:lt2>
+      <a:accent1>
+        <a:srgbClr val="156082"/>
+      </a:accent1>
+      <a:accent2>
+        <a:srgbClr val="E97132"/>
+      </a:accent2>
+      <a:accent3>
+        <a:srgbClr val="196B24"/>
+      </a:accent3>
+      <a:accent4>
+        <a:srgbClr val="0F9ED5"/>
+      </a:accent4>
+      <a:accent5>
+        <a:srgbClr val="A02B93"/>
+      </a:accent5>
+      <a:accent6>
+        <a:srgbClr val="4EA72E"/>
+      </a:accent6>
+      <a:hlink>
+        <a:srgbClr val="467886"/>
+      </a:hlink>
+      <a:folHlink>
+        <a:srgbClr val="96607D"/>
+      </a:folHlink>
+    </a:clrScheme>
+    <a:fontScheme name="Office">
+      <a:majorFont>
+        <a:latin typeface="Aptos Display" panose="02110004020202020204"/>
+        <a:ea typeface=""/>
+        <a:cs typeface=""/>
+        <a:font script="Jpan" typeface="游ゴシック Light"/>
+        <a:font script="Hang" typeface="맑은 고딕"/>
+        <a:font script="Hans" typeface="等线 Light"/>
+        <a:font script="Hant" typeface="新細明體"/>
+        <a:font script="Arab" typeface="Times New Roman"/>
+        <a:font script="Hebr" typeface="Times New Roman"/>
+        <a:font script="Thai" typeface="Angsana New"/>
+        <a:font script="Ethi" typeface="Nyala"/>
+        <a:font script="Beng" typeface="Vrinda"/>
+        <a:font script="Gujr" typeface="Shruti"/>
+        <a:font script="Khmr" typeface="MoolBoran"/>
+        <a:font script="Knda" typeface="Tunga"/>
+        <a:font script="Guru" typeface="Raavi"/>
+        <a:font script="Cans" typeface="Euphemia"/>
+        <a:font script="Cher" typeface="Plantagenet Cherokee"/>
+        <a:font script="Yiii" typeface="Microsoft Yi Baiti"/>
+        <a:font script="Tibt" typeface="Microsoft Himalaya"/>
+        <a:font script="Thaa" typeface="MV Boli"/>
+        <a:font script="Deva" typeface="Mangal"/>
+        <a:font script="Telu" typeface="Gautami"/>
+        <a:font script="Taml" typeface="Latha"/>
+        <a:font script="Syrc" typeface="Estrangelo Edessa"/>
+        <a:font script="Orya" typeface="Kalinga"/>
+        <a:font script="Mlym" typeface="Kartika"/>
+        <a:font script="Laoo" typeface="DokChampa"/>
+        <a:font script="Sinh" typeface="Iskoola Pota"/>
+        <a:font script="Mong" typeface="Mongolian Baiti"/>
+        <a:font script="Viet" typeface="Times New Roman"/>
+        <a:font script="Uigh" typeface="Microsoft Uighur"/>
+        <a:font script="Geor" typeface="Sylfaen"/>
+        <a:font script="Armn" typeface="Arial"/>
+        <a:font script="Bugi" typeface="Leelawadee UI"/>
+        <a:font script="Bopo" typeface="Microsoft JhengHei"/>
+        <a:font script="Java" typeface="Javanese Text"/>
+        <a:font script="Lisu" typeface="Segoe UI"/>
+        <a:font script="Mymr" typeface="Myanmar Text"/>
+        <a:font script="Nkoo" typeface="Ebrima"/>
+        <a:font script="Olck" typeface="Nirmala UI"/>
+        <a:font script="Osma" typeface="Ebrima"/>
+        <a:font script="Phag" typeface="Phagspa"/>
+        <a:font script="Syrn" typeface="Estrangelo Edessa"/>
+        <a:font script="Syrj" typeface="Estrangelo Edessa"/>
+        <a:font script="Syre" typeface="Estrangelo Edessa"/>
+        <a:font script="Sora" typeface="Nirmala UI"/>
+        <a:font script="Tale" typeface="Microsoft Tai Le"/>
+        <a:font script="Talu" typeface="Microsoft New Tai Lue"/>
+        <a:font script="Tfng" typeface="Ebrima"/>
+      </a:majorFont>
+      <a:minorFont>
+        <a:latin typeface="Aptos" panose="02110004020202020204"/>
+        <a:ea typeface=""/>
+        <a:cs typeface=""/>
+        <a:font script="Jpan" typeface="游ゴシック"/>
+        <a:font script="Hang" typeface="맑은 고딕"/>
+        <a:font script="Hans" typeface="等线"/>
+        <a:font script="Hant" typeface="新細明體"/>
+        <a:font script="Arab" typeface="Arial"/>
+        <a:font script="Hebr" typeface="Arial"/>
+        <a:font script="Thai" typeface="Cordia New"/>
+        <a:font script="Ethi" typeface="Nyala"/>
+        <a:font script="Beng" typeface="Vrinda"/>
+        <a:font script="Gujr" typeface="Shruti"/>
+        <a:font script="Khmr" typeface="DaunPenh"/>
+        <a:font script="Knda" typeface="Tunga"/>
+        <a:font script="Guru" typeface="Raavi"/>
+        <a:font script="Cans" typeface="Euphemia"/>
+        <a:font script="Cher" typeface="Plantagenet Cherokee"/>
+        <a:font script="Yiii" typeface="Microsoft Yi Baiti"/>
+        <a:font script="Tibt" typeface="Microsoft Himalaya"/>
+        <a:font script="Thaa" typeface="MV Boli"/>
+        <a:font script="Deva" typeface="Mangal"/>
+        <a:font script="Telu" typeface="Gautami"/>
+        <a:font script="Taml" typeface="Latha"/>
+        <a:font script="Syrc" typeface="Estrangelo Edessa"/>
+        <a:font script="Orya" typeface="Kalinga"/>
+        <a:font script="Mlym" typeface="Kartika"/>
+        <a:font script="Laoo" typeface="DokChampa"/>
+        <a:font script="Sinh" typeface="Iskoola Pota"/>
+        <a:font script="Mong" typeface="Mongolian Baiti"/>
+        <a:font script="Viet" typeface="Arial"/>
+        <a:font script="Uigh" typeface="Microsoft Uighur"/>
+        <a:font script="Geor" typeface="Sylfaen"/>
+        <a:font script="Armn" typeface="Arial"/>
+        <a:font script="Bugi" typeface="Leelawadee UI"/>
+        <a:font script="Bopo" typeface="Microsoft JhengHei"/>
+        <a:font script="Java" typeface="Javanese Text"/>
+        <a:font script="Lisu" typeface="Segoe UI"/>
+        <a:font script="Mymr" typeface="Myanmar Text"/>
+        <a:font script="Nkoo" typeface="Ebrima"/>
+        <a:font script="Olck" typeface="Nirmala UI"/>
+        <a:font script="Osma" typeface="Ebrima"/>
+        <a:font script="Phag" typeface="Phagspa"/>
+        <a:font script="Syrn" typeface="Estrangelo Edessa"/>
+        <a:font script="Syrj" typeface="Estrangelo Edessa"/>
+        <a:font script="Syre" typeface="Estrangelo Edessa"/>
+        <a:font script="Sora" typeface="Nirmala UI"/>
+        <a:font script="Tale" typeface="Microsoft Tai Le"/>
+        <a:font script="Talu" typeface="Microsoft New Tai Lue"/>
+        <a:font script="Tfng" typeface="Ebrima"/>
+      </a:minorFont>
+    </a:fontScheme>
+    <a:fmtScheme name="Office">
+      <a:fillStyleLst>
+        <a:solidFill>
+          <a:schemeClr val="phClr"/>
+        </a:solidFill>
+        <a:gradFill rotWithShape="1">
+          <a:gsLst>
+            <a:gs pos="0">
+              <a:schemeClr val="phClr">
+                <a:lumMod val="110000"/>
+                <a:satMod val="105000"/>
+                <a:tint val="67000"/>
+              </a:schemeClr>
+            </a:gs>
+            <a:gs pos="50000">
+              <a:schemeClr val="phClr">
+                <a:lumMod val="105000"/>
+                <a:satMod val="103000"/>
+                <a:tint val="73000"/>
+              </a:schemeClr>
+            </a:gs>
+            <a:gs pos="100000">
+              <a:schemeClr val="phClr">
+                <a:lumMod val="105000"/>
+                <a:satMod val="109000"/>
+                <a:tint val="81000"/>
+              </a:schemeClr>
+            </a:gs>
+          </a:gsLst>
+          <a:lin ang="5400000" scaled="0"/>
+        </a:gradFill>
+        <a:gradFill rotWithShape="1">
+          <a:gsLst>
+            <a:gs pos="0">
+              <a:schemeClr val="phClr">
+                <a:satMod val="103000"/>
+                <a:lumMod val="102000"/>
+                <a:tint val="94000"/>
+              </a:schemeClr>
+            </a:gs>
+            <a:gs pos="50000">
+              <a:schemeClr val="phClr">
+                <a:satMod val="110000"/>
+                <a:lumMod val="100000"/>
+                <a:shade val="100000"/>
+              </a:schemeClr>
+            </a:gs>
+            <a:gs pos="100000">
+              <a:schemeClr val="phClr">
+                <a:lumMod val="99000"/>
+                <a:satMod val="120000"/>
+                <a:shade val="78000"/>
+              </a:schemeClr>
+            </a:gs>
+          </a:gsLst>
+          <a:lin ang="5400000" scaled="0"/>
+        </a:gradFill>
+      </a:fillStyleLst>
+      <a:lnStyleLst>
+        <a:ln w="12700" cap="flat" cmpd="sng" algn="ctr">
+          <a:solidFill>
+            <a:schemeClr val="phClr"/>
+          </a:solidFill>
+          <a:prstDash val="solid"/>
+          <a:miter lim="800000"/>
+        </a:ln>
+        <a:ln w="19050" cap="flat" cmpd="sng" algn="ctr">
+          <a:solidFill>
+            <a:schemeClr val="phClr"/>
+          </a:solidFill>
+          <a:prstDash val="solid"/>
+          <a:miter lim="800000"/>
+        </a:ln>
+        <a:ln w="25400" cap="flat" cmpd="sng" algn="ctr">
+          <a:solidFill>
+            <a:schemeClr val="phClr"/>
+          </a:solidFill>
+          <a:prstDash val="solid"/>
+          <a:miter lim="800000"/>
+        </a:ln>
+      </a:lnStyleLst>
+      <a:effectStyleLst>
+        <a:effectStyle>
+          <a:effectLst/>
+        </a:effectStyle>
+        <a:effectStyle>
+          <a:effectLst/>
+        </a:effectStyle>
+        <a:effectStyle>
+          <a:effectLst>
+            <a:outerShdw blurRad="57150" dist="19050" dir="5400000" algn="ctr" rotWithShape="0">
+              <a:srgbClr val="000000">
+                <a:alpha val="63000"/>
+              </a:srgbClr>
+            </a:outerShdw>
+          </a:effectLst>
+        </a:effectStyle>
+      </a:effectStyleLst>
+      <a:bgFillStyleLst>
+        <a:solidFill>
+          <a:schemeClr val="phClr"/>
+        </a:solidFill>
+        <a:solidFill>
+          <a:schemeClr val="phClr">
+            <a:tint val="95000"/>
+            <a:satMod val="170000"/>
+          </a:schemeClr>
+        </a:solidFill>
+        <a:gradFill rotWithShape="1">
+          <a:gsLst>
+            <a:gs pos="0">
+              <a:schemeClr val="phClr">
+                <a:tint val="93000"/>
+                <a:satMod val="150000"/>
+                <a:shade val="98000"/>
+                <a:lumMod val="102000"/>
+              </a:schemeClr>
+            </a:gs>
+            <a:gs pos="50000">
+              <a:schemeClr val="phClr">
+                <a:tint val="98000"/>
+                <a:satMod val="130000"/>
+                <a:shade val="90000"/>
+                <a:lumMod val="103000"/>
+              </a:schemeClr>
+            </a:gs>
+            <a:gs pos="100000">
+              <a:schemeClr val="phClr">
+                <a:shade val="63000"/>
+                <a:satMod val="120000"/>
+              </a:schemeClr>
+            </a:gs>
+          </a:gsLst>
+          <a:lin ang="5400000" scaled="0"/>
+        </a:gradFill>
+      </a:bgFillStyleLst>
+    </a:fmtScheme>
+  </a:themeElements>
+  <a:objectDefaults>
+    <a:lnDef>
+      <a:spPr/>
+      <a:bodyPr/>
+      <a:lstStyle/>
+      <a:style>
+        <a:lnRef idx="2">
+          <a:schemeClr val="accent1"/>
+        </a:lnRef>
+        <a:fillRef idx="0">
+          <a:schemeClr val="accent1"/>
+        </a:fillRef>
+        <a:effectRef idx="1">
+          <a:schemeClr val="accent1"/>
+        </a:effectRef>
+        <a:fontRef idx="minor">
+          <a:schemeClr val="tx1"/>
+        </a:fontRef>
+      </a:style>
+    </a:lnDef>
+  </a:objectDefaults>
+  <a:extraClrSchemeLst/>
+  <a:extLst>
+    <a:ext uri="{05A4C25C-085E-4340-85A3-A5531E510DB2}">
+      <thm15:themeFamily xmlns:thm15="http://schemas.microsoft.com/office/thememl/2012/main" name="Office Theme" id="{2E142A2C-CD16-42D6-873A-C26D2A0506FA}" vid="{1BDDFF52-6CD6-40A5-AB3C-68EB2F1E4D0A}"/>
+    </a:ext>
+  </a:extLst>
+</a:theme>
 </file>